--- a/Jeopardy 5th Grade.pptx
+++ b/Jeopardy 5th Grade.pptx
@@ -9090,7 +9090,7 @@
         <p:spPr>
           <a:xfrm>
             <a:off x="1130968" y="405068"/>
-            <a:ext cx="10170694" cy="4524315"/>
+            <a:ext cx="10170694" cy="6093976"/>
           </a:xfrm>
           <a:prstGeom prst="rect">
             <a:avLst/>
@@ -9120,12 +9120,24 @@
           <a:p>
             <a:pPr algn="ctr"/>
             <a:r>
-              <a:rPr kumimoji="1" lang="en-US" altLang="ja-JP" sz="9600" dirty="0">
+              <a:rPr kumimoji="1" lang="en-US" altLang="ja-JP" sz="6600" dirty="0">
                 <a:latin typeface="Impact" panose="020B0806030902050204" pitchFamily="34" charset="0"/>
               </a:rPr>
-              <a:t>B-R-A-N-D-O-N</a:t>
-            </a:r>
-            <a:endParaRPr kumimoji="1" lang="ja-JP" altLang="en-US" sz="9600" dirty="0">
+              <a:t>Monday, Tuesday, Wednesday, </a:t>
+            </a:r>
+            <a:r>
+              <a:rPr kumimoji="1" lang="en-US" altLang="ja-JP" sz="6600" dirty="0" err="1">
+                <a:latin typeface="Impact" panose="020B0806030902050204" pitchFamily="34" charset="0"/>
+              </a:rPr>
+              <a:t>Thrusday</a:t>
+            </a:r>
+            <a:r>
+              <a:rPr kumimoji="1" lang="en-US" altLang="ja-JP" sz="6600" dirty="0">
+                <a:latin typeface="Impact" panose="020B0806030902050204" pitchFamily="34" charset="0"/>
+              </a:rPr>
+              <a:t>, Friday, Saturday, Sunday</a:t>
+            </a:r>
+            <a:endParaRPr kumimoji="1" lang="ja-JP" altLang="en-US" sz="6600" dirty="0">
               <a:latin typeface="Impact" panose="020B0806030902050204" pitchFamily="34" charset="0"/>
             </a:endParaRPr>
           </a:p>
@@ -9400,6 +9412,160 @@
           </a:p>
         </p:txBody>
       </p:sp>
+      <p:sp>
+        <p:nvSpPr>
+          <p:cNvPr id="8" name="楕円 7">
+            <a:extLst>
+              <a:ext uri="{FF2B5EF4-FFF2-40B4-BE49-F238E27FC236}">
+                <a16:creationId xmlns:a16="http://schemas.microsoft.com/office/drawing/2014/main" id="{158C5078-CEEE-400C-A647-79C290E1ECB9}"/>
+              </a:ext>
+            </a:extLst>
+          </p:cNvPr>
+          <p:cNvSpPr/>
+          <p:nvPr/>
+        </p:nvSpPr>
+        <p:spPr>
+          <a:xfrm>
+            <a:off x="1185445" y="486278"/>
+            <a:ext cx="876300" cy="876300"/>
+          </a:xfrm>
+          <a:prstGeom prst="ellipse">
+            <a:avLst/>
+          </a:prstGeom>
+          <a:solidFill>
+            <a:srgbClr val="FF0000"/>
+          </a:solidFill>
+          <a:ln>
+            <a:solidFill>
+              <a:schemeClr val="bg1"/>
+            </a:solidFill>
+          </a:ln>
+        </p:spPr>
+        <p:style>
+          <a:lnRef idx="2">
+            <a:schemeClr val="dk1"/>
+          </a:lnRef>
+          <a:fillRef idx="1">
+            <a:schemeClr val="lt1"/>
+          </a:fillRef>
+          <a:effectRef idx="0">
+            <a:schemeClr val="dk1"/>
+          </a:effectRef>
+          <a:fontRef idx="minor">
+            <a:schemeClr val="dk1"/>
+          </a:fontRef>
+        </p:style>
+        <p:txBody>
+          <a:bodyPr rtlCol="0" anchor="ctr"/>
+          <a:lstStyle/>
+          <a:p>
+            <a:pPr algn="ctr"/>
+            <a:endParaRPr kumimoji="1" lang="ja-JP" altLang="en-US"/>
+          </a:p>
+        </p:txBody>
+      </p:sp>
+      <p:sp>
+        <p:nvSpPr>
+          <p:cNvPr id="9" name="楕円 8">
+            <a:extLst>
+              <a:ext uri="{FF2B5EF4-FFF2-40B4-BE49-F238E27FC236}">
+                <a16:creationId xmlns:a16="http://schemas.microsoft.com/office/drawing/2014/main" id="{2AE27688-EB39-4562-B4F1-9E85DCF4A2FC}"/>
+              </a:ext>
+            </a:extLst>
+          </p:cNvPr>
+          <p:cNvSpPr/>
+          <p:nvPr/>
+        </p:nvSpPr>
+        <p:spPr>
+          <a:xfrm>
+            <a:off x="1185445" y="486278"/>
+            <a:ext cx="876300" cy="876300"/>
+          </a:xfrm>
+          <a:prstGeom prst="ellipse">
+            <a:avLst/>
+          </a:prstGeom>
+          <a:solidFill>
+            <a:srgbClr val="00B050"/>
+          </a:solidFill>
+          <a:ln>
+            <a:solidFill>
+              <a:schemeClr val="bg1"/>
+            </a:solidFill>
+          </a:ln>
+        </p:spPr>
+        <p:style>
+          <a:lnRef idx="2">
+            <a:schemeClr val="dk1"/>
+          </a:lnRef>
+          <a:fillRef idx="1">
+            <a:schemeClr val="lt1"/>
+          </a:fillRef>
+          <a:effectRef idx="0">
+            <a:schemeClr val="dk1"/>
+          </a:effectRef>
+          <a:fontRef idx="minor">
+            <a:schemeClr val="dk1"/>
+          </a:fontRef>
+        </p:style>
+        <p:txBody>
+          <a:bodyPr rtlCol="0" anchor="ctr"/>
+          <a:lstStyle/>
+          <a:p>
+            <a:pPr algn="ctr"/>
+            <a:endParaRPr kumimoji="1" lang="en-US" altLang="ja-JP" dirty="0"/>
+          </a:p>
+        </p:txBody>
+      </p:sp>
+      <p:sp>
+        <p:nvSpPr>
+          <p:cNvPr id="10" name="楕円 9">
+            <a:extLst>
+              <a:ext uri="{FF2B5EF4-FFF2-40B4-BE49-F238E27FC236}">
+                <a16:creationId xmlns:a16="http://schemas.microsoft.com/office/drawing/2014/main" id="{3D9F7A87-16BF-41AC-994F-F587F170F048}"/>
+              </a:ext>
+            </a:extLst>
+          </p:cNvPr>
+          <p:cNvSpPr/>
+          <p:nvPr/>
+        </p:nvSpPr>
+        <p:spPr>
+          <a:xfrm>
+            <a:off x="1185445" y="486278"/>
+            <a:ext cx="876300" cy="876300"/>
+          </a:xfrm>
+          <a:prstGeom prst="ellipse">
+            <a:avLst/>
+          </a:prstGeom>
+          <a:noFill/>
+          <a:ln>
+            <a:solidFill>
+              <a:schemeClr val="bg1"/>
+            </a:solidFill>
+          </a:ln>
+        </p:spPr>
+        <p:style>
+          <a:lnRef idx="2">
+            <a:schemeClr val="dk1"/>
+          </a:lnRef>
+          <a:fillRef idx="1">
+            <a:schemeClr val="lt1"/>
+          </a:fillRef>
+          <a:effectRef idx="0">
+            <a:schemeClr val="dk1"/>
+          </a:effectRef>
+          <a:fontRef idx="minor">
+            <a:schemeClr val="dk1"/>
+          </a:fontRef>
+        </p:style>
+        <p:txBody>
+          <a:bodyPr rtlCol="0" anchor="ctr"/>
+          <a:lstStyle/>
+          <a:p>
+            <a:pPr algn="ctr"/>
+            <a:endParaRPr kumimoji="1" lang="ja-JP" altLang="en-US"/>
+          </a:p>
+        </p:txBody>
+      </p:sp>
     </p:spTree>
     <p:extLst>
       <p:ext uri="{BB962C8B-B14F-4D97-AF65-F5344CB8AC3E}">
@@ -9410,6 +9576,102 @@
   <p:clrMapOvr>
     <a:masterClrMapping/>
   </p:clrMapOvr>
+  <p:timing>
+    <p:tnLst>
+      <p:par>
+        <p:cTn id="1" dur="indefinite" restart="never" nodeType="tmRoot">
+          <p:childTnLst>
+            <p:seq concurrent="1" nextAc="seek">
+              <p:cTn id="2" dur="indefinite" nodeType="mainSeq">
+                <p:childTnLst>
+                  <p:par>
+                    <p:cTn id="3" fill="hold">
+                      <p:stCondLst>
+                        <p:cond delay="indefinite"/>
+                        <p:cond evt="onBegin" delay="0">
+                          <p:tn val="2"/>
+                        </p:cond>
+                      </p:stCondLst>
+                      <p:childTnLst>
+                        <p:par>
+                          <p:cTn id="4" fill="hold">
+                            <p:stCondLst>
+                              <p:cond delay="0"/>
+                            </p:stCondLst>
+                            <p:childTnLst>
+                              <p:par>
+                                <p:cTn id="5" presetID="21" presetClass="exit" presetSubtype="1" repeatCount="indefinite" fill="hold" grpId="0" nodeType="afterEffect">
+                                  <p:stCondLst>
+                                    <p:cond delay="3000"/>
+                                  </p:stCondLst>
+                                  <p:endCondLst>
+                                    <p:cond evt="onNext" delay="0">
+                                      <p:tgtEl>
+                                        <p:sldTgt/>
+                                      </p:tgtEl>
+                                    </p:cond>
+                                  </p:endCondLst>
+                                  <p:childTnLst>
+                                    <p:animEffect transition="out" filter="wheel(1)">
+                                      <p:cBhvr>
+                                        <p:cTn id="6" dur="15000"/>
+                                        <p:tgtEl>
+                                          <p:spTgt spid="9"/>
+                                        </p:tgtEl>
+                                      </p:cBhvr>
+                                    </p:animEffect>
+                                    <p:set>
+                                      <p:cBhvr>
+                                        <p:cTn id="7" dur="1" fill="hold">
+                                          <p:stCondLst>
+                                            <p:cond delay="14999"/>
+                                          </p:stCondLst>
+                                        </p:cTn>
+                                        <p:tgtEl>
+                                          <p:spTgt spid="9"/>
+                                        </p:tgtEl>
+                                        <p:attrNameLst>
+                                          <p:attrName>style.visibility</p:attrName>
+                                        </p:attrNameLst>
+                                      </p:cBhvr>
+                                      <p:to>
+                                        <p:strVal val="hidden"/>
+                                      </p:to>
+                                    </p:set>
+                                  </p:childTnLst>
+                                </p:cTn>
+                              </p:par>
+                            </p:childTnLst>
+                          </p:cTn>
+                        </p:par>
+                      </p:childTnLst>
+                    </p:cTn>
+                  </p:par>
+                </p:childTnLst>
+              </p:cTn>
+              <p:prevCondLst>
+                <p:cond evt="onPrev" delay="0">
+                  <p:tgtEl>
+                    <p:sldTgt/>
+                  </p:tgtEl>
+                </p:cond>
+              </p:prevCondLst>
+              <p:nextCondLst>
+                <p:cond evt="onNext" delay="0">
+                  <p:tgtEl>
+                    <p:sldTgt/>
+                  </p:tgtEl>
+                </p:cond>
+              </p:nextCondLst>
+            </p:seq>
+          </p:childTnLst>
+        </p:cTn>
+      </p:par>
+    </p:tnLst>
+    <p:bldLst>
+      <p:bldP spid="9" grpId="0" animBg="1"/>
+    </p:bldLst>
+  </p:timing>
 </p:sld>
 </file>
 
@@ -9900,6 +10162,160 @@
           </a:extLst>
         </p:spPr>
       </p:pic>
+      <p:sp>
+        <p:nvSpPr>
+          <p:cNvPr id="7" name="楕円 6">
+            <a:extLst>
+              <a:ext uri="{FF2B5EF4-FFF2-40B4-BE49-F238E27FC236}">
+                <a16:creationId xmlns:a16="http://schemas.microsoft.com/office/drawing/2014/main" id="{D01BEF3E-93BB-43DE-9509-20859AE2BBE9}"/>
+              </a:ext>
+            </a:extLst>
+          </p:cNvPr>
+          <p:cNvSpPr/>
+          <p:nvPr/>
+        </p:nvSpPr>
+        <p:spPr>
+          <a:xfrm>
+            <a:off x="1185445" y="486278"/>
+            <a:ext cx="876300" cy="876300"/>
+          </a:xfrm>
+          <a:prstGeom prst="ellipse">
+            <a:avLst/>
+          </a:prstGeom>
+          <a:solidFill>
+            <a:srgbClr val="FF0000"/>
+          </a:solidFill>
+          <a:ln>
+            <a:solidFill>
+              <a:schemeClr val="bg1"/>
+            </a:solidFill>
+          </a:ln>
+        </p:spPr>
+        <p:style>
+          <a:lnRef idx="2">
+            <a:schemeClr val="dk1"/>
+          </a:lnRef>
+          <a:fillRef idx="1">
+            <a:schemeClr val="lt1"/>
+          </a:fillRef>
+          <a:effectRef idx="0">
+            <a:schemeClr val="dk1"/>
+          </a:effectRef>
+          <a:fontRef idx="minor">
+            <a:schemeClr val="dk1"/>
+          </a:fontRef>
+        </p:style>
+        <p:txBody>
+          <a:bodyPr rtlCol="0" anchor="ctr"/>
+          <a:lstStyle/>
+          <a:p>
+            <a:pPr algn="ctr"/>
+            <a:endParaRPr kumimoji="1" lang="ja-JP" altLang="en-US"/>
+          </a:p>
+        </p:txBody>
+      </p:sp>
+      <p:sp>
+        <p:nvSpPr>
+          <p:cNvPr id="8" name="楕円 7">
+            <a:extLst>
+              <a:ext uri="{FF2B5EF4-FFF2-40B4-BE49-F238E27FC236}">
+                <a16:creationId xmlns:a16="http://schemas.microsoft.com/office/drawing/2014/main" id="{9EBC46A1-AD95-4D70-8218-FDF97C95AB79}"/>
+              </a:ext>
+            </a:extLst>
+          </p:cNvPr>
+          <p:cNvSpPr/>
+          <p:nvPr/>
+        </p:nvSpPr>
+        <p:spPr>
+          <a:xfrm>
+            <a:off x="1185445" y="486278"/>
+            <a:ext cx="876300" cy="876300"/>
+          </a:xfrm>
+          <a:prstGeom prst="ellipse">
+            <a:avLst/>
+          </a:prstGeom>
+          <a:solidFill>
+            <a:srgbClr val="00B050"/>
+          </a:solidFill>
+          <a:ln>
+            <a:solidFill>
+              <a:schemeClr val="bg1"/>
+            </a:solidFill>
+          </a:ln>
+        </p:spPr>
+        <p:style>
+          <a:lnRef idx="2">
+            <a:schemeClr val="dk1"/>
+          </a:lnRef>
+          <a:fillRef idx="1">
+            <a:schemeClr val="lt1"/>
+          </a:fillRef>
+          <a:effectRef idx="0">
+            <a:schemeClr val="dk1"/>
+          </a:effectRef>
+          <a:fontRef idx="minor">
+            <a:schemeClr val="dk1"/>
+          </a:fontRef>
+        </p:style>
+        <p:txBody>
+          <a:bodyPr rtlCol="0" anchor="ctr"/>
+          <a:lstStyle/>
+          <a:p>
+            <a:pPr algn="ctr"/>
+            <a:endParaRPr kumimoji="1" lang="en-US" altLang="ja-JP" dirty="0"/>
+          </a:p>
+        </p:txBody>
+      </p:sp>
+      <p:sp>
+        <p:nvSpPr>
+          <p:cNvPr id="9" name="楕円 8">
+            <a:extLst>
+              <a:ext uri="{FF2B5EF4-FFF2-40B4-BE49-F238E27FC236}">
+                <a16:creationId xmlns:a16="http://schemas.microsoft.com/office/drawing/2014/main" id="{520D191F-BD92-4F41-A282-6A013F9C88D8}"/>
+              </a:ext>
+            </a:extLst>
+          </p:cNvPr>
+          <p:cNvSpPr/>
+          <p:nvPr/>
+        </p:nvSpPr>
+        <p:spPr>
+          <a:xfrm>
+            <a:off x="1185445" y="486278"/>
+            <a:ext cx="876300" cy="876300"/>
+          </a:xfrm>
+          <a:prstGeom prst="ellipse">
+            <a:avLst/>
+          </a:prstGeom>
+          <a:noFill/>
+          <a:ln>
+            <a:solidFill>
+              <a:schemeClr val="bg1"/>
+            </a:solidFill>
+          </a:ln>
+        </p:spPr>
+        <p:style>
+          <a:lnRef idx="2">
+            <a:schemeClr val="dk1"/>
+          </a:lnRef>
+          <a:fillRef idx="1">
+            <a:schemeClr val="lt1"/>
+          </a:fillRef>
+          <a:effectRef idx="0">
+            <a:schemeClr val="dk1"/>
+          </a:effectRef>
+          <a:fontRef idx="minor">
+            <a:schemeClr val="dk1"/>
+          </a:fontRef>
+        </p:style>
+        <p:txBody>
+          <a:bodyPr rtlCol="0" anchor="ctr"/>
+          <a:lstStyle/>
+          <a:p>
+            <a:pPr algn="ctr"/>
+            <a:endParaRPr kumimoji="1" lang="ja-JP" altLang="en-US"/>
+          </a:p>
+        </p:txBody>
+      </p:sp>
     </p:spTree>
     <p:extLst>
       <p:ext uri="{BB962C8B-B14F-4D97-AF65-F5344CB8AC3E}">
@@ -9910,6 +10326,102 @@
   <p:clrMapOvr>
     <a:masterClrMapping/>
   </p:clrMapOvr>
+  <p:timing>
+    <p:tnLst>
+      <p:par>
+        <p:cTn id="1" dur="indefinite" restart="never" nodeType="tmRoot">
+          <p:childTnLst>
+            <p:seq concurrent="1" nextAc="seek">
+              <p:cTn id="2" dur="indefinite" nodeType="mainSeq">
+                <p:childTnLst>
+                  <p:par>
+                    <p:cTn id="3" fill="hold">
+                      <p:stCondLst>
+                        <p:cond delay="indefinite"/>
+                        <p:cond evt="onBegin" delay="0">
+                          <p:tn val="2"/>
+                        </p:cond>
+                      </p:stCondLst>
+                      <p:childTnLst>
+                        <p:par>
+                          <p:cTn id="4" fill="hold">
+                            <p:stCondLst>
+                              <p:cond delay="0"/>
+                            </p:stCondLst>
+                            <p:childTnLst>
+                              <p:par>
+                                <p:cTn id="5" presetID="21" presetClass="exit" presetSubtype="1" repeatCount="indefinite" fill="hold" grpId="0" nodeType="afterEffect">
+                                  <p:stCondLst>
+                                    <p:cond delay="3000"/>
+                                  </p:stCondLst>
+                                  <p:endCondLst>
+                                    <p:cond evt="onNext" delay="0">
+                                      <p:tgtEl>
+                                        <p:sldTgt/>
+                                      </p:tgtEl>
+                                    </p:cond>
+                                  </p:endCondLst>
+                                  <p:childTnLst>
+                                    <p:animEffect transition="out" filter="wheel(1)">
+                                      <p:cBhvr>
+                                        <p:cTn id="6" dur="15000"/>
+                                        <p:tgtEl>
+                                          <p:spTgt spid="8"/>
+                                        </p:tgtEl>
+                                      </p:cBhvr>
+                                    </p:animEffect>
+                                    <p:set>
+                                      <p:cBhvr>
+                                        <p:cTn id="7" dur="1" fill="hold">
+                                          <p:stCondLst>
+                                            <p:cond delay="14999"/>
+                                          </p:stCondLst>
+                                        </p:cTn>
+                                        <p:tgtEl>
+                                          <p:spTgt spid="8"/>
+                                        </p:tgtEl>
+                                        <p:attrNameLst>
+                                          <p:attrName>style.visibility</p:attrName>
+                                        </p:attrNameLst>
+                                      </p:cBhvr>
+                                      <p:to>
+                                        <p:strVal val="hidden"/>
+                                      </p:to>
+                                    </p:set>
+                                  </p:childTnLst>
+                                </p:cTn>
+                              </p:par>
+                            </p:childTnLst>
+                          </p:cTn>
+                        </p:par>
+                      </p:childTnLst>
+                    </p:cTn>
+                  </p:par>
+                </p:childTnLst>
+              </p:cTn>
+              <p:prevCondLst>
+                <p:cond evt="onPrev" delay="0">
+                  <p:tgtEl>
+                    <p:sldTgt/>
+                  </p:tgtEl>
+                </p:cond>
+              </p:prevCondLst>
+              <p:nextCondLst>
+                <p:cond evt="onNext" delay="0">
+                  <p:tgtEl>
+                    <p:sldTgt/>
+                  </p:tgtEl>
+                </p:cond>
+              </p:nextCondLst>
+            </p:seq>
+          </p:childTnLst>
+        </p:cTn>
+      </p:par>
+    </p:tnLst>
+    <p:bldLst>
+      <p:bldP spid="8" grpId="0" animBg="1"/>
+    </p:bldLst>
+  </p:timing>
 </p:sld>
 </file>
 
@@ -10444,6 +10956,160 @@
           </a:extLst>
         </p:spPr>
       </p:pic>
+      <p:sp>
+        <p:nvSpPr>
+          <p:cNvPr id="11" name="楕円 10">
+            <a:extLst>
+              <a:ext uri="{FF2B5EF4-FFF2-40B4-BE49-F238E27FC236}">
+                <a16:creationId xmlns:a16="http://schemas.microsoft.com/office/drawing/2014/main" id="{72AF1BDF-AA88-4A09-8E64-6A7EBAB8C276}"/>
+              </a:ext>
+            </a:extLst>
+          </p:cNvPr>
+          <p:cNvSpPr/>
+          <p:nvPr/>
+        </p:nvSpPr>
+        <p:spPr>
+          <a:xfrm>
+            <a:off x="1185445" y="486278"/>
+            <a:ext cx="876300" cy="876300"/>
+          </a:xfrm>
+          <a:prstGeom prst="ellipse">
+            <a:avLst/>
+          </a:prstGeom>
+          <a:solidFill>
+            <a:srgbClr val="FF0000"/>
+          </a:solidFill>
+          <a:ln>
+            <a:solidFill>
+              <a:schemeClr val="bg1"/>
+            </a:solidFill>
+          </a:ln>
+        </p:spPr>
+        <p:style>
+          <a:lnRef idx="2">
+            <a:schemeClr val="dk1"/>
+          </a:lnRef>
+          <a:fillRef idx="1">
+            <a:schemeClr val="lt1"/>
+          </a:fillRef>
+          <a:effectRef idx="0">
+            <a:schemeClr val="dk1"/>
+          </a:effectRef>
+          <a:fontRef idx="minor">
+            <a:schemeClr val="dk1"/>
+          </a:fontRef>
+        </p:style>
+        <p:txBody>
+          <a:bodyPr rtlCol="0" anchor="ctr"/>
+          <a:lstStyle/>
+          <a:p>
+            <a:pPr algn="ctr"/>
+            <a:endParaRPr kumimoji="1" lang="ja-JP" altLang="en-US"/>
+          </a:p>
+        </p:txBody>
+      </p:sp>
+      <p:sp>
+        <p:nvSpPr>
+          <p:cNvPr id="12" name="楕円 11">
+            <a:extLst>
+              <a:ext uri="{FF2B5EF4-FFF2-40B4-BE49-F238E27FC236}">
+                <a16:creationId xmlns:a16="http://schemas.microsoft.com/office/drawing/2014/main" id="{2BDE27B1-7465-42D2-9DF4-455701FD21A9}"/>
+              </a:ext>
+            </a:extLst>
+          </p:cNvPr>
+          <p:cNvSpPr/>
+          <p:nvPr/>
+        </p:nvSpPr>
+        <p:spPr>
+          <a:xfrm>
+            <a:off x="1185445" y="486278"/>
+            <a:ext cx="876300" cy="876300"/>
+          </a:xfrm>
+          <a:prstGeom prst="ellipse">
+            <a:avLst/>
+          </a:prstGeom>
+          <a:solidFill>
+            <a:srgbClr val="00B050"/>
+          </a:solidFill>
+          <a:ln>
+            <a:solidFill>
+              <a:schemeClr val="bg1"/>
+            </a:solidFill>
+          </a:ln>
+        </p:spPr>
+        <p:style>
+          <a:lnRef idx="2">
+            <a:schemeClr val="dk1"/>
+          </a:lnRef>
+          <a:fillRef idx="1">
+            <a:schemeClr val="lt1"/>
+          </a:fillRef>
+          <a:effectRef idx="0">
+            <a:schemeClr val="dk1"/>
+          </a:effectRef>
+          <a:fontRef idx="minor">
+            <a:schemeClr val="dk1"/>
+          </a:fontRef>
+        </p:style>
+        <p:txBody>
+          <a:bodyPr rtlCol="0" anchor="ctr"/>
+          <a:lstStyle/>
+          <a:p>
+            <a:pPr algn="ctr"/>
+            <a:endParaRPr kumimoji="1" lang="en-US" altLang="ja-JP" dirty="0"/>
+          </a:p>
+        </p:txBody>
+      </p:sp>
+      <p:sp>
+        <p:nvSpPr>
+          <p:cNvPr id="13" name="楕円 12">
+            <a:extLst>
+              <a:ext uri="{FF2B5EF4-FFF2-40B4-BE49-F238E27FC236}">
+                <a16:creationId xmlns:a16="http://schemas.microsoft.com/office/drawing/2014/main" id="{C743739F-DE79-45E2-AA78-22E23F5726A3}"/>
+              </a:ext>
+            </a:extLst>
+          </p:cNvPr>
+          <p:cNvSpPr/>
+          <p:nvPr/>
+        </p:nvSpPr>
+        <p:spPr>
+          <a:xfrm>
+            <a:off x="1185445" y="486278"/>
+            <a:ext cx="876300" cy="876300"/>
+          </a:xfrm>
+          <a:prstGeom prst="ellipse">
+            <a:avLst/>
+          </a:prstGeom>
+          <a:noFill/>
+          <a:ln>
+            <a:solidFill>
+              <a:schemeClr val="bg1"/>
+            </a:solidFill>
+          </a:ln>
+        </p:spPr>
+        <p:style>
+          <a:lnRef idx="2">
+            <a:schemeClr val="dk1"/>
+          </a:lnRef>
+          <a:fillRef idx="1">
+            <a:schemeClr val="lt1"/>
+          </a:fillRef>
+          <a:effectRef idx="0">
+            <a:schemeClr val="dk1"/>
+          </a:effectRef>
+          <a:fontRef idx="minor">
+            <a:schemeClr val="dk1"/>
+          </a:fontRef>
+        </p:style>
+        <p:txBody>
+          <a:bodyPr rtlCol="0" anchor="ctr"/>
+          <a:lstStyle/>
+          <a:p>
+            <a:pPr algn="ctr"/>
+            <a:endParaRPr kumimoji="1" lang="ja-JP" altLang="en-US"/>
+          </a:p>
+        </p:txBody>
+      </p:sp>
     </p:spTree>
     <p:extLst>
       <p:ext uri="{BB962C8B-B14F-4D97-AF65-F5344CB8AC3E}">
@@ -10454,6 +11120,102 @@
   <p:clrMapOvr>
     <a:masterClrMapping/>
   </p:clrMapOvr>
+  <p:timing>
+    <p:tnLst>
+      <p:par>
+        <p:cTn id="1" dur="indefinite" restart="never" nodeType="tmRoot">
+          <p:childTnLst>
+            <p:seq concurrent="1" nextAc="seek">
+              <p:cTn id="2" dur="indefinite" nodeType="mainSeq">
+                <p:childTnLst>
+                  <p:par>
+                    <p:cTn id="3" fill="hold">
+                      <p:stCondLst>
+                        <p:cond delay="indefinite"/>
+                        <p:cond evt="onBegin" delay="0">
+                          <p:tn val="2"/>
+                        </p:cond>
+                      </p:stCondLst>
+                      <p:childTnLst>
+                        <p:par>
+                          <p:cTn id="4" fill="hold">
+                            <p:stCondLst>
+                              <p:cond delay="0"/>
+                            </p:stCondLst>
+                            <p:childTnLst>
+                              <p:par>
+                                <p:cTn id="5" presetID="21" presetClass="exit" presetSubtype="1" repeatCount="indefinite" fill="hold" grpId="0" nodeType="afterEffect">
+                                  <p:stCondLst>
+                                    <p:cond delay="3000"/>
+                                  </p:stCondLst>
+                                  <p:endCondLst>
+                                    <p:cond evt="onNext" delay="0">
+                                      <p:tgtEl>
+                                        <p:sldTgt/>
+                                      </p:tgtEl>
+                                    </p:cond>
+                                  </p:endCondLst>
+                                  <p:childTnLst>
+                                    <p:animEffect transition="out" filter="wheel(1)">
+                                      <p:cBhvr>
+                                        <p:cTn id="6" dur="15000"/>
+                                        <p:tgtEl>
+                                          <p:spTgt spid="12"/>
+                                        </p:tgtEl>
+                                      </p:cBhvr>
+                                    </p:animEffect>
+                                    <p:set>
+                                      <p:cBhvr>
+                                        <p:cTn id="7" dur="1" fill="hold">
+                                          <p:stCondLst>
+                                            <p:cond delay="14999"/>
+                                          </p:stCondLst>
+                                        </p:cTn>
+                                        <p:tgtEl>
+                                          <p:spTgt spid="12"/>
+                                        </p:tgtEl>
+                                        <p:attrNameLst>
+                                          <p:attrName>style.visibility</p:attrName>
+                                        </p:attrNameLst>
+                                      </p:cBhvr>
+                                      <p:to>
+                                        <p:strVal val="hidden"/>
+                                      </p:to>
+                                    </p:set>
+                                  </p:childTnLst>
+                                </p:cTn>
+                              </p:par>
+                            </p:childTnLst>
+                          </p:cTn>
+                        </p:par>
+                      </p:childTnLst>
+                    </p:cTn>
+                  </p:par>
+                </p:childTnLst>
+              </p:cTn>
+              <p:prevCondLst>
+                <p:cond evt="onPrev" delay="0">
+                  <p:tgtEl>
+                    <p:sldTgt/>
+                  </p:tgtEl>
+                </p:cond>
+              </p:prevCondLst>
+              <p:nextCondLst>
+                <p:cond evt="onNext" delay="0">
+                  <p:tgtEl>
+                    <p:sldTgt/>
+                  </p:tgtEl>
+                </p:cond>
+              </p:nextCondLst>
+            </p:seq>
+          </p:childTnLst>
+        </p:cTn>
+      </p:par>
+    </p:tnLst>
+    <p:bldLst>
+      <p:bldP spid="12" grpId="0" animBg="1"/>
+    </p:bldLst>
+  </p:timing>
 </p:sld>
 </file>
 
@@ -10944,6 +11706,160 @@
           </a:extLst>
         </p:spPr>
       </p:pic>
+      <p:sp>
+        <p:nvSpPr>
+          <p:cNvPr id="14" name="楕円 13">
+            <a:extLst>
+              <a:ext uri="{FF2B5EF4-FFF2-40B4-BE49-F238E27FC236}">
+                <a16:creationId xmlns:a16="http://schemas.microsoft.com/office/drawing/2014/main" id="{683CDD7E-3957-4F49-8251-6BA1B8C894EE}"/>
+              </a:ext>
+            </a:extLst>
+          </p:cNvPr>
+          <p:cNvSpPr/>
+          <p:nvPr/>
+        </p:nvSpPr>
+        <p:spPr>
+          <a:xfrm>
+            <a:off x="1185445" y="486278"/>
+            <a:ext cx="876300" cy="876300"/>
+          </a:xfrm>
+          <a:prstGeom prst="ellipse">
+            <a:avLst/>
+          </a:prstGeom>
+          <a:solidFill>
+            <a:srgbClr val="FF0000"/>
+          </a:solidFill>
+          <a:ln>
+            <a:solidFill>
+              <a:schemeClr val="bg1"/>
+            </a:solidFill>
+          </a:ln>
+        </p:spPr>
+        <p:style>
+          <a:lnRef idx="2">
+            <a:schemeClr val="dk1"/>
+          </a:lnRef>
+          <a:fillRef idx="1">
+            <a:schemeClr val="lt1"/>
+          </a:fillRef>
+          <a:effectRef idx="0">
+            <a:schemeClr val="dk1"/>
+          </a:effectRef>
+          <a:fontRef idx="minor">
+            <a:schemeClr val="dk1"/>
+          </a:fontRef>
+        </p:style>
+        <p:txBody>
+          <a:bodyPr rtlCol="0" anchor="ctr"/>
+          <a:lstStyle/>
+          <a:p>
+            <a:pPr algn="ctr"/>
+            <a:endParaRPr kumimoji="1" lang="ja-JP" altLang="en-US"/>
+          </a:p>
+        </p:txBody>
+      </p:sp>
+      <p:sp>
+        <p:nvSpPr>
+          <p:cNvPr id="15" name="楕円 14">
+            <a:extLst>
+              <a:ext uri="{FF2B5EF4-FFF2-40B4-BE49-F238E27FC236}">
+                <a16:creationId xmlns:a16="http://schemas.microsoft.com/office/drawing/2014/main" id="{E153F24C-3689-4764-BC12-2D816AD50BD4}"/>
+              </a:ext>
+            </a:extLst>
+          </p:cNvPr>
+          <p:cNvSpPr/>
+          <p:nvPr/>
+        </p:nvSpPr>
+        <p:spPr>
+          <a:xfrm>
+            <a:off x="1185445" y="486278"/>
+            <a:ext cx="876300" cy="876300"/>
+          </a:xfrm>
+          <a:prstGeom prst="ellipse">
+            <a:avLst/>
+          </a:prstGeom>
+          <a:solidFill>
+            <a:srgbClr val="00B050"/>
+          </a:solidFill>
+          <a:ln>
+            <a:solidFill>
+              <a:schemeClr val="bg1"/>
+            </a:solidFill>
+          </a:ln>
+        </p:spPr>
+        <p:style>
+          <a:lnRef idx="2">
+            <a:schemeClr val="dk1"/>
+          </a:lnRef>
+          <a:fillRef idx="1">
+            <a:schemeClr val="lt1"/>
+          </a:fillRef>
+          <a:effectRef idx="0">
+            <a:schemeClr val="dk1"/>
+          </a:effectRef>
+          <a:fontRef idx="minor">
+            <a:schemeClr val="dk1"/>
+          </a:fontRef>
+        </p:style>
+        <p:txBody>
+          <a:bodyPr rtlCol="0" anchor="ctr"/>
+          <a:lstStyle/>
+          <a:p>
+            <a:pPr algn="ctr"/>
+            <a:endParaRPr kumimoji="1" lang="en-US" altLang="ja-JP" dirty="0"/>
+          </a:p>
+        </p:txBody>
+      </p:sp>
+      <p:sp>
+        <p:nvSpPr>
+          <p:cNvPr id="16" name="楕円 15">
+            <a:extLst>
+              <a:ext uri="{FF2B5EF4-FFF2-40B4-BE49-F238E27FC236}">
+                <a16:creationId xmlns:a16="http://schemas.microsoft.com/office/drawing/2014/main" id="{7464D174-D4A7-4368-8C23-FBB551B9EC14}"/>
+              </a:ext>
+            </a:extLst>
+          </p:cNvPr>
+          <p:cNvSpPr/>
+          <p:nvPr/>
+        </p:nvSpPr>
+        <p:spPr>
+          <a:xfrm>
+            <a:off x="1185445" y="486278"/>
+            <a:ext cx="876300" cy="876300"/>
+          </a:xfrm>
+          <a:prstGeom prst="ellipse">
+            <a:avLst/>
+          </a:prstGeom>
+          <a:noFill/>
+          <a:ln>
+            <a:solidFill>
+              <a:schemeClr val="bg1"/>
+            </a:solidFill>
+          </a:ln>
+        </p:spPr>
+        <p:style>
+          <a:lnRef idx="2">
+            <a:schemeClr val="dk1"/>
+          </a:lnRef>
+          <a:fillRef idx="1">
+            <a:schemeClr val="lt1"/>
+          </a:fillRef>
+          <a:effectRef idx="0">
+            <a:schemeClr val="dk1"/>
+          </a:effectRef>
+          <a:fontRef idx="minor">
+            <a:schemeClr val="dk1"/>
+          </a:fontRef>
+        </p:style>
+        <p:txBody>
+          <a:bodyPr rtlCol="0" anchor="ctr"/>
+          <a:lstStyle/>
+          <a:p>
+            <a:pPr algn="ctr"/>
+            <a:endParaRPr kumimoji="1" lang="ja-JP" altLang="en-US"/>
+          </a:p>
+        </p:txBody>
+      </p:sp>
     </p:spTree>
     <p:extLst>
       <p:ext uri="{BB962C8B-B14F-4D97-AF65-F5344CB8AC3E}">
@@ -10954,6 +11870,102 @@
   <p:clrMapOvr>
     <a:masterClrMapping/>
   </p:clrMapOvr>
+  <p:timing>
+    <p:tnLst>
+      <p:par>
+        <p:cTn id="1" dur="indefinite" restart="never" nodeType="tmRoot">
+          <p:childTnLst>
+            <p:seq concurrent="1" nextAc="seek">
+              <p:cTn id="2" dur="indefinite" nodeType="mainSeq">
+                <p:childTnLst>
+                  <p:par>
+                    <p:cTn id="3" fill="hold">
+                      <p:stCondLst>
+                        <p:cond delay="indefinite"/>
+                        <p:cond evt="onBegin" delay="0">
+                          <p:tn val="2"/>
+                        </p:cond>
+                      </p:stCondLst>
+                      <p:childTnLst>
+                        <p:par>
+                          <p:cTn id="4" fill="hold">
+                            <p:stCondLst>
+                              <p:cond delay="0"/>
+                            </p:stCondLst>
+                            <p:childTnLst>
+                              <p:par>
+                                <p:cTn id="5" presetID="21" presetClass="exit" presetSubtype="1" repeatCount="indefinite" fill="hold" grpId="0" nodeType="afterEffect">
+                                  <p:stCondLst>
+                                    <p:cond delay="3000"/>
+                                  </p:stCondLst>
+                                  <p:endCondLst>
+                                    <p:cond evt="onNext" delay="0">
+                                      <p:tgtEl>
+                                        <p:sldTgt/>
+                                      </p:tgtEl>
+                                    </p:cond>
+                                  </p:endCondLst>
+                                  <p:childTnLst>
+                                    <p:animEffect transition="out" filter="wheel(1)">
+                                      <p:cBhvr>
+                                        <p:cTn id="6" dur="15000"/>
+                                        <p:tgtEl>
+                                          <p:spTgt spid="15"/>
+                                        </p:tgtEl>
+                                      </p:cBhvr>
+                                    </p:animEffect>
+                                    <p:set>
+                                      <p:cBhvr>
+                                        <p:cTn id="7" dur="1" fill="hold">
+                                          <p:stCondLst>
+                                            <p:cond delay="14999"/>
+                                          </p:stCondLst>
+                                        </p:cTn>
+                                        <p:tgtEl>
+                                          <p:spTgt spid="15"/>
+                                        </p:tgtEl>
+                                        <p:attrNameLst>
+                                          <p:attrName>style.visibility</p:attrName>
+                                        </p:attrNameLst>
+                                      </p:cBhvr>
+                                      <p:to>
+                                        <p:strVal val="hidden"/>
+                                      </p:to>
+                                    </p:set>
+                                  </p:childTnLst>
+                                </p:cTn>
+                              </p:par>
+                            </p:childTnLst>
+                          </p:cTn>
+                        </p:par>
+                      </p:childTnLst>
+                    </p:cTn>
+                  </p:par>
+                </p:childTnLst>
+              </p:cTn>
+              <p:prevCondLst>
+                <p:cond evt="onPrev" delay="0">
+                  <p:tgtEl>
+                    <p:sldTgt/>
+                  </p:tgtEl>
+                </p:cond>
+              </p:prevCondLst>
+              <p:nextCondLst>
+                <p:cond evt="onNext" delay="0">
+                  <p:tgtEl>
+                    <p:sldTgt/>
+                  </p:tgtEl>
+                </p:cond>
+              </p:nextCondLst>
+            </p:seq>
+          </p:childTnLst>
+        </p:cTn>
+      </p:par>
+    </p:tnLst>
+    <p:bldLst>
+      <p:bldP spid="15" grpId="0" animBg="1"/>
+    </p:bldLst>
+  </p:timing>
 </p:sld>
 </file>
 
@@ -11444,6 +12456,160 @@
           </a:extLst>
         </p:spPr>
       </p:pic>
+      <p:sp>
+        <p:nvSpPr>
+          <p:cNvPr id="10" name="楕円 9">
+            <a:extLst>
+              <a:ext uri="{FF2B5EF4-FFF2-40B4-BE49-F238E27FC236}">
+                <a16:creationId xmlns:a16="http://schemas.microsoft.com/office/drawing/2014/main" id="{696E176B-A4C4-4BE2-B95D-A4AA6B630758}"/>
+              </a:ext>
+            </a:extLst>
+          </p:cNvPr>
+          <p:cNvSpPr/>
+          <p:nvPr/>
+        </p:nvSpPr>
+        <p:spPr>
+          <a:xfrm>
+            <a:off x="1185445" y="486278"/>
+            <a:ext cx="876300" cy="876300"/>
+          </a:xfrm>
+          <a:prstGeom prst="ellipse">
+            <a:avLst/>
+          </a:prstGeom>
+          <a:solidFill>
+            <a:srgbClr val="FF0000"/>
+          </a:solidFill>
+          <a:ln>
+            <a:solidFill>
+              <a:schemeClr val="bg1"/>
+            </a:solidFill>
+          </a:ln>
+        </p:spPr>
+        <p:style>
+          <a:lnRef idx="2">
+            <a:schemeClr val="dk1"/>
+          </a:lnRef>
+          <a:fillRef idx="1">
+            <a:schemeClr val="lt1"/>
+          </a:fillRef>
+          <a:effectRef idx="0">
+            <a:schemeClr val="dk1"/>
+          </a:effectRef>
+          <a:fontRef idx="minor">
+            <a:schemeClr val="dk1"/>
+          </a:fontRef>
+        </p:style>
+        <p:txBody>
+          <a:bodyPr rtlCol="0" anchor="ctr"/>
+          <a:lstStyle/>
+          <a:p>
+            <a:pPr algn="ctr"/>
+            <a:endParaRPr kumimoji="1" lang="ja-JP" altLang="en-US"/>
+          </a:p>
+        </p:txBody>
+      </p:sp>
+      <p:sp>
+        <p:nvSpPr>
+          <p:cNvPr id="11" name="楕円 10">
+            <a:extLst>
+              <a:ext uri="{FF2B5EF4-FFF2-40B4-BE49-F238E27FC236}">
+                <a16:creationId xmlns:a16="http://schemas.microsoft.com/office/drawing/2014/main" id="{B53624C6-BAF4-499D-B96F-DDBF666E6358}"/>
+              </a:ext>
+            </a:extLst>
+          </p:cNvPr>
+          <p:cNvSpPr/>
+          <p:nvPr/>
+        </p:nvSpPr>
+        <p:spPr>
+          <a:xfrm>
+            <a:off x="1185445" y="486278"/>
+            <a:ext cx="876300" cy="876300"/>
+          </a:xfrm>
+          <a:prstGeom prst="ellipse">
+            <a:avLst/>
+          </a:prstGeom>
+          <a:solidFill>
+            <a:srgbClr val="00B050"/>
+          </a:solidFill>
+          <a:ln>
+            <a:solidFill>
+              <a:schemeClr val="bg1"/>
+            </a:solidFill>
+          </a:ln>
+        </p:spPr>
+        <p:style>
+          <a:lnRef idx="2">
+            <a:schemeClr val="dk1"/>
+          </a:lnRef>
+          <a:fillRef idx="1">
+            <a:schemeClr val="lt1"/>
+          </a:fillRef>
+          <a:effectRef idx="0">
+            <a:schemeClr val="dk1"/>
+          </a:effectRef>
+          <a:fontRef idx="minor">
+            <a:schemeClr val="dk1"/>
+          </a:fontRef>
+        </p:style>
+        <p:txBody>
+          <a:bodyPr rtlCol="0" anchor="ctr"/>
+          <a:lstStyle/>
+          <a:p>
+            <a:pPr algn="ctr"/>
+            <a:endParaRPr kumimoji="1" lang="en-US" altLang="ja-JP" dirty="0"/>
+          </a:p>
+        </p:txBody>
+      </p:sp>
+      <p:sp>
+        <p:nvSpPr>
+          <p:cNvPr id="12" name="楕円 11">
+            <a:extLst>
+              <a:ext uri="{FF2B5EF4-FFF2-40B4-BE49-F238E27FC236}">
+                <a16:creationId xmlns:a16="http://schemas.microsoft.com/office/drawing/2014/main" id="{92B64121-8F18-4A4F-B38D-F57A63F52BC2}"/>
+              </a:ext>
+            </a:extLst>
+          </p:cNvPr>
+          <p:cNvSpPr/>
+          <p:nvPr/>
+        </p:nvSpPr>
+        <p:spPr>
+          <a:xfrm>
+            <a:off x="1185445" y="486278"/>
+            <a:ext cx="876300" cy="876300"/>
+          </a:xfrm>
+          <a:prstGeom prst="ellipse">
+            <a:avLst/>
+          </a:prstGeom>
+          <a:noFill/>
+          <a:ln>
+            <a:solidFill>
+              <a:schemeClr val="bg1"/>
+            </a:solidFill>
+          </a:ln>
+        </p:spPr>
+        <p:style>
+          <a:lnRef idx="2">
+            <a:schemeClr val="dk1"/>
+          </a:lnRef>
+          <a:fillRef idx="1">
+            <a:schemeClr val="lt1"/>
+          </a:fillRef>
+          <a:effectRef idx="0">
+            <a:schemeClr val="dk1"/>
+          </a:effectRef>
+          <a:fontRef idx="minor">
+            <a:schemeClr val="dk1"/>
+          </a:fontRef>
+        </p:style>
+        <p:txBody>
+          <a:bodyPr rtlCol="0" anchor="ctr"/>
+          <a:lstStyle/>
+          <a:p>
+            <a:pPr algn="ctr"/>
+            <a:endParaRPr kumimoji="1" lang="ja-JP" altLang="en-US"/>
+          </a:p>
+        </p:txBody>
+      </p:sp>
     </p:spTree>
     <p:extLst>
       <p:ext uri="{BB962C8B-B14F-4D97-AF65-F5344CB8AC3E}">
@@ -11454,6 +12620,102 @@
   <p:clrMapOvr>
     <a:masterClrMapping/>
   </p:clrMapOvr>
+  <p:timing>
+    <p:tnLst>
+      <p:par>
+        <p:cTn id="1" dur="indefinite" restart="never" nodeType="tmRoot">
+          <p:childTnLst>
+            <p:seq concurrent="1" nextAc="seek">
+              <p:cTn id="2" dur="indefinite" nodeType="mainSeq">
+                <p:childTnLst>
+                  <p:par>
+                    <p:cTn id="3" fill="hold">
+                      <p:stCondLst>
+                        <p:cond delay="indefinite"/>
+                        <p:cond evt="onBegin" delay="0">
+                          <p:tn val="2"/>
+                        </p:cond>
+                      </p:stCondLst>
+                      <p:childTnLst>
+                        <p:par>
+                          <p:cTn id="4" fill="hold">
+                            <p:stCondLst>
+                              <p:cond delay="0"/>
+                            </p:stCondLst>
+                            <p:childTnLst>
+                              <p:par>
+                                <p:cTn id="5" presetID="21" presetClass="exit" presetSubtype="1" repeatCount="indefinite" fill="hold" grpId="0" nodeType="afterEffect">
+                                  <p:stCondLst>
+                                    <p:cond delay="3000"/>
+                                  </p:stCondLst>
+                                  <p:endCondLst>
+                                    <p:cond evt="onNext" delay="0">
+                                      <p:tgtEl>
+                                        <p:sldTgt/>
+                                      </p:tgtEl>
+                                    </p:cond>
+                                  </p:endCondLst>
+                                  <p:childTnLst>
+                                    <p:animEffect transition="out" filter="wheel(1)">
+                                      <p:cBhvr>
+                                        <p:cTn id="6" dur="15000"/>
+                                        <p:tgtEl>
+                                          <p:spTgt spid="11"/>
+                                        </p:tgtEl>
+                                      </p:cBhvr>
+                                    </p:animEffect>
+                                    <p:set>
+                                      <p:cBhvr>
+                                        <p:cTn id="7" dur="1" fill="hold">
+                                          <p:stCondLst>
+                                            <p:cond delay="14999"/>
+                                          </p:stCondLst>
+                                        </p:cTn>
+                                        <p:tgtEl>
+                                          <p:spTgt spid="11"/>
+                                        </p:tgtEl>
+                                        <p:attrNameLst>
+                                          <p:attrName>style.visibility</p:attrName>
+                                        </p:attrNameLst>
+                                      </p:cBhvr>
+                                      <p:to>
+                                        <p:strVal val="hidden"/>
+                                      </p:to>
+                                    </p:set>
+                                  </p:childTnLst>
+                                </p:cTn>
+                              </p:par>
+                            </p:childTnLst>
+                          </p:cTn>
+                        </p:par>
+                      </p:childTnLst>
+                    </p:cTn>
+                  </p:par>
+                </p:childTnLst>
+              </p:cTn>
+              <p:prevCondLst>
+                <p:cond evt="onPrev" delay="0">
+                  <p:tgtEl>
+                    <p:sldTgt/>
+                  </p:tgtEl>
+                </p:cond>
+              </p:prevCondLst>
+              <p:nextCondLst>
+                <p:cond evt="onNext" delay="0">
+                  <p:tgtEl>
+                    <p:sldTgt/>
+                  </p:tgtEl>
+                </p:cond>
+              </p:nextCondLst>
+            </p:seq>
+          </p:childTnLst>
+        </p:cTn>
+      </p:par>
+    </p:tnLst>
+    <p:bldLst>
+      <p:bldP spid="11" grpId="0" animBg="1"/>
+    </p:bldLst>
+  </p:timing>
 </p:sld>
 </file>
 
@@ -12373,10 +13635,10 @@
       </p:sp>
       <p:sp>
         <p:nvSpPr>
-          <p:cNvPr id="51" name="テキスト ボックス 50">
-            <a:extLst>
-              <a:ext uri="{FF2B5EF4-FFF2-40B4-BE49-F238E27FC236}">
-                <a16:creationId xmlns:a16="http://schemas.microsoft.com/office/drawing/2014/main" id="{04CEB92C-FBBF-4DDC-9DE0-E2FB641F867A}"/>
+          <p:cNvPr id="52" name="テキスト ボックス 51">
+            <a:extLst>
+              <a:ext uri="{FF2B5EF4-FFF2-40B4-BE49-F238E27FC236}">
+                <a16:creationId xmlns:a16="http://schemas.microsoft.com/office/drawing/2014/main" id="{030B65D8-603C-484C-AB50-6D0D9941C2AB}"/>
               </a:ext>
             </a:extLst>
           </p:cNvPr>
@@ -12385,7 +13647,7 @@
         </p:nvSpPr>
         <p:spPr>
           <a:xfrm flipH="1">
-            <a:off x="2689144" y="3715974"/>
+            <a:off x="4494872" y="3715974"/>
             <a:ext cx="1641700" cy="1077218"/>
           </a:xfrm>
           <a:prstGeom prst="rect">
@@ -12430,10 +13692,10 @@
       </p:sp>
       <p:sp>
         <p:nvSpPr>
-          <p:cNvPr id="52" name="テキスト ボックス 51">
-            <a:extLst>
-              <a:ext uri="{FF2B5EF4-FFF2-40B4-BE49-F238E27FC236}">
-                <a16:creationId xmlns:a16="http://schemas.microsoft.com/office/drawing/2014/main" id="{030B65D8-603C-484C-AB50-6D0D9941C2AB}"/>
+          <p:cNvPr id="53" name="テキスト ボックス 52">
+            <a:extLst>
+              <a:ext uri="{FF2B5EF4-FFF2-40B4-BE49-F238E27FC236}">
+                <a16:creationId xmlns:a16="http://schemas.microsoft.com/office/drawing/2014/main" id="{54A9D83C-D443-4183-B402-D85170338A37}"/>
               </a:ext>
             </a:extLst>
           </p:cNvPr>
@@ -12442,7 +13704,7 @@
         </p:nvSpPr>
         <p:spPr>
           <a:xfrm flipH="1">
-            <a:off x="4494872" y="3715974"/>
+            <a:off x="6305286" y="3715974"/>
             <a:ext cx="1641700" cy="1077218"/>
           </a:xfrm>
           <a:prstGeom prst="rect">
@@ -12487,10 +13749,10 @@
       </p:sp>
       <p:sp>
         <p:nvSpPr>
-          <p:cNvPr id="53" name="テキスト ボックス 52">
-            <a:extLst>
-              <a:ext uri="{FF2B5EF4-FFF2-40B4-BE49-F238E27FC236}">
-                <a16:creationId xmlns:a16="http://schemas.microsoft.com/office/drawing/2014/main" id="{54A9D83C-D443-4183-B402-D85170338A37}"/>
+          <p:cNvPr id="54" name="テキスト ボックス 53">
+            <a:extLst>
+              <a:ext uri="{FF2B5EF4-FFF2-40B4-BE49-F238E27FC236}">
+                <a16:creationId xmlns:a16="http://schemas.microsoft.com/office/drawing/2014/main" id="{82F4CCA7-E5FB-483B-A99E-2F1F90FA3223}"/>
               </a:ext>
             </a:extLst>
           </p:cNvPr>
@@ -12499,8 +13761,8 @@
         </p:nvSpPr>
         <p:spPr>
           <a:xfrm flipH="1">
-            <a:off x="6305286" y="3715974"/>
-            <a:ext cx="1641700" cy="1077218"/>
+            <a:off x="8100008" y="3715974"/>
+            <a:ext cx="1641700" cy="600312"/>
           </a:xfrm>
           <a:prstGeom prst="rect">
             <a:avLst/>
@@ -12531,23 +13793,14 @@
               <a:latin typeface="Impact" panose="020B0806030902050204" pitchFamily="34" charset="0"/>
             </a:endParaRPr>
           </a:p>
-          <a:p>
-            <a:pPr algn="ctr"/>
-            <a:endParaRPr kumimoji="1" lang="ja-JP" altLang="en-US" sz="3200" dirty="0">
-              <a:solidFill>
-                <a:srgbClr val="FFFF00"/>
-              </a:solidFill>
-              <a:latin typeface="Impact" panose="020B0806030902050204" pitchFamily="34" charset="0"/>
-            </a:endParaRPr>
-          </a:p>
-        </p:txBody>
-      </p:sp>
-      <p:sp>
-        <p:nvSpPr>
-          <p:cNvPr id="54" name="テキスト ボックス 53">
-            <a:extLst>
-              <a:ext uri="{FF2B5EF4-FFF2-40B4-BE49-F238E27FC236}">
-                <a16:creationId xmlns:a16="http://schemas.microsoft.com/office/drawing/2014/main" id="{82F4CCA7-E5FB-483B-A99E-2F1F90FA3223}"/>
+        </p:txBody>
+      </p:sp>
+      <p:sp>
+        <p:nvSpPr>
+          <p:cNvPr id="55" name="テキスト ボックス 54">
+            <a:extLst>
+              <a:ext uri="{FF2B5EF4-FFF2-40B4-BE49-F238E27FC236}">
+                <a16:creationId xmlns:a16="http://schemas.microsoft.com/office/drawing/2014/main" id="{DCCF3DFC-3FB9-44AC-B0B8-96E292BA5BDD}"/>
               </a:ext>
             </a:extLst>
           </p:cNvPr>
@@ -12556,7 +13809,7 @@
         </p:nvSpPr>
         <p:spPr>
           <a:xfrm flipH="1">
-            <a:off x="8100008" y="3715974"/>
+            <a:off x="9914169" y="3715974"/>
             <a:ext cx="1641700" cy="600312"/>
           </a:xfrm>
           <a:prstGeom prst="rect">
@@ -12592,10 +13845,10 @@
       </p:sp>
       <p:sp>
         <p:nvSpPr>
-          <p:cNvPr id="55" name="テキスト ボックス 54">
-            <a:extLst>
-              <a:ext uri="{FF2B5EF4-FFF2-40B4-BE49-F238E27FC236}">
-                <a16:creationId xmlns:a16="http://schemas.microsoft.com/office/drawing/2014/main" id="{DCCF3DFC-3FB9-44AC-B0B8-96E292BA5BDD}"/>
+          <p:cNvPr id="62" name="テキスト ボックス 61">
+            <a:extLst>
+              <a:ext uri="{FF2B5EF4-FFF2-40B4-BE49-F238E27FC236}">
+                <a16:creationId xmlns:a16="http://schemas.microsoft.com/office/drawing/2014/main" id="{C6069061-67F8-40EF-ABD9-B287A3C87AF4}"/>
               </a:ext>
             </a:extLst>
           </p:cNvPr>
@@ -12604,8 +13857,8 @@
         </p:nvSpPr>
         <p:spPr>
           <a:xfrm flipH="1">
-            <a:off x="9914169" y="3715974"/>
-            <a:ext cx="1641700" cy="600312"/>
+            <a:off x="898168" y="4793951"/>
+            <a:ext cx="1641700" cy="584775"/>
           </a:xfrm>
           <a:prstGeom prst="rect">
             <a:avLst/>
@@ -12627,7 +13880,7 @@
                 <a:latin typeface="Impact" panose="020B0806030902050204" pitchFamily="34" charset="0"/>
                 <a:hlinkClick r:id="rId19" action="ppaction://hlinksldjump"/>
               </a:rPr>
-              <a:t>\ 600</a:t>
+              <a:t>\ 800</a:t>
             </a:r>
             <a:endParaRPr kumimoji="1" lang="ja-JP" altLang="en-US" sz="3200" dirty="0">
               <a:solidFill>
@@ -12640,10 +13893,10 @@
       </p:sp>
       <p:sp>
         <p:nvSpPr>
-          <p:cNvPr id="62" name="テキスト ボックス 61">
-            <a:extLst>
-              <a:ext uri="{FF2B5EF4-FFF2-40B4-BE49-F238E27FC236}">
-                <a16:creationId xmlns:a16="http://schemas.microsoft.com/office/drawing/2014/main" id="{C6069061-67F8-40EF-ABD9-B287A3C87AF4}"/>
+          <p:cNvPr id="63" name="テキスト ボックス 62">
+            <a:extLst>
+              <a:ext uri="{FF2B5EF4-FFF2-40B4-BE49-F238E27FC236}">
+                <a16:creationId xmlns:a16="http://schemas.microsoft.com/office/drawing/2014/main" id="{DF9116A4-DB43-470E-B7FB-6643E96CC653}"/>
               </a:ext>
             </a:extLst>
           </p:cNvPr>
@@ -12652,7 +13905,7 @@
         </p:nvSpPr>
         <p:spPr>
           <a:xfrm flipH="1">
-            <a:off x="898168" y="4793951"/>
+            <a:off x="2689144" y="4793951"/>
             <a:ext cx="1641700" cy="584775"/>
           </a:xfrm>
           <a:prstGeom prst="rect">
@@ -12688,10 +13941,10 @@
       </p:sp>
       <p:sp>
         <p:nvSpPr>
-          <p:cNvPr id="63" name="テキスト ボックス 62">
-            <a:extLst>
-              <a:ext uri="{FF2B5EF4-FFF2-40B4-BE49-F238E27FC236}">
-                <a16:creationId xmlns:a16="http://schemas.microsoft.com/office/drawing/2014/main" id="{DF9116A4-DB43-470E-B7FB-6643E96CC653}"/>
+          <p:cNvPr id="64" name="テキスト ボックス 63">
+            <a:extLst>
+              <a:ext uri="{FF2B5EF4-FFF2-40B4-BE49-F238E27FC236}">
+                <a16:creationId xmlns:a16="http://schemas.microsoft.com/office/drawing/2014/main" id="{40413505-DC6E-40B8-ABE1-E9104D2E86DB}"/>
               </a:ext>
             </a:extLst>
           </p:cNvPr>
@@ -12700,7 +13953,7 @@
         </p:nvSpPr>
         <p:spPr>
           <a:xfrm flipH="1">
-            <a:off x="2689144" y="4793951"/>
+            <a:off x="4494872" y="4793951"/>
             <a:ext cx="1641700" cy="1077218"/>
           </a:xfrm>
           <a:prstGeom prst="rect">
@@ -12745,10 +13998,10 @@
       </p:sp>
       <p:sp>
         <p:nvSpPr>
-          <p:cNvPr id="64" name="テキスト ボックス 63">
-            <a:extLst>
-              <a:ext uri="{FF2B5EF4-FFF2-40B4-BE49-F238E27FC236}">
-                <a16:creationId xmlns:a16="http://schemas.microsoft.com/office/drawing/2014/main" id="{40413505-DC6E-40B8-ABE1-E9104D2E86DB}"/>
+          <p:cNvPr id="65" name="テキスト ボックス 64">
+            <a:extLst>
+              <a:ext uri="{FF2B5EF4-FFF2-40B4-BE49-F238E27FC236}">
+                <a16:creationId xmlns:a16="http://schemas.microsoft.com/office/drawing/2014/main" id="{C3746ECA-ABB0-4EAB-853C-5AEDBB11F9F8}"/>
               </a:ext>
             </a:extLst>
           </p:cNvPr>
@@ -12757,7 +14010,7 @@
         </p:nvSpPr>
         <p:spPr>
           <a:xfrm flipH="1">
-            <a:off x="4494872" y="4793951"/>
+            <a:off x="6305286" y="4793951"/>
             <a:ext cx="1641700" cy="1077218"/>
           </a:xfrm>
           <a:prstGeom prst="rect">
@@ -12802,10 +14055,10 @@
       </p:sp>
       <p:sp>
         <p:nvSpPr>
-          <p:cNvPr id="65" name="テキスト ボックス 64">
-            <a:extLst>
-              <a:ext uri="{FF2B5EF4-FFF2-40B4-BE49-F238E27FC236}">
-                <a16:creationId xmlns:a16="http://schemas.microsoft.com/office/drawing/2014/main" id="{C3746ECA-ABB0-4EAB-853C-5AEDBB11F9F8}"/>
+          <p:cNvPr id="66" name="テキスト ボックス 65">
+            <a:extLst>
+              <a:ext uri="{FF2B5EF4-FFF2-40B4-BE49-F238E27FC236}">
+                <a16:creationId xmlns:a16="http://schemas.microsoft.com/office/drawing/2014/main" id="{D4DB5CDF-DF0E-451C-B274-A50FB2DEF868}"/>
               </a:ext>
             </a:extLst>
           </p:cNvPr>
@@ -12814,8 +14067,8 @@
         </p:nvSpPr>
         <p:spPr>
           <a:xfrm flipH="1">
-            <a:off x="6305286" y="4793951"/>
-            <a:ext cx="1641700" cy="1077218"/>
+            <a:off x="8100008" y="4793951"/>
+            <a:ext cx="1641700" cy="600312"/>
           </a:xfrm>
           <a:prstGeom prst="rect">
             <a:avLst/>
@@ -12846,23 +14099,14 @@
               <a:latin typeface="Impact" panose="020B0806030902050204" pitchFamily="34" charset="0"/>
             </a:endParaRPr>
           </a:p>
-          <a:p>
-            <a:pPr algn="ctr"/>
-            <a:endParaRPr kumimoji="1" lang="ja-JP" altLang="en-US" sz="3200" dirty="0">
-              <a:solidFill>
-                <a:srgbClr val="FFFF00"/>
-              </a:solidFill>
-              <a:latin typeface="Impact" panose="020B0806030902050204" pitchFamily="34" charset="0"/>
-            </a:endParaRPr>
-          </a:p>
-        </p:txBody>
-      </p:sp>
-      <p:sp>
-        <p:nvSpPr>
-          <p:cNvPr id="66" name="テキスト ボックス 65">
-            <a:extLst>
-              <a:ext uri="{FF2B5EF4-FFF2-40B4-BE49-F238E27FC236}">
-                <a16:creationId xmlns:a16="http://schemas.microsoft.com/office/drawing/2014/main" id="{D4DB5CDF-DF0E-451C-B274-A50FB2DEF868}"/>
+        </p:txBody>
+      </p:sp>
+      <p:sp>
+        <p:nvSpPr>
+          <p:cNvPr id="67" name="テキスト ボックス 66">
+            <a:extLst>
+              <a:ext uri="{FF2B5EF4-FFF2-40B4-BE49-F238E27FC236}">
+                <a16:creationId xmlns:a16="http://schemas.microsoft.com/office/drawing/2014/main" id="{E04F7CB9-EEF8-40EC-B648-3801390EEFD0}"/>
               </a:ext>
             </a:extLst>
           </p:cNvPr>
@@ -12871,7 +14115,7 @@
         </p:nvSpPr>
         <p:spPr>
           <a:xfrm flipH="1">
-            <a:off x="8100008" y="4793951"/>
+            <a:off x="9914169" y="4793951"/>
             <a:ext cx="1641700" cy="600312"/>
           </a:xfrm>
           <a:prstGeom prst="rect">
@@ -12907,10 +14151,10 @@
       </p:sp>
       <p:sp>
         <p:nvSpPr>
-          <p:cNvPr id="67" name="テキスト ボックス 66">
-            <a:extLst>
-              <a:ext uri="{FF2B5EF4-FFF2-40B4-BE49-F238E27FC236}">
-                <a16:creationId xmlns:a16="http://schemas.microsoft.com/office/drawing/2014/main" id="{E04F7CB9-EEF8-40EC-B648-3801390EEFD0}"/>
+          <p:cNvPr id="68" name="テキスト ボックス 67">
+            <a:extLst>
+              <a:ext uri="{FF2B5EF4-FFF2-40B4-BE49-F238E27FC236}">
+                <a16:creationId xmlns:a16="http://schemas.microsoft.com/office/drawing/2014/main" id="{C4A8E1C8-9A58-423D-B7CB-B2C8E8E95329}"/>
               </a:ext>
             </a:extLst>
           </p:cNvPr>
@@ -12919,8 +14163,8 @@
         </p:nvSpPr>
         <p:spPr>
           <a:xfrm flipH="1">
-            <a:off x="9914169" y="4793951"/>
-            <a:ext cx="1641700" cy="600312"/>
+            <a:off x="898168" y="5895991"/>
+            <a:ext cx="1641700" cy="584775"/>
           </a:xfrm>
           <a:prstGeom prst="rect">
             <a:avLst/>
@@ -12942,7 +14186,7 @@
                 <a:latin typeface="Impact" panose="020B0806030902050204" pitchFamily="34" charset="0"/>
                 <a:hlinkClick r:id="rId25" action="ppaction://hlinksldjump"/>
               </a:rPr>
-              <a:t>\ 800</a:t>
+              <a:t>\ 1000</a:t>
             </a:r>
             <a:endParaRPr kumimoji="1" lang="ja-JP" altLang="en-US" sz="3200" dirty="0">
               <a:solidFill>
@@ -12955,10 +14199,10 @@
       </p:sp>
       <p:sp>
         <p:nvSpPr>
-          <p:cNvPr id="68" name="テキスト ボックス 67">
-            <a:extLst>
-              <a:ext uri="{FF2B5EF4-FFF2-40B4-BE49-F238E27FC236}">
-                <a16:creationId xmlns:a16="http://schemas.microsoft.com/office/drawing/2014/main" id="{C4A8E1C8-9A58-423D-B7CB-B2C8E8E95329}"/>
+          <p:cNvPr id="69" name="テキスト ボックス 68">
+            <a:extLst>
+              <a:ext uri="{FF2B5EF4-FFF2-40B4-BE49-F238E27FC236}">
+                <a16:creationId xmlns:a16="http://schemas.microsoft.com/office/drawing/2014/main" id="{668DDBB1-B544-479D-ABFD-ECDF5D6F2F51}"/>
               </a:ext>
             </a:extLst>
           </p:cNvPr>
@@ -12967,8 +14211,8 @@
         </p:nvSpPr>
         <p:spPr>
           <a:xfrm flipH="1">
-            <a:off x="898168" y="5895991"/>
-            <a:ext cx="1641700" cy="584775"/>
+            <a:off x="2689144" y="5895991"/>
+            <a:ext cx="1641700" cy="1077218"/>
           </a:xfrm>
           <a:prstGeom prst="rect">
             <a:avLst/>
@@ -12999,14 +14243,23 @@
               <a:latin typeface="Impact" panose="020B0806030902050204" pitchFamily="34" charset="0"/>
             </a:endParaRPr>
           </a:p>
-        </p:txBody>
-      </p:sp>
-      <p:sp>
-        <p:nvSpPr>
-          <p:cNvPr id="69" name="テキスト ボックス 68">
-            <a:extLst>
-              <a:ext uri="{FF2B5EF4-FFF2-40B4-BE49-F238E27FC236}">
-                <a16:creationId xmlns:a16="http://schemas.microsoft.com/office/drawing/2014/main" id="{668DDBB1-B544-479D-ABFD-ECDF5D6F2F51}"/>
+          <a:p>
+            <a:pPr algn="ctr"/>
+            <a:endParaRPr kumimoji="1" lang="ja-JP" altLang="en-US" sz="3200" dirty="0">
+              <a:solidFill>
+                <a:srgbClr val="FFFF00"/>
+              </a:solidFill>
+              <a:latin typeface="Impact" panose="020B0806030902050204" pitchFamily="34" charset="0"/>
+            </a:endParaRPr>
+          </a:p>
+        </p:txBody>
+      </p:sp>
+      <p:sp>
+        <p:nvSpPr>
+          <p:cNvPr id="70" name="テキスト ボックス 69">
+            <a:extLst>
+              <a:ext uri="{FF2B5EF4-FFF2-40B4-BE49-F238E27FC236}">
+                <a16:creationId xmlns:a16="http://schemas.microsoft.com/office/drawing/2014/main" id="{DDA83483-8B10-4986-A9FC-E203B3C171FF}"/>
               </a:ext>
             </a:extLst>
           </p:cNvPr>
@@ -13015,7 +14268,7 @@
         </p:nvSpPr>
         <p:spPr>
           <a:xfrm flipH="1">
-            <a:off x="2689144" y="5895991"/>
+            <a:off x="4494872" y="5895991"/>
             <a:ext cx="1641700" cy="1077218"/>
           </a:xfrm>
           <a:prstGeom prst="rect">
@@ -13060,10 +14313,10 @@
       </p:sp>
       <p:sp>
         <p:nvSpPr>
-          <p:cNvPr id="70" name="テキスト ボックス 69">
-            <a:extLst>
-              <a:ext uri="{FF2B5EF4-FFF2-40B4-BE49-F238E27FC236}">
-                <a16:creationId xmlns:a16="http://schemas.microsoft.com/office/drawing/2014/main" id="{DDA83483-8B10-4986-A9FC-E203B3C171FF}"/>
+          <p:cNvPr id="71" name="テキスト ボックス 70">
+            <a:extLst>
+              <a:ext uri="{FF2B5EF4-FFF2-40B4-BE49-F238E27FC236}">
+                <a16:creationId xmlns:a16="http://schemas.microsoft.com/office/drawing/2014/main" id="{E240766B-BF11-4EC1-BB93-8A0DB9CEC856}"/>
               </a:ext>
             </a:extLst>
           </p:cNvPr>
@@ -13072,7 +14325,7 @@
         </p:nvSpPr>
         <p:spPr>
           <a:xfrm flipH="1">
-            <a:off x="4494872" y="5895991"/>
+            <a:off x="6305286" y="5895991"/>
             <a:ext cx="1641700" cy="1077218"/>
           </a:xfrm>
           <a:prstGeom prst="rect">
@@ -13117,10 +14370,10 @@
       </p:sp>
       <p:sp>
         <p:nvSpPr>
-          <p:cNvPr id="71" name="テキスト ボックス 70">
-            <a:extLst>
-              <a:ext uri="{FF2B5EF4-FFF2-40B4-BE49-F238E27FC236}">
-                <a16:creationId xmlns:a16="http://schemas.microsoft.com/office/drawing/2014/main" id="{E240766B-BF11-4EC1-BB93-8A0DB9CEC856}"/>
+          <p:cNvPr id="72" name="テキスト ボックス 71">
+            <a:extLst>
+              <a:ext uri="{FF2B5EF4-FFF2-40B4-BE49-F238E27FC236}">
+                <a16:creationId xmlns:a16="http://schemas.microsoft.com/office/drawing/2014/main" id="{6F5541D4-2E3B-4BF8-8A0A-B9CE4F869650}"/>
               </a:ext>
             </a:extLst>
           </p:cNvPr>
@@ -13129,8 +14382,8 @@
         </p:nvSpPr>
         <p:spPr>
           <a:xfrm flipH="1">
-            <a:off x="6305286" y="5895991"/>
-            <a:ext cx="1641700" cy="1077218"/>
+            <a:off x="8100008" y="5895991"/>
+            <a:ext cx="1641700" cy="600312"/>
           </a:xfrm>
           <a:prstGeom prst="rect">
             <a:avLst/>
@@ -13161,23 +14414,14 @@
               <a:latin typeface="Impact" panose="020B0806030902050204" pitchFamily="34" charset="0"/>
             </a:endParaRPr>
           </a:p>
-          <a:p>
-            <a:pPr algn="ctr"/>
-            <a:endParaRPr kumimoji="1" lang="ja-JP" altLang="en-US" sz="3200" dirty="0">
-              <a:solidFill>
-                <a:srgbClr val="FFFF00"/>
-              </a:solidFill>
-              <a:latin typeface="Impact" panose="020B0806030902050204" pitchFamily="34" charset="0"/>
-            </a:endParaRPr>
-          </a:p>
-        </p:txBody>
-      </p:sp>
-      <p:sp>
-        <p:nvSpPr>
-          <p:cNvPr id="72" name="テキスト ボックス 71">
-            <a:extLst>
-              <a:ext uri="{FF2B5EF4-FFF2-40B4-BE49-F238E27FC236}">
-                <a16:creationId xmlns:a16="http://schemas.microsoft.com/office/drawing/2014/main" id="{6F5541D4-2E3B-4BF8-8A0A-B9CE4F869650}"/>
+        </p:txBody>
+      </p:sp>
+      <p:sp>
+        <p:nvSpPr>
+          <p:cNvPr id="73" name="テキスト ボックス 72">
+            <a:extLst>
+              <a:ext uri="{FF2B5EF4-FFF2-40B4-BE49-F238E27FC236}">
+                <a16:creationId xmlns:a16="http://schemas.microsoft.com/office/drawing/2014/main" id="{2D2BEC2B-21E3-448D-9AC8-DD9FFC8B93A7}"/>
               </a:ext>
             </a:extLst>
           </p:cNvPr>
@@ -13186,7 +14430,7 @@
         </p:nvSpPr>
         <p:spPr>
           <a:xfrm flipH="1">
-            <a:off x="8100008" y="5895991"/>
+            <a:off x="9914169" y="5895991"/>
             <a:ext cx="1641700" cy="600312"/>
           </a:xfrm>
           <a:prstGeom prst="rect">
@@ -13222,10 +14466,10 @@
       </p:sp>
       <p:sp>
         <p:nvSpPr>
-          <p:cNvPr id="73" name="テキスト ボックス 72">
-            <a:extLst>
-              <a:ext uri="{FF2B5EF4-FFF2-40B4-BE49-F238E27FC236}">
-                <a16:creationId xmlns:a16="http://schemas.microsoft.com/office/drawing/2014/main" id="{2D2BEC2B-21E3-448D-9AC8-DD9FFC8B93A7}"/>
+          <p:cNvPr id="74" name="テキスト ボックス 73">
+            <a:extLst>
+              <a:ext uri="{FF2B5EF4-FFF2-40B4-BE49-F238E27FC236}">
+                <a16:creationId xmlns:a16="http://schemas.microsoft.com/office/drawing/2014/main" id="{479379C8-1C0C-4AB7-869E-922F169BA114}"/>
               </a:ext>
             </a:extLst>
           </p:cNvPr>
@@ -13234,8 +14478,8 @@
         </p:nvSpPr>
         <p:spPr>
           <a:xfrm flipH="1">
-            <a:off x="9914169" y="5895991"/>
-            <a:ext cx="1641700" cy="600312"/>
+            <a:off x="2689144" y="3715974"/>
+            <a:ext cx="1641700" cy="584775"/>
           </a:xfrm>
           <a:prstGeom prst="rect">
             <a:avLst/>
@@ -13257,7 +14501,7 @@
                 <a:latin typeface="Impact" panose="020B0806030902050204" pitchFamily="34" charset="0"/>
                 <a:hlinkClick r:id="rId31" action="ppaction://hlinksldjump"/>
               </a:rPr>
-              <a:t>\ 1000</a:t>
+              <a:t>\ 600</a:t>
             </a:r>
             <a:endParaRPr kumimoji="1" lang="ja-JP" altLang="en-US" sz="3200" dirty="0">
               <a:solidFill>
@@ -13464,108 +14708,6 @@
           </a:p>
         </p:txBody>
       </p:sp>
-      <p:sp>
-        <p:nvSpPr>
-          <p:cNvPr id="3" name="楕円 2">
-            <a:extLst>
-              <a:ext uri="{FF2B5EF4-FFF2-40B4-BE49-F238E27FC236}">
-                <a16:creationId xmlns:a16="http://schemas.microsoft.com/office/drawing/2014/main" id="{775FE167-89F0-4504-957A-E7C5763FCF26}"/>
-              </a:ext>
-            </a:extLst>
-          </p:cNvPr>
-          <p:cNvSpPr/>
-          <p:nvPr/>
-        </p:nvSpPr>
-        <p:spPr>
-          <a:xfrm>
-            <a:off x="1384300" y="625641"/>
-            <a:ext cx="876300" cy="876300"/>
-          </a:xfrm>
-          <a:prstGeom prst="ellipse">
-            <a:avLst/>
-          </a:prstGeom>
-          <a:solidFill>
-            <a:srgbClr val="00B050"/>
-          </a:solidFill>
-          <a:ln>
-            <a:solidFill>
-              <a:schemeClr val="bg1"/>
-            </a:solidFill>
-          </a:ln>
-        </p:spPr>
-        <p:style>
-          <a:lnRef idx="2">
-            <a:schemeClr val="dk1"/>
-          </a:lnRef>
-          <a:fillRef idx="1">
-            <a:schemeClr val="lt1"/>
-          </a:fillRef>
-          <a:effectRef idx="0">
-            <a:schemeClr val="dk1"/>
-          </a:effectRef>
-          <a:fontRef idx="minor">
-            <a:schemeClr val="dk1"/>
-          </a:fontRef>
-        </p:style>
-        <p:txBody>
-          <a:bodyPr rtlCol="0" anchor="ctr"/>
-          <a:lstStyle/>
-          <a:p>
-            <a:pPr algn="ctr"/>
-            <a:endParaRPr kumimoji="1" lang="ja-JP" altLang="en-US"/>
-          </a:p>
-        </p:txBody>
-      </p:sp>
-      <p:sp>
-        <p:nvSpPr>
-          <p:cNvPr id="9" name="楕円 8">
-            <a:extLst>
-              <a:ext uri="{FF2B5EF4-FFF2-40B4-BE49-F238E27FC236}">
-                <a16:creationId xmlns:a16="http://schemas.microsoft.com/office/drawing/2014/main" id="{9619DE8D-74FC-40BE-A16F-0FFA76264BB2}"/>
-              </a:ext>
-            </a:extLst>
-          </p:cNvPr>
-          <p:cNvSpPr/>
-          <p:nvPr/>
-        </p:nvSpPr>
-        <p:spPr>
-          <a:xfrm>
-            <a:off x="1384300" y="616282"/>
-            <a:ext cx="876300" cy="876300"/>
-          </a:xfrm>
-          <a:prstGeom prst="ellipse">
-            <a:avLst/>
-          </a:prstGeom>
-          <a:noFill/>
-          <a:ln>
-            <a:solidFill>
-              <a:schemeClr val="bg1"/>
-            </a:solidFill>
-          </a:ln>
-        </p:spPr>
-        <p:style>
-          <a:lnRef idx="2">
-            <a:schemeClr val="dk1"/>
-          </a:lnRef>
-          <a:fillRef idx="1">
-            <a:schemeClr val="lt1"/>
-          </a:fillRef>
-          <a:effectRef idx="0">
-            <a:schemeClr val="dk1"/>
-          </a:effectRef>
-          <a:fontRef idx="minor">
-            <a:schemeClr val="dk1"/>
-          </a:fontRef>
-        </p:style>
-        <p:txBody>
-          <a:bodyPr rtlCol="0" anchor="ctr"/>
-          <a:lstStyle/>
-          <a:p>
-            <a:pPr algn="ctr"/>
-            <a:endParaRPr kumimoji="1" lang="ja-JP" altLang="en-US"/>
-          </a:p>
-        </p:txBody>
-      </p:sp>
     </p:spTree>
     <p:extLst>
       <p:ext uri="{BB962C8B-B14F-4D97-AF65-F5344CB8AC3E}">
@@ -13823,6 +14965,207 @@
           </a:p>
         </p:txBody>
       </p:sp>
+      <p:sp>
+        <p:nvSpPr>
+          <p:cNvPr id="10" name="楕円 9">
+            <a:extLst>
+              <a:ext uri="{FF2B5EF4-FFF2-40B4-BE49-F238E27FC236}">
+                <a16:creationId xmlns:a16="http://schemas.microsoft.com/office/drawing/2014/main" id="{875C4EF2-C8DC-41E5-9405-67A73504181A}"/>
+              </a:ext>
+            </a:extLst>
+          </p:cNvPr>
+          <p:cNvSpPr/>
+          <p:nvPr/>
+        </p:nvSpPr>
+        <p:spPr>
+          <a:xfrm>
+            <a:off x="1185445" y="486278"/>
+            <a:ext cx="876300" cy="876300"/>
+          </a:xfrm>
+          <a:prstGeom prst="ellipse">
+            <a:avLst/>
+          </a:prstGeom>
+          <a:solidFill>
+            <a:srgbClr val="FF0000"/>
+          </a:solidFill>
+          <a:ln>
+            <a:solidFill>
+              <a:schemeClr val="bg1"/>
+            </a:solidFill>
+          </a:ln>
+        </p:spPr>
+        <p:style>
+          <a:lnRef idx="2">
+            <a:schemeClr val="dk1"/>
+          </a:lnRef>
+          <a:fillRef idx="1">
+            <a:schemeClr val="lt1"/>
+          </a:fillRef>
+          <a:effectRef idx="0">
+            <a:schemeClr val="dk1"/>
+          </a:effectRef>
+          <a:fontRef idx="minor">
+            <a:schemeClr val="dk1"/>
+          </a:fontRef>
+        </p:style>
+        <p:txBody>
+          <a:bodyPr rtlCol="0" anchor="ctr"/>
+          <a:lstStyle/>
+          <a:p>
+            <a:pPr algn="ctr"/>
+            <a:endParaRPr kumimoji="1" lang="ja-JP" altLang="en-US"/>
+          </a:p>
+        </p:txBody>
+      </p:sp>
+      <p:sp>
+        <p:nvSpPr>
+          <p:cNvPr id="11" name="楕円 10">
+            <a:extLst>
+              <a:ext uri="{FF2B5EF4-FFF2-40B4-BE49-F238E27FC236}">
+                <a16:creationId xmlns:a16="http://schemas.microsoft.com/office/drawing/2014/main" id="{9663AF60-D1B0-4A6B-ABB1-7A998DE1F582}"/>
+              </a:ext>
+            </a:extLst>
+          </p:cNvPr>
+          <p:cNvSpPr/>
+          <p:nvPr/>
+        </p:nvSpPr>
+        <p:spPr>
+          <a:xfrm>
+            <a:off x="1185445" y="486278"/>
+            <a:ext cx="876300" cy="876300"/>
+          </a:xfrm>
+          <a:prstGeom prst="ellipse">
+            <a:avLst/>
+          </a:prstGeom>
+          <a:solidFill>
+            <a:srgbClr val="00B050"/>
+          </a:solidFill>
+          <a:ln>
+            <a:solidFill>
+              <a:schemeClr val="bg1"/>
+            </a:solidFill>
+          </a:ln>
+        </p:spPr>
+        <p:style>
+          <a:lnRef idx="2">
+            <a:schemeClr val="dk1"/>
+          </a:lnRef>
+          <a:fillRef idx="1">
+            <a:schemeClr val="lt1"/>
+          </a:fillRef>
+          <a:effectRef idx="0">
+            <a:schemeClr val="dk1"/>
+          </a:effectRef>
+          <a:fontRef idx="minor">
+            <a:schemeClr val="dk1"/>
+          </a:fontRef>
+        </p:style>
+        <p:txBody>
+          <a:bodyPr rtlCol="0" anchor="ctr"/>
+          <a:lstStyle/>
+          <a:p>
+            <a:pPr algn="ctr"/>
+            <a:endParaRPr kumimoji="1" lang="en-US" altLang="ja-JP" dirty="0"/>
+          </a:p>
+        </p:txBody>
+      </p:sp>
+      <p:sp>
+        <p:nvSpPr>
+          <p:cNvPr id="12" name="楕円 11">
+            <a:extLst>
+              <a:ext uri="{FF2B5EF4-FFF2-40B4-BE49-F238E27FC236}">
+                <a16:creationId xmlns:a16="http://schemas.microsoft.com/office/drawing/2014/main" id="{80E0C807-33D3-4EE7-AA35-4E669AC7F5E1}"/>
+              </a:ext>
+            </a:extLst>
+          </p:cNvPr>
+          <p:cNvSpPr/>
+          <p:nvPr/>
+        </p:nvSpPr>
+        <p:spPr>
+          <a:xfrm>
+            <a:off x="1185445" y="486278"/>
+            <a:ext cx="876300" cy="876300"/>
+          </a:xfrm>
+          <a:prstGeom prst="ellipse">
+            <a:avLst/>
+          </a:prstGeom>
+          <a:noFill/>
+          <a:ln>
+            <a:solidFill>
+              <a:schemeClr val="bg1"/>
+            </a:solidFill>
+          </a:ln>
+        </p:spPr>
+        <p:style>
+          <a:lnRef idx="2">
+            <a:schemeClr val="dk1"/>
+          </a:lnRef>
+          <a:fillRef idx="1">
+            <a:schemeClr val="lt1"/>
+          </a:fillRef>
+          <a:effectRef idx="0">
+            <a:schemeClr val="dk1"/>
+          </a:effectRef>
+          <a:fontRef idx="minor">
+            <a:schemeClr val="dk1"/>
+          </a:fontRef>
+        </p:style>
+        <p:txBody>
+          <a:bodyPr rtlCol="0" anchor="ctr"/>
+          <a:lstStyle/>
+          <a:p>
+            <a:pPr algn="ctr"/>
+            <a:endParaRPr kumimoji="1" lang="ja-JP" altLang="en-US"/>
+          </a:p>
+        </p:txBody>
+      </p:sp>
+      <p:pic>
+        <p:nvPicPr>
+          <p:cNvPr id="3076" name="Picture 4" descr="Cheeseburger Drawing | Free download on ClipArtMag">
+            <a:extLst>
+              <a:ext uri="{FF2B5EF4-FFF2-40B4-BE49-F238E27FC236}">
+                <a16:creationId xmlns:a16="http://schemas.microsoft.com/office/drawing/2014/main" id="{392B1007-A0B9-4788-A06A-9D33ADD17810}"/>
+              </a:ext>
+            </a:extLst>
+          </p:cNvPr>
+          <p:cNvPicPr>
+            <a:picLocks noChangeAspect="1" noChangeArrowheads="1"/>
+          </p:cNvPicPr>
+          <p:nvPr/>
+        </p:nvPicPr>
+        <p:blipFill>
+          <a:blip r:embed="rId3">
+            <a:extLst>
+              <a:ext uri="{28A0092B-C50C-407E-A947-70E740481C1C}">
+                <a14:useLocalDpi xmlns:a14="http://schemas.microsoft.com/office/drawing/2010/main" val="0"/>
+              </a:ext>
+            </a:extLst>
+          </a:blip>
+          <a:srcRect/>
+          <a:stretch>
+            <a:fillRect/>
+          </a:stretch>
+        </p:blipFill>
+        <p:spPr bwMode="auto">
+          <a:xfrm>
+            <a:off x="4611331" y="2018966"/>
+            <a:ext cx="2969340" cy="2938056"/>
+          </a:xfrm>
+          <a:prstGeom prst="rect">
+            <a:avLst/>
+          </a:prstGeom>
+          <a:noFill/>
+          <a:extLst>
+            <a:ext uri="{909E8E84-426E-40DD-AFC4-6F175D3DCCD1}">
+              <a14:hiddenFill xmlns:a14="http://schemas.microsoft.com/office/drawing/2010/main">
+                <a:solidFill>
+                  <a:srgbClr val="FFFFFF"/>
+                </a:solidFill>
+              </a14:hiddenFill>
+            </a:ext>
+          </a:extLst>
+        </p:spPr>
+      </p:pic>
     </p:spTree>
     <p:extLst>
       <p:ext uri="{BB962C8B-B14F-4D97-AF65-F5344CB8AC3E}">
@@ -13833,6 +15176,102 @@
   <p:clrMapOvr>
     <a:masterClrMapping/>
   </p:clrMapOvr>
+  <p:timing>
+    <p:tnLst>
+      <p:par>
+        <p:cTn id="1" dur="indefinite" restart="never" nodeType="tmRoot">
+          <p:childTnLst>
+            <p:seq concurrent="1" nextAc="seek">
+              <p:cTn id="2" dur="indefinite" nodeType="mainSeq">
+                <p:childTnLst>
+                  <p:par>
+                    <p:cTn id="3" fill="hold">
+                      <p:stCondLst>
+                        <p:cond delay="indefinite"/>
+                        <p:cond evt="onBegin" delay="0">
+                          <p:tn val="2"/>
+                        </p:cond>
+                      </p:stCondLst>
+                      <p:childTnLst>
+                        <p:par>
+                          <p:cTn id="4" fill="hold">
+                            <p:stCondLst>
+                              <p:cond delay="0"/>
+                            </p:stCondLst>
+                            <p:childTnLst>
+                              <p:par>
+                                <p:cTn id="5" presetID="21" presetClass="exit" presetSubtype="1" repeatCount="indefinite" fill="hold" grpId="0" nodeType="afterEffect">
+                                  <p:stCondLst>
+                                    <p:cond delay="3000"/>
+                                  </p:stCondLst>
+                                  <p:endCondLst>
+                                    <p:cond evt="onNext" delay="0">
+                                      <p:tgtEl>
+                                        <p:sldTgt/>
+                                      </p:tgtEl>
+                                    </p:cond>
+                                  </p:endCondLst>
+                                  <p:childTnLst>
+                                    <p:animEffect transition="out" filter="wheel(1)">
+                                      <p:cBhvr>
+                                        <p:cTn id="6" dur="15000"/>
+                                        <p:tgtEl>
+                                          <p:spTgt spid="11"/>
+                                        </p:tgtEl>
+                                      </p:cBhvr>
+                                    </p:animEffect>
+                                    <p:set>
+                                      <p:cBhvr>
+                                        <p:cTn id="7" dur="1" fill="hold">
+                                          <p:stCondLst>
+                                            <p:cond delay="14999"/>
+                                          </p:stCondLst>
+                                        </p:cTn>
+                                        <p:tgtEl>
+                                          <p:spTgt spid="11"/>
+                                        </p:tgtEl>
+                                        <p:attrNameLst>
+                                          <p:attrName>style.visibility</p:attrName>
+                                        </p:attrNameLst>
+                                      </p:cBhvr>
+                                      <p:to>
+                                        <p:strVal val="hidden"/>
+                                      </p:to>
+                                    </p:set>
+                                  </p:childTnLst>
+                                </p:cTn>
+                              </p:par>
+                            </p:childTnLst>
+                          </p:cTn>
+                        </p:par>
+                      </p:childTnLst>
+                    </p:cTn>
+                  </p:par>
+                </p:childTnLst>
+              </p:cTn>
+              <p:prevCondLst>
+                <p:cond evt="onPrev" delay="0">
+                  <p:tgtEl>
+                    <p:sldTgt/>
+                  </p:tgtEl>
+                </p:cond>
+              </p:prevCondLst>
+              <p:nextCondLst>
+                <p:cond evt="onNext" delay="0">
+                  <p:tgtEl>
+                    <p:sldTgt/>
+                  </p:tgtEl>
+                </p:cond>
+              </p:nextCondLst>
+            </p:seq>
+          </p:childTnLst>
+        </p:cTn>
+      </p:par>
+    </p:tnLst>
+    <p:bldLst>
+      <p:bldP spid="11" grpId="0" animBg="1"/>
+    </p:bldLst>
+  </p:timing>
 </p:sld>
 </file>
 
@@ -14014,7 +15453,7 @@
               <a:rPr kumimoji="1" lang="en-US" altLang="ja-JP" sz="9600" dirty="0">
                 <a:latin typeface="Impact" panose="020B0806030902050204" pitchFamily="34" charset="0"/>
               </a:rPr>
-              <a:t>Strawberry Tart</a:t>
+              <a:t>Cheeseburger</a:t>
             </a:r>
           </a:p>
         </p:txBody>
@@ -14323,6 +15762,160 @@
           </a:extLst>
         </p:spPr>
       </p:pic>
+      <p:sp>
+        <p:nvSpPr>
+          <p:cNvPr id="9" name="楕円 8">
+            <a:extLst>
+              <a:ext uri="{FF2B5EF4-FFF2-40B4-BE49-F238E27FC236}">
+                <a16:creationId xmlns:a16="http://schemas.microsoft.com/office/drawing/2014/main" id="{E7CFE039-175D-4909-AE46-196D7753C5C7}"/>
+              </a:ext>
+            </a:extLst>
+          </p:cNvPr>
+          <p:cNvSpPr/>
+          <p:nvPr/>
+        </p:nvSpPr>
+        <p:spPr>
+          <a:xfrm>
+            <a:off x="1185445" y="486278"/>
+            <a:ext cx="876300" cy="876300"/>
+          </a:xfrm>
+          <a:prstGeom prst="ellipse">
+            <a:avLst/>
+          </a:prstGeom>
+          <a:solidFill>
+            <a:srgbClr val="FF0000"/>
+          </a:solidFill>
+          <a:ln>
+            <a:solidFill>
+              <a:schemeClr val="bg1"/>
+            </a:solidFill>
+          </a:ln>
+        </p:spPr>
+        <p:style>
+          <a:lnRef idx="2">
+            <a:schemeClr val="dk1"/>
+          </a:lnRef>
+          <a:fillRef idx="1">
+            <a:schemeClr val="lt1"/>
+          </a:fillRef>
+          <a:effectRef idx="0">
+            <a:schemeClr val="dk1"/>
+          </a:effectRef>
+          <a:fontRef idx="minor">
+            <a:schemeClr val="dk1"/>
+          </a:fontRef>
+        </p:style>
+        <p:txBody>
+          <a:bodyPr rtlCol="0" anchor="ctr"/>
+          <a:lstStyle/>
+          <a:p>
+            <a:pPr algn="ctr"/>
+            <a:endParaRPr kumimoji="1" lang="ja-JP" altLang="en-US"/>
+          </a:p>
+        </p:txBody>
+      </p:sp>
+      <p:sp>
+        <p:nvSpPr>
+          <p:cNvPr id="10" name="楕円 9">
+            <a:extLst>
+              <a:ext uri="{FF2B5EF4-FFF2-40B4-BE49-F238E27FC236}">
+                <a16:creationId xmlns:a16="http://schemas.microsoft.com/office/drawing/2014/main" id="{FB127A70-498B-4081-943D-702B6A55E98E}"/>
+              </a:ext>
+            </a:extLst>
+          </p:cNvPr>
+          <p:cNvSpPr/>
+          <p:nvPr/>
+        </p:nvSpPr>
+        <p:spPr>
+          <a:xfrm>
+            <a:off x="1185445" y="486278"/>
+            <a:ext cx="876300" cy="876300"/>
+          </a:xfrm>
+          <a:prstGeom prst="ellipse">
+            <a:avLst/>
+          </a:prstGeom>
+          <a:solidFill>
+            <a:srgbClr val="00B050"/>
+          </a:solidFill>
+          <a:ln>
+            <a:solidFill>
+              <a:schemeClr val="bg1"/>
+            </a:solidFill>
+          </a:ln>
+        </p:spPr>
+        <p:style>
+          <a:lnRef idx="2">
+            <a:schemeClr val="dk1"/>
+          </a:lnRef>
+          <a:fillRef idx="1">
+            <a:schemeClr val="lt1"/>
+          </a:fillRef>
+          <a:effectRef idx="0">
+            <a:schemeClr val="dk1"/>
+          </a:effectRef>
+          <a:fontRef idx="minor">
+            <a:schemeClr val="dk1"/>
+          </a:fontRef>
+        </p:style>
+        <p:txBody>
+          <a:bodyPr rtlCol="0" anchor="ctr"/>
+          <a:lstStyle/>
+          <a:p>
+            <a:pPr algn="ctr"/>
+            <a:endParaRPr kumimoji="1" lang="en-US" altLang="ja-JP" dirty="0"/>
+          </a:p>
+        </p:txBody>
+      </p:sp>
+      <p:sp>
+        <p:nvSpPr>
+          <p:cNvPr id="11" name="楕円 10">
+            <a:extLst>
+              <a:ext uri="{FF2B5EF4-FFF2-40B4-BE49-F238E27FC236}">
+                <a16:creationId xmlns:a16="http://schemas.microsoft.com/office/drawing/2014/main" id="{426596A5-7DEF-4F1D-A7A6-ED4A3BC902E3}"/>
+              </a:ext>
+            </a:extLst>
+          </p:cNvPr>
+          <p:cNvSpPr/>
+          <p:nvPr/>
+        </p:nvSpPr>
+        <p:spPr>
+          <a:xfrm>
+            <a:off x="1185445" y="486278"/>
+            <a:ext cx="876300" cy="876300"/>
+          </a:xfrm>
+          <a:prstGeom prst="ellipse">
+            <a:avLst/>
+          </a:prstGeom>
+          <a:noFill/>
+          <a:ln>
+            <a:solidFill>
+              <a:schemeClr val="bg1"/>
+            </a:solidFill>
+          </a:ln>
+        </p:spPr>
+        <p:style>
+          <a:lnRef idx="2">
+            <a:schemeClr val="dk1"/>
+          </a:lnRef>
+          <a:fillRef idx="1">
+            <a:schemeClr val="lt1"/>
+          </a:fillRef>
+          <a:effectRef idx="0">
+            <a:schemeClr val="dk1"/>
+          </a:effectRef>
+          <a:fontRef idx="minor">
+            <a:schemeClr val="dk1"/>
+          </a:fontRef>
+        </p:style>
+        <p:txBody>
+          <a:bodyPr rtlCol="0" anchor="ctr"/>
+          <a:lstStyle/>
+          <a:p>
+            <a:pPr algn="ctr"/>
+            <a:endParaRPr kumimoji="1" lang="ja-JP" altLang="en-US"/>
+          </a:p>
+        </p:txBody>
+      </p:sp>
     </p:spTree>
     <p:extLst>
       <p:ext uri="{BB962C8B-B14F-4D97-AF65-F5344CB8AC3E}">
@@ -14333,6 +15926,102 @@
   <p:clrMapOvr>
     <a:masterClrMapping/>
   </p:clrMapOvr>
+  <p:timing>
+    <p:tnLst>
+      <p:par>
+        <p:cTn id="1" dur="indefinite" restart="never" nodeType="tmRoot">
+          <p:childTnLst>
+            <p:seq concurrent="1" nextAc="seek">
+              <p:cTn id="2" dur="indefinite" nodeType="mainSeq">
+                <p:childTnLst>
+                  <p:par>
+                    <p:cTn id="3" fill="hold">
+                      <p:stCondLst>
+                        <p:cond delay="indefinite"/>
+                        <p:cond evt="onBegin" delay="0">
+                          <p:tn val="2"/>
+                        </p:cond>
+                      </p:stCondLst>
+                      <p:childTnLst>
+                        <p:par>
+                          <p:cTn id="4" fill="hold">
+                            <p:stCondLst>
+                              <p:cond delay="0"/>
+                            </p:stCondLst>
+                            <p:childTnLst>
+                              <p:par>
+                                <p:cTn id="5" presetID="21" presetClass="exit" presetSubtype="1" repeatCount="indefinite" fill="hold" grpId="0" nodeType="afterEffect">
+                                  <p:stCondLst>
+                                    <p:cond delay="3000"/>
+                                  </p:stCondLst>
+                                  <p:endCondLst>
+                                    <p:cond evt="onNext" delay="0">
+                                      <p:tgtEl>
+                                        <p:sldTgt/>
+                                      </p:tgtEl>
+                                    </p:cond>
+                                  </p:endCondLst>
+                                  <p:childTnLst>
+                                    <p:animEffect transition="out" filter="wheel(1)">
+                                      <p:cBhvr>
+                                        <p:cTn id="6" dur="15000"/>
+                                        <p:tgtEl>
+                                          <p:spTgt spid="10"/>
+                                        </p:tgtEl>
+                                      </p:cBhvr>
+                                    </p:animEffect>
+                                    <p:set>
+                                      <p:cBhvr>
+                                        <p:cTn id="7" dur="1" fill="hold">
+                                          <p:stCondLst>
+                                            <p:cond delay="14999"/>
+                                          </p:stCondLst>
+                                        </p:cTn>
+                                        <p:tgtEl>
+                                          <p:spTgt spid="10"/>
+                                        </p:tgtEl>
+                                        <p:attrNameLst>
+                                          <p:attrName>style.visibility</p:attrName>
+                                        </p:attrNameLst>
+                                      </p:cBhvr>
+                                      <p:to>
+                                        <p:strVal val="hidden"/>
+                                      </p:to>
+                                    </p:set>
+                                  </p:childTnLst>
+                                </p:cTn>
+                              </p:par>
+                            </p:childTnLst>
+                          </p:cTn>
+                        </p:par>
+                      </p:childTnLst>
+                    </p:cTn>
+                  </p:par>
+                </p:childTnLst>
+              </p:cTn>
+              <p:prevCondLst>
+                <p:cond evt="onPrev" delay="0">
+                  <p:tgtEl>
+                    <p:sldTgt/>
+                  </p:tgtEl>
+                </p:cond>
+              </p:prevCondLst>
+              <p:nextCondLst>
+                <p:cond evt="onNext" delay="0">
+                  <p:tgtEl>
+                    <p:sldTgt/>
+                  </p:tgtEl>
+                </p:cond>
+              </p:nextCondLst>
+            </p:seq>
+          </p:childTnLst>
+        </p:cTn>
+      </p:par>
+    </p:tnLst>
+    <p:bldLst>
+      <p:bldP spid="10" grpId="0" animBg="1"/>
+    </p:bldLst>
+  </p:timing>
 </p:sld>
 </file>
 
@@ -14820,12 +16509,166 @@
           </a:p>
         </p:txBody>
       </p:sp>
+      <p:sp>
+        <p:nvSpPr>
+          <p:cNvPr id="10" name="楕円 9">
+            <a:extLst>
+              <a:ext uri="{FF2B5EF4-FFF2-40B4-BE49-F238E27FC236}">
+                <a16:creationId xmlns:a16="http://schemas.microsoft.com/office/drawing/2014/main" id="{B74F18F1-1E81-43A1-8369-303A9791F1C4}"/>
+              </a:ext>
+            </a:extLst>
+          </p:cNvPr>
+          <p:cNvSpPr/>
+          <p:nvPr/>
+        </p:nvSpPr>
+        <p:spPr>
+          <a:xfrm>
+            <a:off x="1185445" y="486278"/>
+            <a:ext cx="876300" cy="876300"/>
+          </a:xfrm>
+          <a:prstGeom prst="ellipse">
+            <a:avLst/>
+          </a:prstGeom>
+          <a:solidFill>
+            <a:srgbClr val="FF0000"/>
+          </a:solidFill>
+          <a:ln>
+            <a:solidFill>
+              <a:schemeClr val="bg1"/>
+            </a:solidFill>
+          </a:ln>
+        </p:spPr>
+        <p:style>
+          <a:lnRef idx="2">
+            <a:schemeClr val="dk1"/>
+          </a:lnRef>
+          <a:fillRef idx="1">
+            <a:schemeClr val="lt1"/>
+          </a:fillRef>
+          <a:effectRef idx="0">
+            <a:schemeClr val="dk1"/>
+          </a:effectRef>
+          <a:fontRef idx="minor">
+            <a:schemeClr val="dk1"/>
+          </a:fontRef>
+        </p:style>
+        <p:txBody>
+          <a:bodyPr rtlCol="0" anchor="ctr"/>
+          <a:lstStyle/>
+          <a:p>
+            <a:pPr algn="ctr"/>
+            <a:endParaRPr kumimoji="1" lang="ja-JP" altLang="en-US"/>
+          </a:p>
+        </p:txBody>
+      </p:sp>
+      <p:sp>
+        <p:nvSpPr>
+          <p:cNvPr id="11" name="楕円 10">
+            <a:extLst>
+              <a:ext uri="{FF2B5EF4-FFF2-40B4-BE49-F238E27FC236}">
+                <a16:creationId xmlns:a16="http://schemas.microsoft.com/office/drawing/2014/main" id="{661F0575-FF52-43E2-B3AA-CBB9658DA125}"/>
+              </a:ext>
+            </a:extLst>
+          </p:cNvPr>
+          <p:cNvSpPr/>
+          <p:nvPr/>
+        </p:nvSpPr>
+        <p:spPr>
+          <a:xfrm>
+            <a:off x="1185445" y="486278"/>
+            <a:ext cx="876300" cy="876300"/>
+          </a:xfrm>
+          <a:prstGeom prst="ellipse">
+            <a:avLst/>
+          </a:prstGeom>
+          <a:solidFill>
+            <a:srgbClr val="00B050"/>
+          </a:solidFill>
+          <a:ln>
+            <a:solidFill>
+              <a:schemeClr val="bg1"/>
+            </a:solidFill>
+          </a:ln>
+        </p:spPr>
+        <p:style>
+          <a:lnRef idx="2">
+            <a:schemeClr val="dk1"/>
+          </a:lnRef>
+          <a:fillRef idx="1">
+            <a:schemeClr val="lt1"/>
+          </a:fillRef>
+          <a:effectRef idx="0">
+            <a:schemeClr val="dk1"/>
+          </a:effectRef>
+          <a:fontRef idx="minor">
+            <a:schemeClr val="dk1"/>
+          </a:fontRef>
+        </p:style>
+        <p:txBody>
+          <a:bodyPr rtlCol="0" anchor="ctr"/>
+          <a:lstStyle/>
+          <a:p>
+            <a:pPr algn="ctr"/>
+            <a:endParaRPr kumimoji="1" lang="en-US" altLang="ja-JP" dirty="0"/>
+          </a:p>
+        </p:txBody>
+      </p:sp>
+      <p:sp>
+        <p:nvSpPr>
+          <p:cNvPr id="12" name="楕円 11">
+            <a:extLst>
+              <a:ext uri="{FF2B5EF4-FFF2-40B4-BE49-F238E27FC236}">
+                <a16:creationId xmlns:a16="http://schemas.microsoft.com/office/drawing/2014/main" id="{CB90CFFC-8A15-4C14-BE9C-B197E7A4B53A}"/>
+              </a:ext>
+            </a:extLst>
+          </p:cNvPr>
+          <p:cNvSpPr/>
+          <p:nvPr/>
+        </p:nvSpPr>
+        <p:spPr>
+          <a:xfrm>
+            <a:off x="1185445" y="486278"/>
+            <a:ext cx="876300" cy="876300"/>
+          </a:xfrm>
+          <a:prstGeom prst="ellipse">
+            <a:avLst/>
+          </a:prstGeom>
+          <a:noFill/>
+          <a:ln>
+            <a:solidFill>
+              <a:schemeClr val="bg1"/>
+            </a:solidFill>
+          </a:ln>
+        </p:spPr>
+        <p:style>
+          <a:lnRef idx="2">
+            <a:schemeClr val="dk1"/>
+          </a:lnRef>
+          <a:fillRef idx="1">
+            <a:schemeClr val="lt1"/>
+          </a:fillRef>
+          <a:effectRef idx="0">
+            <a:schemeClr val="dk1"/>
+          </a:effectRef>
+          <a:fontRef idx="minor">
+            <a:schemeClr val="dk1"/>
+          </a:fontRef>
+        </p:style>
+        <p:txBody>
+          <a:bodyPr rtlCol="0" anchor="ctr"/>
+          <a:lstStyle/>
+          <a:p>
+            <a:pPr algn="ctr"/>
+            <a:endParaRPr kumimoji="1" lang="ja-JP" altLang="en-US"/>
+          </a:p>
+        </p:txBody>
+      </p:sp>
       <p:pic>
         <p:nvPicPr>
-          <p:cNvPr id="29698" name="Picture 2" descr="Black and White Cow Face Drawing in Milk Carton">
-            <a:extLst>
-              <a:ext uri="{FF2B5EF4-FFF2-40B4-BE49-F238E27FC236}">
-                <a16:creationId xmlns:a16="http://schemas.microsoft.com/office/drawing/2014/main" id="{62D399C6-A8B1-4A4D-BD86-D129830865EB}"/>
+          <p:cNvPr id="29702" name="Picture 6" descr="How To Draw A Orange Juice">
+            <a:extLst>
+              <a:ext uri="{FF2B5EF4-FFF2-40B4-BE49-F238E27FC236}">
+                <a16:creationId xmlns:a16="http://schemas.microsoft.com/office/drawing/2014/main" id="{219982C3-9A41-4551-A6A9-91020A096E9D}"/>
               </a:ext>
             </a:extLst>
           </p:cNvPr>
@@ -14849,8 +16692,8 @@
         </p:blipFill>
         <p:spPr bwMode="auto">
           <a:xfrm>
-            <a:off x="4756483" y="2008045"/>
-            <a:ext cx="2679032" cy="2969066"/>
+            <a:off x="4640826" y="2062317"/>
+            <a:ext cx="2910348" cy="2910348"/>
           </a:xfrm>
           <a:prstGeom prst="rect">
             <a:avLst/>
@@ -14877,6 +16720,102 @@
   <p:clrMapOvr>
     <a:masterClrMapping/>
   </p:clrMapOvr>
+  <p:timing>
+    <p:tnLst>
+      <p:par>
+        <p:cTn id="1" dur="indefinite" restart="never" nodeType="tmRoot">
+          <p:childTnLst>
+            <p:seq concurrent="1" nextAc="seek">
+              <p:cTn id="2" dur="indefinite" nodeType="mainSeq">
+                <p:childTnLst>
+                  <p:par>
+                    <p:cTn id="3" fill="hold">
+                      <p:stCondLst>
+                        <p:cond delay="indefinite"/>
+                        <p:cond evt="onBegin" delay="0">
+                          <p:tn val="2"/>
+                        </p:cond>
+                      </p:stCondLst>
+                      <p:childTnLst>
+                        <p:par>
+                          <p:cTn id="4" fill="hold">
+                            <p:stCondLst>
+                              <p:cond delay="0"/>
+                            </p:stCondLst>
+                            <p:childTnLst>
+                              <p:par>
+                                <p:cTn id="5" presetID="21" presetClass="exit" presetSubtype="1" repeatCount="indefinite" fill="hold" grpId="0" nodeType="afterEffect">
+                                  <p:stCondLst>
+                                    <p:cond delay="3000"/>
+                                  </p:stCondLst>
+                                  <p:endCondLst>
+                                    <p:cond evt="onNext" delay="0">
+                                      <p:tgtEl>
+                                        <p:sldTgt/>
+                                      </p:tgtEl>
+                                    </p:cond>
+                                  </p:endCondLst>
+                                  <p:childTnLst>
+                                    <p:animEffect transition="out" filter="wheel(1)">
+                                      <p:cBhvr>
+                                        <p:cTn id="6" dur="15000"/>
+                                        <p:tgtEl>
+                                          <p:spTgt spid="11"/>
+                                        </p:tgtEl>
+                                      </p:cBhvr>
+                                    </p:animEffect>
+                                    <p:set>
+                                      <p:cBhvr>
+                                        <p:cTn id="7" dur="1" fill="hold">
+                                          <p:stCondLst>
+                                            <p:cond delay="14999"/>
+                                          </p:stCondLst>
+                                        </p:cTn>
+                                        <p:tgtEl>
+                                          <p:spTgt spid="11"/>
+                                        </p:tgtEl>
+                                        <p:attrNameLst>
+                                          <p:attrName>style.visibility</p:attrName>
+                                        </p:attrNameLst>
+                                      </p:cBhvr>
+                                      <p:to>
+                                        <p:strVal val="hidden"/>
+                                      </p:to>
+                                    </p:set>
+                                  </p:childTnLst>
+                                </p:cTn>
+                              </p:par>
+                            </p:childTnLst>
+                          </p:cTn>
+                        </p:par>
+                      </p:childTnLst>
+                    </p:cTn>
+                  </p:par>
+                </p:childTnLst>
+              </p:cTn>
+              <p:prevCondLst>
+                <p:cond evt="onPrev" delay="0">
+                  <p:tgtEl>
+                    <p:sldTgt/>
+                  </p:tgtEl>
+                </p:cond>
+              </p:prevCondLst>
+              <p:nextCondLst>
+                <p:cond evt="onNext" delay="0">
+                  <p:tgtEl>
+                    <p:sldTgt/>
+                  </p:tgtEl>
+                </p:cond>
+              </p:nextCondLst>
+            </p:seq>
+          </p:childTnLst>
+        </p:cTn>
+      </p:par>
+    </p:tnLst>
+    <p:bldLst>
+      <p:bldP spid="11" grpId="0" animBg="1"/>
+    </p:bldLst>
+  </p:timing>
 </p:sld>
 </file>
 
@@ -15058,7 +16997,7 @@
               <a:rPr kumimoji="1" lang="en-US" altLang="ja-JP" sz="9600" dirty="0">
                 <a:latin typeface="Impact" panose="020B0806030902050204" pitchFamily="34" charset="0"/>
               </a:rPr>
-              <a:t>Milk</a:t>
+              <a:t>Juice</a:t>
             </a:r>
           </a:p>
         </p:txBody>
@@ -15367,6 +17306,160 @@
           </a:extLst>
         </p:spPr>
       </p:pic>
+      <p:sp>
+        <p:nvSpPr>
+          <p:cNvPr id="10" name="楕円 9">
+            <a:extLst>
+              <a:ext uri="{FF2B5EF4-FFF2-40B4-BE49-F238E27FC236}">
+                <a16:creationId xmlns:a16="http://schemas.microsoft.com/office/drawing/2014/main" id="{2BB24581-C575-4CAB-BA66-B384AE874AC6}"/>
+              </a:ext>
+            </a:extLst>
+          </p:cNvPr>
+          <p:cNvSpPr/>
+          <p:nvPr/>
+        </p:nvSpPr>
+        <p:spPr>
+          <a:xfrm>
+            <a:off x="1185445" y="486278"/>
+            <a:ext cx="876300" cy="876300"/>
+          </a:xfrm>
+          <a:prstGeom prst="ellipse">
+            <a:avLst/>
+          </a:prstGeom>
+          <a:solidFill>
+            <a:srgbClr val="FF0000"/>
+          </a:solidFill>
+          <a:ln>
+            <a:solidFill>
+              <a:schemeClr val="bg1"/>
+            </a:solidFill>
+          </a:ln>
+        </p:spPr>
+        <p:style>
+          <a:lnRef idx="2">
+            <a:schemeClr val="dk1"/>
+          </a:lnRef>
+          <a:fillRef idx="1">
+            <a:schemeClr val="lt1"/>
+          </a:fillRef>
+          <a:effectRef idx="0">
+            <a:schemeClr val="dk1"/>
+          </a:effectRef>
+          <a:fontRef idx="minor">
+            <a:schemeClr val="dk1"/>
+          </a:fontRef>
+        </p:style>
+        <p:txBody>
+          <a:bodyPr rtlCol="0" anchor="ctr"/>
+          <a:lstStyle/>
+          <a:p>
+            <a:pPr algn="ctr"/>
+            <a:endParaRPr kumimoji="1" lang="ja-JP" altLang="en-US"/>
+          </a:p>
+        </p:txBody>
+      </p:sp>
+      <p:sp>
+        <p:nvSpPr>
+          <p:cNvPr id="11" name="楕円 10">
+            <a:extLst>
+              <a:ext uri="{FF2B5EF4-FFF2-40B4-BE49-F238E27FC236}">
+                <a16:creationId xmlns:a16="http://schemas.microsoft.com/office/drawing/2014/main" id="{8C5F1BFA-4FF4-4A2B-81A0-F4D301E5053B}"/>
+              </a:ext>
+            </a:extLst>
+          </p:cNvPr>
+          <p:cNvSpPr/>
+          <p:nvPr/>
+        </p:nvSpPr>
+        <p:spPr>
+          <a:xfrm>
+            <a:off x="1185445" y="486278"/>
+            <a:ext cx="876300" cy="876300"/>
+          </a:xfrm>
+          <a:prstGeom prst="ellipse">
+            <a:avLst/>
+          </a:prstGeom>
+          <a:solidFill>
+            <a:srgbClr val="00B050"/>
+          </a:solidFill>
+          <a:ln>
+            <a:solidFill>
+              <a:schemeClr val="bg1"/>
+            </a:solidFill>
+          </a:ln>
+        </p:spPr>
+        <p:style>
+          <a:lnRef idx="2">
+            <a:schemeClr val="dk1"/>
+          </a:lnRef>
+          <a:fillRef idx="1">
+            <a:schemeClr val="lt1"/>
+          </a:fillRef>
+          <a:effectRef idx="0">
+            <a:schemeClr val="dk1"/>
+          </a:effectRef>
+          <a:fontRef idx="minor">
+            <a:schemeClr val="dk1"/>
+          </a:fontRef>
+        </p:style>
+        <p:txBody>
+          <a:bodyPr rtlCol="0" anchor="ctr"/>
+          <a:lstStyle/>
+          <a:p>
+            <a:pPr algn="ctr"/>
+            <a:endParaRPr kumimoji="1" lang="en-US" altLang="ja-JP" dirty="0"/>
+          </a:p>
+        </p:txBody>
+      </p:sp>
+      <p:sp>
+        <p:nvSpPr>
+          <p:cNvPr id="12" name="楕円 11">
+            <a:extLst>
+              <a:ext uri="{FF2B5EF4-FFF2-40B4-BE49-F238E27FC236}">
+                <a16:creationId xmlns:a16="http://schemas.microsoft.com/office/drawing/2014/main" id="{21B312AA-3135-4F88-8A66-9519D0BDDBB1}"/>
+              </a:ext>
+            </a:extLst>
+          </p:cNvPr>
+          <p:cNvSpPr/>
+          <p:nvPr/>
+        </p:nvSpPr>
+        <p:spPr>
+          <a:xfrm>
+            <a:off x="1185445" y="486278"/>
+            <a:ext cx="876300" cy="876300"/>
+          </a:xfrm>
+          <a:prstGeom prst="ellipse">
+            <a:avLst/>
+          </a:prstGeom>
+          <a:noFill/>
+          <a:ln>
+            <a:solidFill>
+              <a:schemeClr val="bg1"/>
+            </a:solidFill>
+          </a:ln>
+        </p:spPr>
+        <p:style>
+          <a:lnRef idx="2">
+            <a:schemeClr val="dk1"/>
+          </a:lnRef>
+          <a:fillRef idx="1">
+            <a:schemeClr val="lt1"/>
+          </a:fillRef>
+          <a:effectRef idx="0">
+            <a:schemeClr val="dk1"/>
+          </a:effectRef>
+          <a:fontRef idx="minor">
+            <a:schemeClr val="dk1"/>
+          </a:fontRef>
+        </p:style>
+        <p:txBody>
+          <a:bodyPr rtlCol="0" anchor="ctr"/>
+          <a:lstStyle/>
+          <a:p>
+            <a:pPr algn="ctr"/>
+            <a:endParaRPr kumimoji="1" lang="ja-JP" altLang="en-US"/>
+          </a:p>
+        </p:txBody>
+      </p:sp>
     </p:spTree>
     <p:extLst>
       <p:ext uri="{BB962C8B-B14F-4D97-AF65-F5344CB8AC3E}">
@@ -15377,6 +17470,102 @@
   <p:clrMapOvr>
     <a:masterClrMapping/>
   </p:clrMapOvr>
+  <p:timing>
+    <p:tnLst>
+      <p:par>
+        <p:cTn id="1" dur="indefinite" restart="never" nodeType="tmRoot">
+          <p:childTnLst>
+            <p:seq concurrent="1" nextAc="seek">
+              <p:cTn id="2" dur="indefinite" nodeType="mainSeq">
+                <p:childTnLst>
+                  <p:par>
+                    <p:cTn id="3" fill="hold">
+                      <p:stCondLst>
+                        <p:cond delay="indefinite"/>
+                        <p:cond evt="onBegin" delay="0">
+                          <p:tn val="2"/>
+                        </p:cond>
+                      </p:stCondLst>
+                      <p:childTnLst>
+                        <p:par>
+                          <p:cTn id="4" fill="hold">
+                            <p:stCondLst>
+                              <p:cond delay="0"/>
+                            </p:stCondLst>
+                            <p:childTnLst>
+                              <p:par>
+                                <p:cTn id="5" presetID="21" presetClass="exit" presetSubtype="1" repeatCount="indefinite" fill="hold" grpId="0" nodeType="afterEffect">
+                                  <p:stCondLst>
+                                    <p:cond delay="3000"/>
+                                  </p:stCondLst>
+                                  <p:endCondLst>
+                                    <p:cond evt="onNext" delay="0">
+                                      <p:tgtEl>
+                                        <p:sldTgt/>
+                                      </p:tgtEl>
+                                    </p:cond>
+                                  </p:endCondLst>
+                                  <p:childTnLst>
+                                    <p:animEffect transition="out" filter="wheel(1)">
+                                      <p:cBhvr>
+                                        <p:cTn id="6" dur="15000"/>
+                                        <p:tgtEl>
+                                          <p:spTgt spid="11"/>
+                                        </p:tgtEl>
+                                      </p:cBhvr>
+                                    </p:animEffect>
+                                    <p:set>
+                                      <p:cBhvr>
+                                        <p:cTn id="7" dur="1" fill="hold">
+                                          <p:stCondLst>
+                                            <p:cond delay="14999"/>
+                                          </p:stCondLst>
+                                        </p:cTn>
+                                        <p:tgtEl>
+                                          <p:spTgt spid="11"/>
+                                        </p:tgtEl>
+                                        <p:attrNameLst>
+                                          <p:attrName>style.visibility</p:attrName>
+                                        </p:attrNameLst>
+                                      </p:cBhvr>
+                                      <p:to>
+                                        <p:strVal val="hidden"/>
+                                      </p:to>
+                                    </p:set>
+                                  </p:childTnLst>
+                                </p:cTn>
+                              </p:par>
+                            </p:childTnLst>
+                          </p:cTn>
+                        </p:par>
+                      </p:childTnLst>
+                    </p:cTn>
+                  </p:par>
+                </p:childTnLst>
+              </p:cTn>
+              <p:prevCondLst>
+                <p:cond evt="onPrev" delay="0">
+                  <p:tgtEl>
+                    <p:sldTgt/>
+                  </p:tgtEl>
+                </p:cond>
+              </p:prevCondLst>
+              <p:nextCondLst>
+                <p:cond evt="onNext" delay="0">
+                  <p:tgtEl>
+                    <p:sldTgt/>
+                  </p:tgtEl>
+                </p:cond>
+              </p:nextCondLst>
+            </p:seq>
+          </p:childTnLst>
+        </p:cTn>
+      </p:par>
+    </p:tnLst>
+    <p:bldLst>
+      <p:bldP spid="11" grpId="0" animBg="1"/>
+    </p:bldLst>
+  </p:timing>
 </p:sld>
 </file>
 
@@ -15820,12 +18009,166 @@
           </a:p>
         </p:txBody>
       </p:sp>
+      <p:sp>
+        <p:nvSpPr>
+          <p:cNvPr id="9" name="楕円 8">
+            <a:extLst>
+              <a:ext uri="{FF2B5EF4-FFF2-40B4-BE49-F238E27FC236}">
+                <a16:creationId xmlns:a16="http://schemas.microsoft.com/office/drawing/2014/main" id="{15F3276D-EDC5-4772-A654-96C02C5E4E8C}"/>
+              </a:ext>
+            </a:extLst>
+          </p:cNvPr>
+          <p:cNvSpPr/>
+          <p:nvPr/>
+        </p:nvSpPr>
+        <p:spPr>
+          <a:xfrm>
+            <a:off x="1185445" y="486278"/>
+            <a:ext cx="876300" cy="876300"/>
+          </a:xfrm>
+          <a:prstGeom prst="ellipse">
+            <a:avLst/>
+          </a:prstGeom>
+          <a:solidFill>
+            <a:srgbClr val="FF0000"/>
+          </a:solidFill>
+          <a:ln>
+            <a:solidFill>
+              <a:schemeClr val="bg1"/>
+            </a:solidFill>
+          </a:ln>
+        </p:spPr>
+        <p:style>
+          <a:lnRef idx="2">
+            <a:schemeClr val="dk1"/>
+          </a:lnRef>
+          <a:fillRef idx="1">
+            <a:schemeClr val="lt1"/>
+          </a:fillRef>
+          <a:effectRef idx="0">
+            <a:schemeClr val="dk1"/>
+          </a:effectRef>
+          <a:fontRef idx="minor">
+            <a:schemeClr val="dk1"/>
+          </a:fontRef>
+        </p:style>
+        <p:txBody>
+          <a:bodyPr rtlCol="0" anchor="ctr"/>
+          <a:lstStyle/>
+          <a:p>
+            <a:pPr algn="ctr"/>
+            <a:endParaRPr kumimoji="1" lang="ja-JP" altLang="en-US"/>
+          </a:p>
+        </p:txBody>
+      </p:sp>
+      <p:sp>
+        <p:nvSpPr>
+          <p:cNvPr id="10" name="楕円 9">
+            <a:extLst>
+              <a:ext uri="{FF2B5EF4-FFF2-40B4-BE49-F238E27FC236}">
+                <a16:creationId xmlns:a16="http://schemas.microsoft.com/office/drawing/2014/main" id="{0D238D61-6C7F-4871-A55B-3D8CFEB2A5F2}"/>
+              </a:ext>
+            </a:extLst>
+          </p:cNvPr>
+          <p:cNvSpPr/>
+          <p:nvPr/>
+        </p:nvSpPr>
+        <p:spPr>
+          <a:xfrm>
+            <a:off x="1185445" y="486278"/>
+            <a:ext cx="876300" cy="876300"/>
+          </a:xfrm>
+          <a:prstGeom prst="ellipse">
+            <a:avLst/>
+          </a:prstGeom>
+          <a:solidFill>
+            <a:srgbClr val="00B050"/>
+          </a:solidFill>
+          <a:ln>
+            <a:solidFill>
+              <a:schemeClr val="bg1"/>
+            </a:solidFill>
+          </a:ln>
+        </p:spPr>
+        <p:style>
+          <a:lnRef idx="2">
+            <a:schemeClr val="dk1"/>
+          </a:lnRef>
+          <a:fillRef idx="1">
+            <a:schemeClr val="lt1"/>
+          </a:fillRef>
+          <a:effectRef idx="0">
+            <a:schemeClr val="dk1"/>
+          </a:effectRef>
+          <a:fontRef idx="minor">
+            <a:schemeClr val="dk1"/>
+          </a:fontRef>
+        </p:style>
+        <p:txBody>
+          <a:bodyPr rtlCol="0" anchor="ctr"/>
+          <a:lstStyle/>
+          <a:p>
+            <a:pPr algn="ctr"/>
+            <a:endParaRPr kumimoji="1" lang="en-US" altLang="ja-JP" dirty="0"/>
+          </a:p>
+        </p:txBody>
+      </p:sp>
+      <p:sp>
+        <p:nvSpPr>
+          <p:cNvPr id="11" name="楕円 10">
+            <a:extLst>
+              <a:ext uri="{FF2B5EF4-FFF2-40B4-BE49-F238E27FC236}">
+                <a16:creationId xmlns:a16="http://schemas.microsoft.com/office/drawing/2014/main" id="{CDED11FB-9927-4B3E-AFE9-F23561AFAAC4}"/>
+              </a:ext>
+            </a:extLst>
+          </p:cNvPr>
+          <p:cNvSpPr/>
+          <p:nvPr/>
+        </p:nvSpPr>
+        <p:spPr>
+          <a:xfrm>
+            <a:off x="1185445" y="486278"/>
+            <a:ext cx="876300" cy="876300"/>
+          </a:xfrm>
+          <a:prstGeom prst="ellipse">
+            <a:avLst/>
+          </a:prstGeom>
+          <a:noFill/>
+          <a:ln>
+            <a:solidFill>
+              <a:schemeClr val="bg1"/>
+            </a:solidFill>
+          </a:ln>
+        </p:spPr>
+        <p:style>
+          <a:lnRef idx="2">
+            <a:schemeClr val="dk1"/>
+          </a:lnRef>
+          <a:fillRef idx="1">
+            <a:schemeClr val="lt1"/>
+          </a:fillRef>
+          <a:effectRef idx="0">
+            <a:schemeClr val="dk1"/>
+          </a:effectRef>
+          <a:fontRef idx="minor">
+            <a:schemeClr val="dk1"/>
+          </a:fontRef>
+        </p:style>
+        <p:txBody>
+          <a:bodyPr rtlCol="0" anchor="ctr"/>
+          <a:lstStyle/>
+          <a:p>
+            <a:pPr algn="ctr"/>
+            <a:endParaRPr kumimoji="1" lang="ja-JP" altLang="en-US"/>
+          </a:p>
+        </p:txBody>
+      </p:sp>
       <p:pic>
         <p:nvPicPr>
-          <p:cNvPr id="25602" name="Picture 2" descr="Soda Drawing">
-            <a:extLst>
-              <a:ext uri="{FF2B5EF4-FFF2-40B4-BE49-F238E27FC236}">
-                <a16:creationId xmlns:a16="http://schemas.microsoft.com/office/drawing/2014/main" id="{B8BB99D3-E15B-42B4-BFE3-AF174CE82161}"/>
+          <p:cNvPr id="25604" name="Picture 4" descr="A Lemonade Drawing at Andy Sage blog">
+            <a:extLst>
+              <a:ext uri="{FF2B5EF4-FFF2-40B4-BE49-F238E27FC236}">
+                <a16:creationId xmlns:a16="http://schemas.microsoft.com/office/drawing/2014/main" id="{3E2F2ACA-A867-4765-B162-4828A444CB15}"/>
               </a:ext>
             </a:extLst>
           </p:cNvPr>
@@ -15849,8 +18192,8 @@
         </p:blipFill>
         <p:spPr bwMode="auto">
           <a:xfrm>
-            <a:off x="4675045" y="2080234"/>
-            <a:ext cx="2841910" cy="2841910"/>
+            <a:off x="4931697" y="2020530"/>
+            <a:ext cx="2328606" cy="2993922"/>
           </a:xfrm>
           <a:prstGeom prst="rect">
             <a:avLst/>
@@ -15877,6 +18220,102 @@
   <p:clrMapOvr>
     <a:masterClrMapping/>
   </p:clrMapOvr>
+  <p:timing>
+    <p:tnLst>
+      <p:par>
+        <p:cTn id="1" dur="indefinite" restart="never" nodeType="tmRoot">
+          <p:childTnLst>
+            <p:seq concurrent="1" nextAc="seek">
+              <p:cTn id="2" dur="indefinite" nodeType="mainSeq">
+                <p:childTnLst>
+                  <p:par>
+                    <p:cTn id="3" fill="hold">
+                      <p:stCondLst>
+                        <p:cond delay="indefinite"/>
+                        <p:cond evt="onBegin" delay="0">
+                          <p:tn val="2"/>
+                        </p:cond>
+                      </p:stCondLst>
+                      <p:childTnLst>
+                        <p:par>
+                          <p:cTn id="4" fill="hold">
+                            <p:stCondLst>
+                              <p:cond delay="0"/>
+                            </p:stCondLst>
+                            <p:childTnLst>
+                              <p:par>
+                                <p:cTn id="5" presetID="21" presetClass="exit" presetSubtype="1" repeatCount="indefinite" fill="hold" grpId="0" nodeType="afterEffect">
+                                  <p:stCondLst>
+                                    <p:cond delay="3000"/>
+                                  </p:stCondLst>
+                                  <p:endCondLst>
+                                    <p:cond evt="onNext" delay="0">
+                                      <p:tgtEl>
+                                        <p:sldTgt/>
+                                      </p:tgtEl>
+                                    </p:cond>
+                                  </p:endCondLst>
+                                  <p:childTnLst>
+                                    <p:animEffect transition="out" filter="wheel(1)">
+                                      <p:cBhvr>
+                                        <p:cTn id="6" dur="15000"/>
+                                        <p:tgtEl>
+                                          <p:spTgt spid="10"/>
+                                        </p:tgtEl>
+                                      </p:cBhvr>
+                                    </p:animEffect>
+                                    <p:set>
+                                      <p:cBhvr>
+                                        <p:cTn id="7" dur="1" fill="hold">
+                                          <p:stCondLst>
+                                            <p:cond delay="14999"/>
+                                          </p:stCondLst>
+                                        </p:cTn>
+                                        <p:tgtEl>
+                                          <p:spTgt spid="10"/>
+                                        </p:tgtEl>
+                                        <p:attrNameLst>
+                                          <p:attrName>style.visibility</p:attrName>
+                                        </p:attrNameLst>
+                                      </p:cBhvr>
+                                      <p:to>
+                                        <p:strVal val="hidden"/>
+                                      </p:to>
+                                    </p:set>
+                                  </p:childTnLst>
+                                </p:cTn>
+                              </p:par>
+                            </p:childTnLst>
+                          </p:cTn>
+                        </p:par>
+                      </p:childTnLst>
+                    </p:cTn>
+                  </p:par>
+                </p:childTnLst>
+              </p:cTn>
+              <p:prevCondLst>
+                <p:cond evt="onPrev" delay="0">
+                  <p:tgtEl>
+                    <p:sldTgt/>
+                  </p:tgtEl>
+                </p:cond>
+              </p:prevCondLst>
+              <p:nextCondLst>
+                <p:cond evt="onNext" delay="0">
+                  <p:tgtEl>
+                    <p:sldTgt/>
+                  </p:tgtEl>
+                </p:cond>
+              </p:nextCondLst>
+            </p:seq>
+          </p:childTnLst>
+        </p:cTn>
+      </p:par>
+    </p:tnLst>
+    <p:bldLst>
+      <p:bldP spid="10" grpId="0" animBg="1"/>
+    </p:bldLst>
+  </p:timing>
 </p:sld>
 </file>
 
@@ -16136,6 +18575,160 @@
           </a:p>
         </p:txBody>
       </p:sp>
+      <p:sp>
+        <p:nvSpPr>
+          <p:cNvPr id="7" name="楕円 6">
+            <a:extLst>
+              <a:ext uri="{FF2B5EF4-FFF2-40B4-BE49-F238E27FC236}">
+                <a16:creationId xmlns:a16="http://schemas.microsoft.com/office/drawing/2014/main" id="{C4116250-813C-4D93-A625-EE8FEC199749}"/>
+              </a:ext>
+            </a:extLst>
+          </p:cNvPr>
+          <p:cNvSpPr/>
+          <p:nvPr/>
+        </p:nvSpPr>
+        <p:spPr>
+          <a:xfrm>
+            <a:off x="1185445" y="486278"/>
+            <a:ext cx="876300" cy="876300"/>
+          </a:xfrm>
+          <a:prstGeom prst="ellipse">
+            <a:avLst/>
+          </a:prstGeom>
+          <a:solidFill>
+            <a:srgbClr val="FF0000"/>
+          </a:solidFill>
+          <a:ln>
+            <a:solidFill>
+              <a:schemeClr val="bg1"/>
+            </a:solidFill>
+          </a:ln>
+        </p:spPr>
+        <p:style>
+          <a:lnRef idx="2">
+            <a:schemeClr val="dk1"/>
+          </a:lnRef>
+          <a:fillRef idx="1">
+            <a:schemeClr val="lt1"/>
+          </a:fillRef>
+          <a:effectRef idx="0">
+            <a:schemeClr val="dk1"/>
+          </a:effectRef>
+          <a:fontRef idx="minor">
+            <a:schemeClr val="dk1"/>
+          </a:fontRef>
+        </p:style>
+        <p:txBody>
+          <a:bodyPr rtlCol="0" anchor="ctr"/>
+          <a:lstStyle/>
+          <a:p>
+            <a:pPr algn="ctr"/>
+            <a:endParaRPr kumimoji="1" lang="ja-JP" altLang="en-US"/>
+          </a:p>
+        </p:txBody>
+      </p:sp>
+      <p:sp>
+        <p:nvSpPr>
+          <p:cNvPr id="8" name="楕円 7">
+            <a:extLst>
+              <a:ext uri="{FF2B5EF4-FFF2-40B4-BE49-F238E27FC236}">
+                <a16:creationId xmlns:a16="http://schemas.microsoft.com/office/drawing/2014/main" id="{C4886380-88F6-4B91-AF5E-72B139B2A5EF}"/>
+              </a:ext>
+            </a:extLst>
+          </p:cNvPr>
+          <p:cNvSpPr/>
+          <p:nvPr/>
+        </p:nvSpPr>
+        <p:spPr>
+          <a:xfrm>
+            <a:off x="1185445" y="486278"/>
+            <a:ext cx="876300" cy="876300"/>
+          </a:xfrm>
+          <a:prstGeom prst="ellipse">
+            <a:avLst/>
+          </a:prstGeom>
+          <a:solidFill>
+            <a:srgbClr val="00B050"/>
+          </a:solidFill>
+          <a:ln>
+            <a:solidFill>
+              <a:schemeClr val="bg1"/>
+            </a:solidFill>
+          </a:ln>
+        </p:spPr>
+        <p:style>
+          <a:lnRef idx="2">
+            <a:schemeClr val="dk1"/>
+          </a:lnRef>
+          <a:fillRef idx="1">
+            <a:schemeClr val="lt1"/>
+          </a:fillRef>
+          <a:effectRef idx="0">
+            <a:schemeClr val="dk1"/>
+          </a:effectRef>
+          <a:fontRef idx="minor">
+            <a:schemeClr val="dk1"/>
+          </a:fontRef>
+        </p:style>
+        <p:txBody>
+          <a:bodyPr rtlCol="0" anchor="ctr"/>
+          <a:lstStyle/>
+          <a:p>
+            <a:pPr algn="ctr"/>
+            <a:endParaRPr kumimoji="1" lang="en-US" altLang="ja-JP" dirty="0"/>
+          </a:p>
+        </p:txBody>
+      </p:sp>
+      <p:sp>
+        <p:nvSpPr>
+          <p:cNvPr id="9" name="楕円 8">
+            <a:extLst>
+              <a:ext uri="{FF2B5EF4-FFF2-40B4-BE49-F238E27FC236}">
+                <a16:creationId xmlns:a16="http://schemas.microsoft.com/office/drawing/2014/main" id="{D1D365E2-1AA0-4E16-A76F-C8F0D374662D}"/>
+              </a:ext>
+            </a:extLst>
+          </p:cNvPr>
+          <p:cNvSpPr/>
+          <p:nvPr/>
+        </p:nvSpPr>
+        <p:spPr>
+          <a:xfrm>
+            <a:off x="1185445" y="486278"/>
+            <a:ext cx="876300" cy="876300"/>
+          </a:xfrm>
+          <a:prstGeom prst="ellipse">
+            <a:avLst/>
+          </a:prstGeom>
+          <a:noFill/>
+          <a:ln>
+            <a:solidFill>
+              <a:schemeClr val="bg1"/>
+            </a:solidFill>
+          </a:ln>
+        </p:spPr>
+        <p:style>
+          <a:lnRef idx="2">
+            <a:schemeClr val="dk1"/>
+          </a:lnRef>
+          <a:fillRef idx="1">
+            <a:schemeClr val="lt1"/>
+          </a:fillRef>
+          <a:effectRef idx="0">
+            <a:schemeClr val="dk1"/>
+          </a:effectRef>
+          <a:fontRef idx="minor">
+            <a:schemeClr val="dk1"/>
+          </a:fontRef>
+        </p:style>
+        <p:txBody>
+          <a:bodyPr rtlCol="0" anchor="ctr"/>
+          <a:lstStyle/>
+          <a:p>
+            <a:pPr algn="ctr"/>
+            <a:endParaRPr kumimoji="1" lang="ja-JP" altLang="en-US"/>
+          </a:p>
+        </p:txBody>
+      </p:sp>
     </p:spTree>
     <p:extLst>
       <p:ext uri="{BB962C8B-B14F-4D97-AF65-F5344CB8AC3E}">
@@ -16146,6 +18739,102 @@
   <p:clrMapOvr>
     <a:masterClrMapping/>
   </p:clrMapOvr>
+  <p:timing>
+    <p:tnLst>
+      <p:par>
+        <p:cTn id="1" dur="indefinite" restart="never" nodeType="tmRoot">
+          <p:childTnLst>
+            <p:seq concurrent="1" nextAc="seek">
+              <p:cTn id="2" dur="indefinite" nodeType="mainSeq">
+                <p:childTnLst>
+                  <p:par>
+                    <p:cTn id="3" fill="hold">
+                      <p:stCondLst>
+                        <p:cond delay="indefinite"/>
+                        <p:cond evt="onBegin" delay="0">
+                          <p:tn val="2"/>
+                        </p:cond>
+                      </p:stCondLst>
+                      <p:childTnLst>
+                        <p:par>
+                          <p:cTn id="4" fill="hold">
+                            <p:stCondLst>
+                              <p:cond delay="0"/>
+                            </p:stCondLst>
+                            <p:childTnLst>
+                              <p:par>
+                                <p:cTn id="5" presetID="21" presetClass="exit" presetSubtype="1" repeatCount="indefinite" fill="hold" grpId="0" nodeType="afterEffect">
+                                  <p:stCondLst>
+                                    <p:cond delay="3000"/>
+                                  </p:stCondLst>
+                                  <p:endCondLst>
+                                    <p:cond evt="onNext" delay="0">
+                                      <p:tgtEl>
+                                        <p:sldTgt/>
+                                      </p:tgtEl>
+                                    </p:cond>
+                                  </p:endCondLst>
+                                  <p:childTnLst>
+                                    <p:animEffect transition="out" filter="wheel(1)">
+                                      <p:cBhvr>
+                                        <p:cTn id="6" dur="15000"/>
+                                        <p:tgtEl>
+                                          <p:spTgt spid="8"/>
+                                        </p:tgtEl>
+                                      </p:cBhvr>
+                                    </p:animEffect>
+                                    <p:set>
+                                      <p:cBhvr>
+                                        <p:cTn id="7" dur="1" fill="hold">
+                                          <p:stCondLst>
+                                            <p:cond delay="14999"/>
+                                          </p:stCondLst>
+                                        </p:cTn>
+                                        <p:tgtEl>
+                                          <p:spTgt spid="8"/>
+                                        </p:tgtEl>
+                                        <p:attrNameLst>
+                                          <p:attrName>style.visibility</p:attrName>
+                                        </p:attrNameLst>
+                                      </p:cBhvr>
+                                      <p:to>
+                                        <p:strVal val="hidden"/>
+                                      </p:to>
+                                    </p:set>
+                                  </p:childTnLst>
+                                </p:cTn>
+                              </p:par>
+                            </p:childTnLst>
+                          </p:cTn>
+                        </p:par>
+                      </p:childTnLst>
+                    </p:cTn>
+                  </p:par>
+                </p:childTnLst>
+              </p:cTn>
+              <p:prevCondLst>
+                <p:cond evt="onPrev" delay="0">
+                  <p:tgtEl>
+                    <p:sldTgt/>
+                  </p:tgtEl>
+                </p:cond>
+              </p:prevCondLst>
+              <p:nextCondLst>
+                <p:cond evt="onNext" delay="0">
+                  <p:tgtEl>
+                    <p:sldTgt/>
+                  </p:tgtEl>
+                </p:cond>
+              </p:nextCondLst>
+            </p:seq>
+          </p:childTnLst>
+        </p:cTn>
+      </p:par>
+    </p:tnLst>
+    <p:bldLst>
+      <p:bldP spid="8" grpId="0" animBg="1"/>
+    </p:bldLst>
+  </p:timing>
 </p:sld>
 </file>
 
@@ -16327,7 +19016,7 @@
               <a:rPr kumimoji="1" lang="en-US" altLang="ja-JP" sz="9600" dirty="0">
                 <a:latin typeface="Impact" panose="020B0806030902050204" pitchFamily="34" charset="0"/>
               </a:rPr>
-              <a:t>Soda Pop</a:t>
+              <a:t>Lemonade</a:t>
             </a:r>
           </a:p>
         </p:txBody>
@@ -16589,12 +19278,166 @@
           </a:p>
         </p:txBody>
       </p:sp>
+      <p:sp>
+        <p:nvSpPr>
+          <p:cNvPr id="8" name="楕円 7">
+            <a:extLst>
+              <a:ext uri="{FF2B5EF4-FFF2-40B4-BE49-F238E27FC236}">
+                <a16:creationId xmlns:a16="http://schemas.microsoft.com/office/drawing/2014/main" id="{1EAB955D-C8D2-4324-88BC-644294FB7D84}"/>
+              </a:ext>
+            </a:extLst>
+          </p:cNvPr>
+          <p:cNvSpPr/>
+          <p:nvPr/>
+        </p:nvSpPr>
+        <p:spPr>
+          <a:xfrm>
+            <a:off x="1185445" y="486278"/>
+            <a:ext cx="876300" cy="876300"/>
+          </a:xfrm>
+          <a:prstGeom prst="ellipse">
+            <a:avLst/>
+          </a:prstGeom>
+          <a:solidFill>
+            <a:srgbClr val="FF0000"/>
+          </a:solidFill>
+          <a:ln>
+            <a:solidFill>
+              <a:schemeClr val="bg1"/>
+            </a:solidFill>
+          </a:ln>
+        </p:spPr>
+        <p:style>
+          <a:lnRef idx="2">
+            <a:schemeClr val="dk1"/>
+          </a:lnRef>
+          <a:fillRef idx="1">
+            <a:schemeClr val="lt1"/>
+          </a:fillRef>
+          <a:effectRef idx="0">
+            <a:schemeClr val="dk1"/>
+          </a:effectRef>
+          <a:fontRef idx="minor">
+            <a:schemeClr val="dk1"/>
+          </a:fontRef>
+        </p:style>
+        <p:txBody>
+          <a:bodyPr rtlCol="0" anchor="ctr"/>
+          <a:lstStyle/>
+          <a:p>
+            <a:pPr algn="ctr"/>
+            <a:endParaRPr kumimoji="1" lang="ja-JP" altLang="en-US"/>
+          </a:p>
+        </p:txBody>
+      </p:sp>
+      <p:sp>
+        <p:nvSpPr>
+          <p:cNvPr id="10" name="楕円 9">
+            <a:extLst>
+              <a:ext uri="{FF2B5EF4-FFF2-40B4-BE49-F238E27FC236}">
+                <a16:creationId xmlns:a16="http://schemas.microsoft.com/office/drawing/2014/main" id="{35B4412B-D442-4DE9-92BF-0BB54E6CD4C8}"/>
+              </a:ext>
+            </a:extLst>
+          </p:cNvPr>
+          <p:cNvSpPr/>
+          <p:nvPr/>
+        </p:nvSpPr>
+        <p:spPr>
+          <a:xfrm>
+            <a:off x="1185445" y="486278"/>
+            <a:ext cx="876300" cy="876300"/>
+          </a:xfrm>
+          <a:prstGeom prst="ellipse">
+            <a:avLst/>
+          </a:prstGeom>
+          <a:solidFill>
+            <a:srgbClr val="00B050"/>
+          </a:solidFill>
+          <a:ln>
+            <a:solidFill>
+              <a:schemeClr val="bg1"/>
+            </a:solidFill>
+          </a:ln>
+        </p:spPr>
+        <p:style>
+          <a:lnRef idx="2">
+            <a:schemeClr val="dk1"/>
+          </a:lnRef>
+          <a:fillRef idx="1">
+            <a:schemeClr val="lt1"/>
+          </a:fillRef>
+          <a:effectRef idx="0">
+            <a:schemeClr val="dk1"/>
+          </a:effectRef>
+          <a:fontRef idx="minor">
+            <a:schemeClr val="dk1"/>
+          </a:fontRef>
+        </p:style>
+        <p:txBody>
+          <a:bodyPr rtlCol="0" anchor="ctr"/>
+          <a:lstStyle/>
+          <a:p>
+            <a:pPr algn="ctr"/>
+            <a:endParaRPr kumimoji="1" lang="en-US" altLang="ja-JP" dirty="0"/>
+          </a:p>
+        </p:txBody>
+      </p:sp>
+      <p:sp>
+        <p:nvSpPr>
+          <p:cNvPr id="11" name="楕円 10">
+            <a:extLst>
+              <a:ext uri="{FF2B5EF4-FFF2-40B4-BE49-F238E27FC236}">
+                <a16:creationId xmlns:a16="http://schemas.microsoft.com/office/drawing/2014/main" id="{67A12A02-84C2-4D4A-BFEF-77DA3BBC7C8E}"/>
+              </a:ext>
+            </a:extLst>
+          </p:cNvPr>
+          <p:cNvSpPr/>
+          <p:nvPr/>
+        </p:nvSpPr>
+        <p:spPr>
+          <a:xfrm>
+            <a:off x="1185445" y="486278"/>
+            <a:ext cx="876300" cy="876300"/>
+          </a:xfrm>
+          <a:prstGeom prst="ellipse">
+            <a:avLst/>
+          </a:prstGeom>
+          <a:noFill/>
+          <a:ln>
+            <a:solidFill>
+              <a:schemeClr val="bg1"/>
+            </a:solidFill>
+          </a:ln>
+        </p:spPr>
+        <p:style>
+          <a:lnRef idx="2">
+            <a:schemeClr val="dk1"/>
+          </a:lnRef>
+          <a:fillRef idx="1">
+            <a:schemeClr val="lt1"/>
+          </a:fillRef>
+          <a:effectRef idx="0">
+            <a:schemeClr val="dk1"/>
+          </a:effectRef>
+          <a:fontRef idx="minor">
+            <a:schemeClr val="dk1"/>
+          </a:fontRef>
+        </p:style>
+        <p:txBody>
+          <a:bodyPr rtlCol="0" anchor="ctr"/>
+          <a:lstStyle/>
+          <a:p>
+            <a:pPr algn="ctr"/>
+            <a:endParaRPr kumimoji="1" lang="ja-JP" altLang="en-US"/>
+          </a:p>
+        </p:txBody>
+      </p:sp>
       <p:pic>
         <p:nvPicPr>
-          <p:cNvPr id="23554" name="Picture 2" descr="drink mineral water bottle cartoon vector illustration 17416366 Vector ...">
-            <a:extLst>
-              <a:ext uri="{FF2B5EF4-FFF2-40B4-BE49-F238E27FC236}">
-                <a16:creationId xmlns:a16="http://schemas.microsoft.com/office/drawing/2014/main" id="{9E628E44-B913-48AC-A218-BA3195DB6868}"/>
+          <p:cNvPr id="23558" name="Picture 6" descr="Page 2 | Hot Chocolate Drawing Images - Free Download on Freepik">
+            <a:extLst>
+              <a:ext uri="{FF2B5EF4-FFF2-40B4-BE49-F238E27FC236}">
+                <a16:creationId xmlns:a16="http://schemas.microsoft.com/office/drawing/2014/main" id="{DD3D509C-9A79-4BAA-98BD-B93F7FBFCB70}"/>
               </a:ext>
             </a:extLst>
           </p:cNvPr>
@@ -16618,8 +19461,8 @@
         </p:blipFill>
         <p:spPr bwMode="auto">
           <a:xfrm>
-            <a:off x="4675045" y="2056171"/>
-            <a:ext cx="2841910" cy="2841910"/>
+            <a:off x="4552335" y="1973826"/>
+            <a:ext cx="3087330" cy="3087330"/>
           </a:xfrm>
           <a:prstGeom prst="rect">
             <a:avLst/>
@@ -16646,6 +19489,102 @@
   <p:clrMapOvr>
     <a:masterClrMapping/>
   </p:clrMapOvr>
+  <p:timing>
+    <p:tnLst>
+      <p:par>
+        <p:cTn id="1" dur="indefinite" restart="never" nodeType="tmRoot">
+          <p:childTnLst>
+            <p:seq concurrent="1" nextAc="seek">
+              <p:cTn id="2" dur="indefinite" nodeType="mainSeq">
+                <p:childTnLst>
+                  <p:par>
+                    <p:cTn id="3" fill="hold">
+                      <p:stCondLst>
+                        <p:cond delay="indefinite"/>
+                        <p:cond evt="onBegin" delay="0">
+                          <p:tn val="2"/>
+                        </p:cond>
+                      </p:stCondLst>
+                      <p:childTnLst>
+                        <p:par>
+                          <p:cTn id="4" fill="hold">
+                            <p:stCondLst>
+                              <p:cond delay="0"/>
+                            </p:stCondLst>
+                            <p:childTnLst>
+                              <p:par>
+                                <p:cTn id="5" presetID="21" presetClass="exit" presetSubtype="1" repeatCount="indefinite" fill="hold" grpId="0" nodeType="afterEffect">
+                                  <p:stCondLst>
+                                    <p:cond delay="3000"/>
+                                  </p:stCondLst>
+                                  <p:endCondLst>
+                                    <p:cond evt="onNext" delay="0">
+                                      <p:tgtEl>
+                                        <p:sldTgt/>
+                                      </p:tgtEl>
+                                    </p:cond>
+                                  </p:endCondLst>
+                                  <p:childTnLst>
+                                    <p:animEffect transition="out" filter="wheel(1)">
+                                      <p:cBhvr>
+                                        <p:cTn id="6" dur="15000"/>
+                                        <p:tgtEl>
+                                          <p:spTgt spid="10"/>
+                                        </p:tgtEl>
+                                      </p:cBhvr>
+                                    </p:animEffect>
+                                    <p:set>
+                                      <p:cBhvr>
+                                        <p:cTn id="7" dur="1" fill="hold">
+                                          <p:stCondLst>
+                                            <p:cond delay="14999"/>
+                                          </p:stCondLst>
+                                        </p:cTn>
+                                        <p:tgtEl>
+                                          <p:spTgt spid="10"/>
+                                        </p:tgtEl>
+                                        <p:attrNameLst>
+                                          <p:attrName>style.visibility</p:attrName>
+                                        </p:attrNameLst>
+                                      </p:cBhvr>
+                                      <p:to>
+                                        <p:strVal val="hidden"/>
+                                      </p:to>
+                                    </p:set>
+                                  </p:childTnLst>
+                                </p:cTn>
+                              </p:par>
+                            </p:childTnLst>
+                          </p:cTn>
+                        </p:par>
+                      </p:childTnLst>
+                    </p:cTn>
+                  </p:par>
+                </p:childTnLst>
+              </p:cTn>
+              <p:prevCondLst>
+                <p:cond evt="onPrev" delay="0">
+                  <p:tgtEl>
+                    <p:sldTgt/>
+                  </p:tgtEl>
+                </p:cond>
+              </p:prevCondLst>
+              <p:nextCondLst>
+                <p:cond evt="onNext" delay="0">
+                  <p:tgtEl>
+                    <p:sldTgt/>
+                  </p:tgtEl>
+                </p:cond>
+              </p:nextCondLst>
+            </p:seq>
+          </p:childTnLst>
+        </p:cTn>
+      </p:par>
+    </p:tnLst>
+    <p:bldLst>
+      <p:bldP spid="10" grpId="0" animBg="1"/>
+    </p:bldLst>
+  </p:timing>
 </p:sld>
 </file>
 
@@ -16827,7 +19766,7 @@
               <a:rPr kumimoji="1" lang="en-US" altLang="ja-JP" sz="9600" dirty="0">
                 <a:latin typeface="Impact" panose="020B0806030902050204" pitchFamily="34" charset="0"/>
               </a:rPr>
-              <a:t>Mineral Water</a:t>
+              <a:t>Hot Chocolate</a:t>
             </a:r>
           </a:p>
         </p:txBody>
@@ -17089,12 +20028,166 @@
           </a:p>
         </p:txBody>
       </p:sp>
+      <p:sp>
+        <p:nvSpPr>
+          <p:cNvPr id="8" name="楕円 7">
+            <a:extLst>
+              <a:ext uri="{FF2B5EF4-FFF2-40B4-BE49-F238E27FC236}">
+                <a16:creationId xmlns:a16="http://schemas.microsoft.com/office/drawing/2014/main" id="{BC396644-66AA-4A39-9D5F-0FF58BCF1B74}"/>
+              </a:ext>
+            </a:extLst>
+          </p:cNvPr>
+          <p:cNvSpPr/>
+          <p:nvPr/>
+        </p:nvSpPr>
+        <p:spPr>
+          <a:xfrm>
+            <a:off x="1185445" y="486278"/>
+            <a:ext cx="876300" cy="876300"/>
+          </a:xfrm>
+          <a:prstGeom prst="ellipse">
+            <a:avLst/>
+          </a:prstGeom>
+          <a:solidFill>
+            <a:srgbClr val="FF0000"/>
+          </a:solidFill>
+          <a:ln>
+            <a:solidFill>
+              <a:schemeClr val="bg1"/>
+            </a:solidFill>
+          </a:ln>
+        </p:spPr>
+        <p:style>
+          <a:lnRef idx="2">
+            <a:schemeClr val="dk1"/>
+          </a:lnRef>
+          <a:fillRef idx="1">
+            <a:schemeClr val="lt1"/>
+          </a:fillRef>
+          <a:effectRef idx="0">
+            <a:schemeClr val="dk1"/>
+          </a:effectRef>
+          <a:fontRef idx="minor">
+            <a:schemeClr val="dk1"/>
+          </a:fontRef>
+        </p:style>
+        <p:txBody>
+          <a:bodyPr rtlCol="0" anchor="ctr"/>
+          <a:lstStyle/>
+          <a:p>
+            <a:pPr algn="ctr"/>
+            <a:endParaRPr kumimoji="1" lang="ja-JP" altLang="en-US"/>
+          </a:p>
+        </p:txBody>
+      </p:sp>
+      <p:sp>
+        <p:nvSpPr>
+          <p:cNvPr id="9" name="楕円 8">
+            <a:extLst>
+              <a:ext uri="{FF2B5EF4-FFF2-40B4-BE49-F238E27FC236}">
+                <a16:creationId xmlns:a16="http://schemas.microsoft.com/office/drawing/2014/main" id="{82B2AC70-D093-44D4-BC4E-8BE548761B09}"/>
+              </a:ext>
+            </a:extLst>
+          </p:cNvPr>
+          <p:cNvSpPr/>
+          <p:nvPr/>
+        </p:nvSpPr>
+        <p:spPr>
+          <a:xfrm>
+            <a:off x="1185445" y="486278"/>
+            <a:ext cx="876300" cy="876300"/>
+          </a:xfrm>
+          <a:prstGeom prst="ellipse">
+            <a:avLst/>
+          </a:prstGeom>
+          <a:solidFill>
+            <a:srgbClr val="00B050"/>
+          </a:solidFill>
+          <a:ln>
+            <a:solidFill>
+              <a:schemeClr val="bg1"/>
+            </a:solidFill>
+          </a:ln>
+        </p:spPr>
+        <p:style>
+          <a:lnRef idx="2">
+            <a:schemeClr val="dk1"/>
+          </a:lnRef>
+          <a:fillRef idx="1">
+            <a:schemeClr val="lt1"/>
+          </a:fillRef>
+          <a:effectRef idx="0">
+            <a:schemeClr val="dk1"/>
+          </a:effectRef>
+          <a:fontRef idx="minor">
+            <a:schemeClr val="dk1"/>
+          </a:fontRef>
+        </p:style>
+        <p:txBody>
+          <a:bodyPr rtlCol="0" anchor="ctr"/>
+          <a:lstStyle/>
+          <a:p>
+            <a:pPr algn="ctr"/>
+            <a:endParaRPr kumimoji="1" lang="en-US" altLang="ja-JP" dirty="0"/>
+          </a:p>
+        </p:txBody>
+      </p:sp>
+      <p:sp>
+        <p:nvSpPr>
+          <p:cNvPr id="10" name="楕円 9">
+            <a:extLst>
+              <a:ext uri="{FF2B5EF4-FFF2-40B4-BE49-F238E27FC236}">
+                <a16:creationId xmlns:a16="http://schemas.microsoft.com/office/drawing/2014/main" id="{AB2578C9-71FC-4A55-95A4-A12CB85FED27}"/>
+              </a:ext>
+            </a:extLst>
+          </p:cNvPr>
+          <p:cNvSpPr/>
+          <p:nvPr/>
+        </p:nvSpPr>
+        <p:spPr>
+          <a:xfrm>
+            <a:off x="1185445" y="486278"/>
+            <a:ext cx="876300" cy="876300"/>
+          </a:xfrm>
+          <a:prstGeom prst="ellipse">
+            <a:avLst/>
+          </a:prstGeom>
+          <a:noFill/>
+          <a:ln>
+            <a:solidFill>
+              <a:schemeClr val="bg1"/>
+            </a:solidFill>
+          </a:ln>
+        </p:spPr>
+        <p:style>
+          <a:lnRef idx="2">
+            <a:schemeClr val="dk1"/>
+          </a:lnRef>
+          <a:fillRef idx="1">
+            <a:schemeClr val="lt1"/>
+          </a:fillRef>
+          <a:effectRef idx="0">
+            <a:schemeClr val="dk1"/>
+          </a:effectRef>
+          <a:fontRef idx="minor">
+            <a:schemeClr val="dk1"/>
+          </a:fontRef>
+        </p:style>
+        <p:txBody>
+          <a:bodyPr rtlCol="0" anchor="ctr"/>
+          <a:lstStyle/>
+          <a:p>
+            <a:pPr algn="ctr"/>
+            <a:endParaRPr kumimoji="1" lang="ja-JP" altLang="en-US"/>
+          </a:p>
+        </p:txBody>
+      </p:sp>
       <p:pic>
         <p:nvPicPr>
-          <p:cNvPr id="41986" name="Picture 2" descr="How to Draw a Soccer Player - Really Easy Drawing Tutorial">
-            <a:extLst>
-              <a:ext uri="{FF2B5EF4-FFF2-40B4-BE49-F238E27FC236}">
-                <a16:creationId xmlns:a16="http://schemas.microsoft.com/office/drawing/2014/main" id="{17D9466A-2F49-4807-847E-5751112317EE}"/>
+          <p:cNvPr id="41988" name="Picture 4" descr="Premium Vector | Hand drawn sketch set of badminton isolated on white ...">
+            <a:extLst>
+              <a:ext uri="{FF2B5EF4-FFF2-40B4-BE49-F238E27FC236}">
+                <a16:creationId xmlns:a16="http://schemas.microsoft.com/office/drawing/2014/main" id="{8E0C69E1-D700-41CB-80F4-EB2F622AD0E4}"/>
               </a:ext>
             </a:extLst>
           </p:cNvPr>
@@ -17103,7 +20196,7 @@
           </p:cNvPicPr>
           <p:nvPr/>
         </p:nvPicPr>
-        <p:blipFill rotWithShape="1">
+        <p:blipFill>
           <a:blip r:embed="rId3">
             <a:extLst>
               <a:ext uri="{28A0092B-C50C-407E-A947-70E740481C1C}">
@@ -17111,13 +20204,15 @@
               </a:ext>
             </a:extLst>
           </a:blip>
-          <a:srcRect b="5975"/>
-          <a:stretch/>
+          <a:srcRect/>
+          <a:stretch>
+            <a:fillRect/>
+          </a:stretch>
         </p:blipFill>
         <p:spPr bwMode="auto">
           <a:xfrm>
-            <a:off x="4612103" y="2183552"/>
-            <a:ext cx="2967792" cy="2790458"/>
+            <a:off x="4336026" y="2132965"/>
+            <a:ext cx="3518362" cy="2769052"/>
           </a:xfrm>
           <a:prstGeom prst="rect">
             <a:avLst/>
@@ -17144,6 +20239,102 @@
   <p:clrMapOvr>
     <a:masterClrMapping/>
   </p:clrMapOvr>
+  <p:timing>
+    <p:tnLst>
+      <p:par>
+        <p:cTn id="1" dur="indefinite" restart="never" nodeType="tmRoot">
+          <p:childTnLst>
+            <p:seq concurrent="1" nextAc="seek">
+              <p:cTn id="2" dur="indefinite" nodeType="mainSeq">
+                <p:childTnLst>
+                  <p:par>
+                    <p:cTn id="3" fill="hold">
+                      <p:stCondLst>
+                        <p:cond delay="indefinite"/>
+                        <p:cond evt="onBegin" delay="0">
+                          <p:tn val="2"/>
+                        </p:cond>
+                      </p:stCondLst>
+                      <p:childTnLst>
+                        <p:par>
+                          <p:cTn id="4" fill="hold">
+                            <p:stCondLst>
+                              <p:cond delay="0"/>
+                            </p:stCondLst>
+                            <p:childTnLst>
+                              <p:par>
+                                <p:cTn id="5" presetID="21" presetClass="exit" presetSubtype="1" repeatCount="indefinite" fill="hold" grpId="0" nodeType="afterEffect">
+                                  <p:stCondLst>
+                                    <p:cond delay="3000"/>
+                                  </p:stCondLst>
+                                  <p:endCondLst>
+                                    <p:cond evt="onNext" delay="0">
+                                      <p:tgtEl>
+                                        <p:sldTgt/>
+                                      </p:tgtEl>
+                                    </p:cond>
+                                  </p:endCondLst>
+                                  <p:childTnLst>
+                                    <p:animEffect transition="out" filter="wheel(1)">
+                                      <p:cBhvr>
+                                        <p:cTn id="6" dur="15000"/>
+                                        <p:tgtEl>
+                                          <p:spTgt spid="9"/>
+                                        </p:tgtEl>
+                                      </p:cBhvr>
+                                    </p:animEffect>
+                                    <p:set>
+                                      <p:cBhvr>
+                                        <p:cTn id="7" dur="1" fill="hold">
+                                          <p:stCondLst>
+                                            <p:cond delay="14999"/>
+                                          </p:stCondLst>
+                                        </p:cTn>
+                                        <p:tgtEl>
+                                          <p:spTgt spid="9"/>
+                                        </p:tgtEl>
+                                        <p:attrNameLst>
+                                          <p:attrName>style.visibility</p:attrName>
+                                        </p:attrNameLst>
+                                      </p:cBhvr>
+                                      <p:to>
+                                        <p:strVal val="hidden"/>
+                                      </p:to>
+                                    </p:set>
+                                  </p:childTnLst>
+                                </p:cTn>
+                              </p:par>
+                            </p:childTnLst>
+                          </p:cTn>
+                        </p:par>
+                      </p:childTnLst>
+                    </p:cTn>
+                  </p:par>
+                </p:childTnLst>
+              </p:cTn>
+              <p:prevCondLst>
+                <p:cond evt="onPrev" delay="0">
+                  <p:tgtEl>
+                    <p:sldTgt/>
+                  </p:tgtEl>
+                </p:cond>
+              </p:prevCondLst>
+              <p:nextCondLst>
+                <p:cond evt="onNext" delay="0">
+                  <p:tgtEl>
+                    <p:sldTgt/>
+                  </p:tgtEl>
+                </p:cond>
+              </p:nextCondLst>
+            </p:seq>
+          </p:childTnLst>
+        </p:cTn>
+      </p:par>
+    </p:tnLst>
+    <p:bldLst>
+      <p:bldP spid="9" grpId="0" animBg="1"/>
+    </p:bldLst>
+  </p:timing>
 </p:sld>
 </file>
 
@@ -17325,7 +20516,7 @@
               <a:rPr kumimoji="1" lang="en-US" altLang="ja-JP" sz="9600" dirty="0">
                 <a:latin typeface="Impact" panose="020B0806030902050204" pitchFamily="34" charset="0"/>
               </a:rPr>
-              <a:t>Soccer</a:t>
+              <a:t>Badminton</a:t>
             </a:r>
           </a:p>
         </p:txBody>
@@ -17631,12 +20822,166 @@
           </a:p>
         </p:txBody>
       </p:sp>
+      <p:sp>
+        <p:nvSpPr>
+          <p:cNvPr id="10" name="楕円 9">
+            <a:extLst>
+              <a:ext uri="{FF2B5EF4-FFF2-40B4-BE49-F238E27FC236}">
+                <a16:creationId xmlns:a16="http://schemas.microsoft.com/office/drawing/2014/main" id="{B39D0726-D5FE-47C0-A768-F619B8EACC87}"/>
+              </a:ext>
+            </a:extLst>
+          </p:cNvPr>
+          <p:cNvSpPr/>
+          <p:nvPr/>
+        </p:nvSpPr>
+        <p:spPr>
+          <a:xfrm>
+            <a:off x="1185445" y="486278"/>
+            <a:ext cx="876300" cy="876300"/>
+          </a:xfrm>
+          <a:prstGeom prst="ellipse">
+            <a:avLst/>
+          </a:prstGeom>
+          <a:solidFill>
+            <a:srgbClr val="FF0000"/>
+          </a:solidFill>
+          <a:ln>
+            <a:solidFill>
+              <a:schemeClr val="bg1"/>
+            </a:solidFill>
+          </a:ln>
+        </p:spPr>
+        <p:style>
+          <a:lnRef idx="2">
+            <a:schemeClr val="dk1"/>
+          </a:lnRef>
+          <a:fillRef idx="1">
+            <a:schemeClr val="lt1"/>
+          </a:fillRef>
+          <a:effectRef idx="0">
+            <a:schemeClr val="dk1"/>
+          </a:effectRef>
+          <a:fontRef idx="minor">
+            <a:schemeClr val="dk1"/>
+          </a:fontRef>
+        </p:style>
+        <p:txBody>
+          <a:bodyPr rtlCol="0" anchor="ctr"/>
+          <a:lstStyle/>
+          <a:p>
+            <a:pPr algn="ctr"/>
+            <a:endParaRPr kumimoji="1" lang="ja-JP" altLang="en-US"/>
+          </a:p>
+        </p:txBody>
+      </p:sp>
+      <p:sp>
+        <p:nvSpPr>
+          <p:cNvPr id="11" name="楕円 10">
+            <a:extLst>
+              <a:ext uri="{FF2B5EF4-FFF2-40B4-BE49-F238E27FC236}">
+                <a16:creationId xmlns:a16="http://schemas.microsoft.com/office/drawing/2014/main" id="{0615B0E4-0456-431A-824B-8A7C37395E27}"/>
+              </a:ext>
+            </a:extLst>
+          </p:cNvPr>
+          <p:cNvSpPr/>
+          <p:nvPr/>
+        </p:nvSpPr>
+        <p:spPr>
+          <a:xfrm>
+            <a:off x="1185445" y="486278"/>
+            <a:ext cx="876300" cy="876300"/>
+          </a:xfrm>
+          <a:prstGeom prst="ellipse">
+            <a:avLst/>
+          </a:prstGeom>
+          <a:solidFill>
+            <a:srgbClr val="00B050"/>
+          </a:solidFill>
+          <a:ln>
+            <a:solidFill>
+              <a:schemeClr val="bg1"/>
+            </a:solidFill>
+          </a:ln>
+        </p:spPr>
+        <p:style>
+          <a:lnRef idx="2">
+            <a:schemeClr val="dk1"/>
+          </a:lnRef>
+          <a:fillRef idx="1">
+            <a:schemeClr val="lt1"/>
+          </a:fillRef>
+          <a:effectRef idx="0">
+            <a:schemeClr val="dk1"/>
+          </a:effectRef>
+          <a:fontRef idx="minor">
+            <a:schemeClr val="dk1"/>
+          </a:fontRef>
+        </p:style>
+        <p:txBody>
+          <a:bodyPr rtlCol="0" anchor="ctr"/>
+          <a:lstStyle/>
+          <a:p>
+            <a:pPr algn="ctr"/>
+            <a:endParaRPr kumimoji="1" lang="en-US" altLang="ja-JP" dirty="0"/>
+          </a:p>
+        </p:txBody>
+      </p:sp>
+      <p:sp>
+        <p:nvSpPr>
+          <p:cNvPr id="12" name="楕円 11">
+            <a:extLst>
+              <a:ext uri="{FF2B5EF4-FFF2-40B4-BE49-F238E27FC236}">
+                <a16:creationId xmlns:a16="http://schemas.microsoft.com/office/drawing/2014/main" id="{BF852DD9-95BD-407F-A654-A1DB52ACCE09}"/>
+              </a:ext>
+            </a:extLst>
+          </p:cNvPr>
+          <p:cNvSpPr/>
+          <p:nvPr/>
+        </p:nvSpPr>
+        <p:spPr>
+          <a:xfrm>
+            <a:off x="1185445" y="486278"/>
+            <a:ext cx="876300" cy="876300"/>
+          </a:xfrm>
+          <a:prstGeom prst="ellipse">
+            <a:avLst/>
+          </a:prstGeom>
+          <a:noFill/>
+          <a:ln>
+            <a:solidFill>
+              <a:schemeClr val="bg1"/>
+            </a:solidFill>
+          </a:ln>
+        </p:spPr>
+        <p:style>
+          <a:lnRef idx="2">
+            <a:schemeClr val="dk1"/>
+          </a:lnRef>
+          <a:fillRef idx="1">
+            <a:schemeClr val="lt1"/>
+          </a:fillRef>
+          <a:effectRef idx="0">
+            <a:schemeClr val="dk1"/>
+          </a:effectRef>
+          <a:fontRef idx="minor">
+            <a:schemeClr val="dk1"/>
+          </a:fontRef>
+        </p:style>
+        <p:txBody>
+          <a:bodyPr rtlCol="0" anchor="ctr"/>
+          <a:lstStyle/>
+          <a:p>
+            <a:pPr algn="ctr"/>
+            <a:endParaRPr kumimoji="1" lang="ja-JP" altLang="en-US"/>
+          </a:p>
+        </p:txBody>
+      </p:sp>
       <p:pic>
         <p:nvPicPr>
-          <p:cNvPr id="39938" name="Picture 2" descr="Baseball Player Sketch">
-            <a:extLst>
-              <a:ext uri="{FF2B5EF4-FFF2-40B4-BE49-F238E27FC236}">
-                <a16:creationId xmlns:a16="http://schemas.microsoft.com/office/drawing/2014/main" id="{F8AB2980-3908-41A9-9779-6EEE8C12B888}"/>
+          <p:cNvPr id="39940" name="Picture 4" descr="Indoor Dodgeball Player Vector 141139 Vector Art at Vecteezy">
+            <a:extLst>
+              <a:ext uri="{FF2B5EF4-FFF2-40B4-BE49-F238E27FC236}">
+                <a16:creationId xmlns:a16="http://schemas.microsoft.com/office/drawing/2014/main" id="{7A980028-0BBF-439B-BD18-DB143FA7C38F}"/>
               </a:ext>
             </a:extLst>
           </p:cNvPr>
@@ -17660,8 +21005,8 @@
         </p:blipFill>
         <p:spPr bwMode="auto">
           <a:xfrm>
-            <a:off x="4999558" y="2080234"/>
-            <a:ext cx="2191298" cy="2841910"/>
+            <a:off x="4196788" y="2100015"/>
+            <a:ext cx="3796838" cy="2657970"/>
           </a:xfrm>
           <a:prstGeom prst="rect">
             <a:avLst/>
@@ -17688,6 +21033,102 @@
   <p:clrMapOvr>
     <a:masterClrMapping/>
   </p:clrMapOvr>
+  <p:timing>
+    <p:tnLst>
+      <p:par>
+        <p:cTn id="1" dur="indefinite" restart="never" nodeType="tmRoot">
+          <p:childTnLst>
+            <p:seq concurrent="1" nextAc="seek">
+              <p:cTn id="2" dur="indefinite" nodeType="mainSeq">
+                <p:childTnLst>
+                  <p:par>
+                    <p:cTn id="3" fill="hold">
+                      <p:stCondLst>
+                        <p:cond delay="indefinite"/>
+                        <p:cond evt="onBegin" delay="0">
+                          <p:tn val="2"/>
+                        </p:cond>
+                      </p:stCondLst>
+                      <p:childTnLst>
+                        <p:par>
+                          <p:cTn id="4" fill="hold">
+                            <p:stCondLst>
+                              <p:cond delay="0"/>
+                            </p:stCondLst>
+                            <p:childTnLst>
+                              <p:par>
+                                <p:cTn id="5" presetID="21" presetClass="exit" presetSubtype="1" repeatCount="indefinite" fill="hold" grpId="0" nodeType="afterEffect">
+                                  <p:stCondLst>
+                                    <p:cond delay="3000"/>
+                                  </p:stCondLst>
+                                  <p:endCondLst>
+                                    <p:cond evt="onNext" delay="0">
+                                      <p:tgtEl>
+                                        <p:sldTgt/>
+                                      </p:tgtEl>
+                                    </p:cond>
+                                  </p:endCondLst>
+                                  <p:childTnLst>
+                                    <p:animEffect transition="out" filter="wheel(1)">
+                                      <p:cBhvr>
+                                        <p:cTn id="6" dur="15000"/>
+                                        <p:tgtEl>
+                                          <p:spTgt spid="11"/>
+                                        </p:tgtEl>
+                                      </p:cBhvr>
+                                    </p:animEffect>
+                                    <p:set>
+                                      <p:cBhvr>
+                                        <p:cTn id="7" dur="1" fill="hold">
+                                          <p:stCondLst>
+                                            <p:cond delay="14999"/>
+                                          </p:stCondLst>
+                                        </p:cTn>
+                                        <p:tgtEl>
+                                          <p:spTgt spid="11"/>
+                                        </p:tgtEl>
+                                        <p:attrNameLst>
+                                          <p:attrName>style.visibility</p:attrName>
+                                        </p:attrNameLst>
+                                      </p:cBhvr>
+                                      <p:to>
+                                        <p:strVal val="hidden"/>
+                                      </p:to>
+                                    </p:set>
+                                  </p:childTnLst>
+                                </p:cTn>
+                              </p:par>
+                            </p:childTnLst>
+                          </p:cTn>
+                        </p:par>
+                      </p:childTnLst>
+                    </p:cTn>
+                  </p:par>
+                </p:childTnLst>
+              </p:cTn>
+              <p:prevCondLst>
+                <p:cond evt="onPrev" delay="0">
+                  <p:tgtEl>
+                    <p:sldTgt/>
+                  </p:tgtEl>
+                </p:cond>
+              </p:prevCondLst>
+              <p:nextCondLst>
+                <p:cond evt="onNext" delay="0">
+                  <p:tgtEl>
+                    <p:sldTgt/>
+                  </p:tgtEl>
+                </p:cond>
+              </p:nextCondLst>
+            </p:seq>
+          </p:childTnLst>
+        </p:cTn>
+      </p:par>
+    </p:tnLst>
+    <p:bldLst>
+      <p:bldP spid="11" grpId="0" animBg="1"/>
+    </p:bldLst>
+  </p:timing>
 </p:sld>
 </file>
 
@@ -17869,7 +21310,7 @@
               <a:rPr kumimoji="1" lang="en-US" altLang="ja-JP" sz="9600" dirty="0">
                 <a:latin typeface="Impact" panose="020B0806030902050204" pitchFamily="34" charset="0"/>
               </a:rPr>
-              <a:t>Baseball</a:t>
+              <a:t>Dodgeball</a:t>
             </a:r>
           </a:p>
         </p:txBody>
@@ -18131,12 +21572,166 @@
           </a:p>
         </p:txBody>
       </p:sp>
+      <p:sp>
+        <p:nvSpPr>
+          <p:cNvPr id="8" name="楕円 7">
+            <a:extLst>
+              <a:ext uri="{FF2B5EF4-FFF2-40B4-BE49-F238E27FC236}">
+                <a16:creationId xmlns:a16="http://schemas.microsoft.com/office/drawing/2014/main" id="{EE19AE55-52DE-4FC2-A124-5600AF89F570}"/>
+              </a:ext>
+            </a:extLst>
+          </p:cNvPr>
+          <p:cNvSpPr/>
+          <p:nvPr/>
+        </p:nvSpPr>
+        <p:spPr>
+          <a:xfrm>
+            <a:off x="1185445" y="486278"/>
+            <a:ext cx="876300" cy="876300"/>
+          </a:xfrm>
+          <a:prstGeom prst="ellipse">
+            <a:avLst/>
+          </a:prstGeom>
+          <a:solidFill>
+            <a:srgbClr val="FF0000"/>
+          </a:solidFill>
+          <a:ln>
+            <a:solidFill>
+              <a:schemeClr val="bg1"/>
+            </a:solidFill>
+          </a:ln>
+        </p:spPr>
+        <p:style>
+          <a:lnRef idx="2">
+            <a:schemeClr val="dk1"/>
+          </a:lnRef>
+          <a:fillRef idx="1">
+            <a:schemeClr val="lt1"/>
+          </a:fillRef>
+          <a:effectRef idx="0">
+            <a:schemeClr val="dk1"/>
+          </a:effectRef>
+          <a:fontRef idx="minor">
+            <a:schemeClr val="dk1"/>
+          </a:fontRef>
+        </p:style>
+        <p:txBody>
+          <a:bodyPr rtlCol="0" anchor="ctr"/>
+          <a:lstStyle/>
+          <a:p>
+            <a:pPr algn="ctr"/>
+            <a:endParaRPr kumimoji="1" lang="ja-JP" altLang="en-US"/>
+          </a:p>
+        </p:txBody>
+      </p:sp>
+      <p:sp>
+        <p:nvSpPr>
+          <p:cNvPr id="10" name="楕円 9">
+            <a:extLst>
+              <a:ext uri="{FF2B5EF4-FFF2-40B4-BE49-F238E27FC236}">
+                <a16:creationId xmlns:a16="http://schemas.microsoft.com/office/drawing/2014/main" id="{8F2A7546-85EF-4AB4-A2D4-D1A66BF4E1C3}"/>
+              </a:ext>
+            </a:extLst>
+          </p:cNvPr>
+          <p:cNvSpPr/>
+          <p:nvPr/>
+        </p:nvSpPr>
+        <p:spPr>
+          <a:xfrm>
+            <a:off x="1185445" y="486278"/>
+            <a:ext cx="876300" cy="876300"/>
+          </a:xfrm>
+          <a:prstGeom prst="ellipse">
+            <a:avLst/>
+          </a:prstGeom>
+          <a:solidFill>
+            <a:srgbClr val="00B050"/>
+          </a:solidFill>
+          <a:ln>
+            <a:solidFill>
+              <a:schemeClr val="bg1"/>
+            </a:solidFill>
+          </a:ln>
+        </p:spPr>
+        <p:style>
+          <a:lnRef idx="2">
+            <a:schemeClr val="dk1"/>
+          </a:lnRef>
+          <a:fillRef idx="1">
+            <a:schemeClr val="lt1"/>
+          </a:fillRef>
+          <a:effectRef idx="0">
+            <a:schemeClr val="dk1"/>
+          </a:effectRef>
+          <a:fontRef idx="minor">
+            <a:schemeClr val="dk1"/>
+          </a:fontRef>
+        </p:style>
+        <p:txBody>
+          <a:bodyPr rtlCol="0" anchor="ctr"/>
+          <a:lstStyle/>
+          <a:p>
+            <a:pPr algn="ctr"/>
+            <a:endParaRPr kumimoji="1" lang="en-US" altLang="ja-JP" dirty="0"/>
+          </a:p>
+        </p:txBody>
+      </p:sp>
+      <p:sp>
+        <p:nvSpPr>
+          <p:cNvPr id="11" name="楕円 10">
+            <a:extLst>
+              <a:ext uri="{FF2B5EF4-FFF2-40B4-BE49-F238E27FC236}">
+                <a16:creationId xmlns:a16="http://schemas.microsoft.com/office/drawing/2014/main" id="{5F2720A4-394A-4787-97BB-89846A722026}"/>
+              </a:ext>
+            </a:extLst>
+          </p:cNvPr>
+          <p:cNvSpPr/>
+          <p:nvPr/>
+        </p:nvSpPr>
+        <p:spPr>
+          <a:xfrm>
+            <a:off x="1185445" y="486278"/>
+            <a:ext cx="876300" cy="876300"/>
+          </a:xfrm>
+          <a:prstGeom prst="ellipse">
+            <a:avLst/>
+          </a:prstGeom>
+          <a:noFill/>
+          <a:ln>
+            <a:solidFill>
+              <a:schemeClr val="bg1"/>
+            </a:solidFill>
+          </a:ln>
+        </p:spPr>
+        <p:style>
+          <a:lnRef idx="2">
+            <a:schemeClr val="dk1"/>
+          </a:lnRef>
+          <a:fillRef idx="1">
+            <a:schemeClr val="lt1"/>
+          </a:fillRef>
+          <a:effectRef idx="0">
+            <a:schemeClr val="dk1"/>
+          </a:effectRef>
+          <a:fontRef idx="minor">
+            <a:schemeClr val="dk1"/>
+          </a:fontRef>
+        </p:style>
+        <p:txBody>
+          <a:bodyPr rtlCol="0" anchor="ctr"/>
+          <a:lstStyle/>
+          <a:p>
+            <a:pPr algn="ctr"/>
+            <a:endParaRPr kumimoji="1" lang="ja-JP" altLang="en-US"/>
+          </a:p>
+        </p:txBody>
+      </p:sp>
       <p:pic>
         <p:nvPicPr>
-          <p:cNvPr id="37890" name="Picture 2" descr="People Playing Table Tennis Sports with Racket and Ball of Ping Pong ...">
-            <a:extLst>
-              <a:ext uri="{FF2B5EF4-FFF2-40B4-BE49-F238E27FC236}">
-                <a16:creationId xmlns:a16="http://schemas.microsoft.com/office/drawing/2014/main" id="{7D495D14-2C50-4CF0-9E42-F4F7B995D9FD}"/>
+          <p:cNvPr id="37908" name="Picture 20" descr="Premium Vector | People swimming in pool">
+            <a:extLst>
+              <a:ext uri="{FF2B5EF4-FFF2-40B4-BE49-F238E27FC236}">
+                <a16:creationId xmlns:a16="http://schemas.microsoft.com/office/drawing/2014/main" id="{E5230F19-78FA-443F-A626-3CA03956F558}"/>
               </a:ext>
             </a:extLst>
           </p:cNvPr>
@@ -18160,8 +21755,8 @@
         </p:blipFill>
         <p:spPr bwMode="auto">
           <a:xfrm>
-            <a:off x="3916697" y="1968177"/>
-            <a:ext cx="4357020" cy="3066024"/>
+            <a:off x="3918284" y="2007133"/>
+            <a:ext cx="4355434" cy="2902728"/>
           </a:xfrm>
           <a:prstGeom prst="rect">
             <a:avLst/>
@@ -18188,6 +21783,102 @@
   <p:clrMapOvr>
     <a:masterClrMapping/>
   </p:clrMapOvr>
+  <p:timing>
+    <p:tnLst>
+      <p:par>
+        <p:cTn id="1" dur="indefinite" restart="never" nodeType="tmRoot">
+          <p:childTnLst>
+            <p:seq concurrent="1" nextAc="seek">
+              <p:cTn id="2" dur="indefinite" nodeType="mainSeq">
+                <p:childTnLst>
+                  <p:par>
+                    <p:cTn id="3" fill="hold">
+                      <p:stCondLst>
+                        <p:cond delay="indefinite"/>
+                        <p:cond evt="onBegin" delay="0">
+                          <p:tn val="2"/>
+                        </p:cond>
+                      </p:stCondLst>
+                      <p:childTnLst>
+                        <p:par>
+                          <p:cTn id="4" fill="hold">
+                            <p:stCondLst>
+                              <p:cond delay="0"/>
+                            </p:stCondLst>
+                            <p:childTnLst>
+                              <p:par>
+                                <p:cTn id="5" presetID="21" presetClass="exit" presetSubtype="1" repeatCount="indefinite" fill="hold" grpId="0" nodeType="afterEffect">
+                                  <p:stCondLst>
+                                    <p:cond delay="3000"/>
+                                  </p:stCondLst>
+                                  <p:endCondLst>
+                                    <p:cond evt="onNext" delay="0">
+                                      <p:tgtEl>
+                                        <p:sldTgt/>
+                                      </p:tgtEl>
+                                    </p:cond>
+                                  </p:endCondLst>
+                                  <p:childTnLst>
+                                    <p:animEffect transition="out" filter="wheel(1)">
+                                      <p:cBhvr>
+                                        <p:cTn id="6" dur="15000"/>
+                                        <p:tgtEl>
+                                          <p:spTgt spid="10"/>
+                                        </p:tgtEl>
+                                      </p:cBhvr>
+                                    </p:animEffect>
+                                    <p:set>
+                                      <p:cBhvr>
+                                        <p:cTn id="7" dur="1" fill="hold">
+                                          <p:stCondLst>
+                                            <p:cond delay="14999"/>
+                                          </p:stCondLst>
+                                        </p:cTn>
+                                        <p:tgtEl>
+                                          <p:spTgt spid="10"/>
+                                        </p:tgtEl>
+                                        <p:attrNameLst>
+                                          <p:attrName>style.visibility</p:attrName>
+                                        </p:attrNameLst>
+                                      </p:cBhvr>
+                                      <p:to>
+                                        <p:strVal val="hidden"/>
+                                      </p:to>
+                                    </p:set>
+                                  </p:childTnLst>
+                                </p:cTn>
+                              </p:par>
+                            </p:childTnLst>
+                          </p:cTn>
+                        </p:par>
+                      </p:childTnLst>
+                    </p:cTn>
+                  </p:par>
+                </p:childTnLst>
+              </p:cTn>
+              <p:prevCondLst>
+                <p:cond evt="onPrev" delay="0">
+                  <p:tgtEl>
+                    <p:sldTgt/>
+                  </p:tgtEl>
+                </p:cond>
+              </p:prevCondLst>
+              <p:nextCondLst>
+                <p:cond evt="onNext" delay="0">
+                  <p:tgtEl>
+                    <p:sldTgt/>
+                  </p:tgtEl>
+                </p:cond>
+              </p:nextCondLst>
+            </p:seq>
+          </p:childTnLst>
+        </p:cTn>
+      </p:par>
+    </p:tnLst>
+    <p:bldLst>
+      <p:bldP spid="10" grpId="0" animBg="1"/>
+    </p:bldLst>
+  </p:timing>
 </p:sld>
 </file>
 
@@ -18369,7 +22060,7 @@
               <a:rPr kumimoji="1" lang="en-US" altLang="ja-JP" sz="9600" dirty="0">
                 <a:latin typeface="Impact" panose="020B0806030902050204" pitchFamily="34" charset="0"/>
               </a:rPr>
-              <a:t>Table Tennis</a:t>
+              <a:t>Swimming</a:t>
             </a:r>
           </a:p>
         </p:txBody>
@@ -18678,6 +22369,160 @@
           </a:extLst>
         </p:spPr>
       </p:pic>
+      <p:sp>
+        <p:nvSpPr>
+          <p:cNvPr id="8" name="楕円 7">
+            <a:extLst>
+              <a:ext uri="{FF2B5EF4-FFF2-40B4-BE49-F238E27FC236}">
+                <a16:creationId xmlns:a16="http://schemas.microsoft.com/office/drawing/2014/main" id="{5F942DAB-A968-4D22-A032-EA114246ED9F}"/>
+              </a:ext>
+            </a:extLst>
+          </p:cNvPr>
+          <p:cNvSpPr/>
+          <p:nvPr/>
+        </p:nvSpPr>
+        <p:spPr>
+          <a:xfrm>
+            <a:off x="1185445" y="486278"/>
+            <a:ext cx="876300" cy="876300"/>
+          </a:xfrm>
+          <a:prstGeom prst="ellipse">
+            <a:avLst/>
+          </a:prstGeom>
+          <a:solidFill>
+            <a:srgbClr val="FF0000"/>
+          </a:solidFill>
+          <a:ln>
+            <a:solidFill>
+              <a:schemeClr val="bg1"/>
+            </a:solidFill>
+          </a:ln>
+        </p:spPr>
+        <p:style>
+          <a:lnRef idx="2">
+            <a:schemeClr val="dk1"/>
+          </a:lnRef>
+          <a:fillRef idx="1">
+            <a:schemeClr val="lt1"/>
+          </a:fillRef>
+          <a:effectRef idx="0">
+            <a:schemeClr val="dk1"/>
+          </a:effectRef>
+          <a:fontRef idx="minor">
+            <a:schemeClr val="dk1"/>
+          </a:fontRef>
+        </p:style>
+        <p:txBody>
+          <a:bodyPr rtlCol="0" anchor="ctr"/>
+          <a:lstStyle/>
+          <a:p>
+            <a:pPr algn="ctr"/>
+            <a:endParaRPr kumimoji="1" lang="ja-JP" altLang="en-US"/>
+          </a:p>
+        </p:txBody>
+      </p:sp>
+      <p:sp>
+        <p:nvSpPr>
+          <p:cNvPr id="9" name="楕円 8">
+            <a:extLst>
+              <a:ext uri="{FF2B5EF4-FFF2-40B4-BE49-F238E27FC236}">
+                <a16:creationId xmlns:a16="http://schemas.microsoft.com/office/drawing/2014/main" id="{22A1A9E5-45F6-4E6B-B641-D7BF51F8F36F}"/>
+              </a:ext>
+            </a:extLst>
+          </p:cNvPr>
+          <p:cNvSpPr/>
+          <p:nvPr/>
+        </p:nvSpPr>
+        <p:spPr>
+          <a:xfrm>
+            <a:off x="1185445" y="486278"/>
+            <a:ext cx="876300" cy="876300"/>
+          </a:xfrm>
+          <a:prstGeom prst="ellipse">
+            <a:avLst/>
+          </a:prstGeom>
+          <a:solidFill>
+            <a:srgbClr val="00B050"/>
+          </a:solidFill>
+          <a:ln>
+            <a:solidFill>
+              <a:schemeClr val="bg1"/>
+            </a:solidFill>
+          </a:ln>
+        </p:spPr>
+        <p:style>
+          <a:lnRef idx="2">
+            <a:schemeClr val="dk1"/>
+          </a:lnRef>
+          <a:fillRef idx="1">
+            <a:schemeClr val="lt1"/>
+          </a:fillRef>
+          <a:effectRef idx="0">
+            <a:schemeClr val="dk1"/>
+          </a:effectRef>
+          <a:fontRef idx="minor">
+            <a:schemeClr val="dk1"/>
+          </a:fontRef>
+        </p:style>
+        <p:txBody>
+          <a:bodyPr rtlCol="0" anchor="ctr"/>
+          <a:lstStyle/>
+          <a:p>
+            <a:pPr algn="ctr"/>
+            <a:endParaRPr kumimoji="1" lang="en-US" altLang="ja-JP" dirty="0"/>
+          </a:p>
+        </p:txBody>
+      </p:sp>
+      <p:sp>
+        <p:nvSpPr>
+          <p:cNvPr id="10" name="楕円 9">
+            <a:extLst>
+              <a:ext uri="{FF2B5EF4-FFF2-40B4-BE49-F238E27FC236}">
+                <a16:creationId xmlns:a16="http://schemas.microsoft.com/office/drawing/2014/main" id="{077393B3-45E4-480E-BE63-C9020335944C}"/>
+              </a:ext>
+            </a:extLst>
+          </p:cNvPr>
+          <p:cNvSpPr/>
+          <p:nvPr/>
+        </p:nvSpPr>
+        <p:spPr>
+          <a:xfrm>
+            <a:off x="1185445" y="486278"/>
+            <a:ext cx="876300" cy="876300"/>
+          </a:xfrm>
+          <a:prstGeom prst="ellipse">
+            <a:avLst/>
+          </a:prstGeom>
+          <a:noFill/>
+          <a:ln>
+            <a:solidFill>
+              <a:schemeClr val="bg1"/>
+            </a:solidFill>
+          </a:ln>
+        </p:spPr>
+        <p:style>
+          <a:lnRef idx="2">
+            <a:schemeClr val="dk1"/>
+          </a:lnRef>
+          <a:fillRef idx="1">
+            <a:schemeClr val="lt1"/>
+          </a:fillRef>
+          <a:effectRef idx="0">
+            <a:schemeClr val="dk1"/>
+          </a:effectRef>
+          <a:fontRef idx="minor">
+            <a:schemeClr val="dk1"/>
+          </a:fontRef>
+        </p:style>
+        <p:txBody>
+          <a:bodyPr rtlCol="0" anchor="ctr"/>
+          <a:lstStyle/>
+          <a:p>
+            <a:pPr algn="ctr"/>
+            <a:endParaRPr kumimoji="1" lang="ja-JP" altLang="en-US"/>
+          </a:p>
+        </p:txBody>
+      </p:sp>
     </p:spTree>
     <p:extLst>
       <p:ext uri="{BB962C8B-B14F-4D97-AF65-F5344CB8AC3E}">
@@ -18688,6 +22533,102 @@
   <p:clrMapOvr>
     <a:masterClrMapping/>
   </p:clrMapOvr>
+  <p:timing>
+    <p:tnLst>
+      <p:par>
+        <p:cTn id="1" dur="indefinite" restart="never" nodeType="tmRoot">
+          <p:childTnLst>
+            <p:seq concurrent="1" nextAc="seek">
+              <p:cTn id="2" dur="indefinite" nodeType="mainSeq">
+                <p:childTnLst>
+                  <p:par>
+                    <p:cTn id="3" fill="hold">
+                      <p:stCondLst>
+                        <p:cond delay="indefinite"/>
+                        <p:cond evt="onBegin" delay="0">
+                          <p:tn val="2"/>
+                        </p:cond>
+                      </p:stCondLst>
+                      <p:childTnLst>
+                        <p:par>
+                          <p:cTn id="4" fill="hold">
+                            <p:stCondLst>
+                              <p:cond delay="0"/>
+                            </p:stCondLst>
+                            <p:childTnLst>
+                              <p:par>
+                                <p:cTn id="5" presetID="21" presetClass="exit" presetSubtype="1" repeatCount="indefinite" fill="hold" grpId="0" nodeType="afterEffect">
+                                  <p:stCondLst>
+                                    <p:cond delay="3000"/>
+                                  </p:stCondLst>
+                                  <p:endCondLst>
+                                    <p:cond evt="onNext" delay="0">
+                                      <p:tgtEl>
+                                        <p:sldTgt/>
+                                      </p:tgtEl>
+                                    </p:cond>
+                                  </p:endCondLst>
+                                  <p:childTnLst>
+                                    <p:animEffect transition="out" filter="wheel(1)">
+                                      <p:cBhvr>
+                                        <p:cTn id="6" dur="15000"/>
+                                        <p:tgtEl>
+                                          <p:spTgt spid="9"/>
+                                        </p:tgtEl>
+                                      </p:cBhvr>
+                                    </p:animEffect>
+                                    <p:set>
+                                      <p:cBhvr>
+                                        <p:cTn id="7" dur="1" fill="hold">
+                                          <p:stCondLst>
+                                            <p:cond delay="14999"/>
+                                          </p:stCondLst>
+                                        </p:cTn>
+                                        <p:tgtEl>
+                                          <p:spTgt spid="9"/>
+                                        </p:tgtEl>
+                                        <p:attrNameLst>
+                                          <p:attrName>style.visibility</p:attrName>
+                                        </p:attrNameLst>
+                                      </p:cBhvr>
+                                      <p:to>
+                                        <p:strVal val="hidden"/>
+                                      </p:to>
+                                    </p:set>
+                                  </p:childTnLst>
+                                </p:cTn>
+                              </p:par>
+                            </p:childTnLst>
+                          </p:cTn>
+                        </p:par>
+                      </p:childTnLst>
+                    </p:cTn>
+                  </p:par>
+                </p:childTnLst>
+              </p:cTn>
+              <p:prevCondLst>
+                <p:cond evt="onPrev" delay="0">
+                  <p:tgtEl>
+                    <p:sldTgt/>
+                  </p:tgtEl>
+                </p:cond>
+              </p:prevCondLst>
+              <p:nextCondLst>
+                <p:cond evt="onNext" delay="0">
+                  <p:tgtEl>
+                    <p:sldTgt/>
+                  </p:tgtEl>
+                </p:cond>
+              </p:nextCondLst>
+            </p:seq>
+          </p:childTnLst>
+        </p:cTn>
+      </p:par>
+    </p:tnLst>
+    <p:bldLst>
+      <p:bldP spid="9" grpId="0" animBg="1"/>
+    </p:bldLst>
+  </p:timing>
 </p:sld>
 </file>
 
@@ -19377,6 +23318,160 @@
           </a:extLst>
         </p:spPr>
       </p:pic>
+      <p:sp>
+        <p:nvSpPr>
+          <p:cNvPr id="8" name="楕円 7">
+            <a:extLst>
+              <a:ext uri="{FF2B5EF4-FFF2-40B4-BE49-F238E27FC236}">
+                <a16:creationId xmlns:a16="http://schemas.microsoft.com/office/drawing/2014/main" id="{354064F6-7A9E-4879-8CDD-6F01830F5F98}"/>
+              </a:ext>
+            </a:extLst>
+          </p:cNvPr>
+          <p:cNvSpPr/>
+          <p:nvPr/>
+        </p:nvSpPr>
+        <p:spPr>
+          <a:xfrm>
+            <a:off x="1185445" y="486278"/>
+            <a:ext cx="876300" cy="876300"/>
+          </a:xfrm>
+          <a:prstGeom prst="ellipse">
+            <a:avLst/>
+          </a:prstGeom>
+          <a:solidFill>
+            <a:srgbClr val="FF0000"/>
+          </a:solidFill>
+          <a:ln>
+            <a:solidFill>
+              <a:schemeClr val="bg1"/>
+            </a:solidFill>
+          </a:ln>
+        </p:spPr>
+        <p:style>
+          <a:lnRef idx="2">
+            <a:schemeClr val="dk1"/>
+          </a:lnRef>
+          <a:fillRef idx="1">
+            <a:schemeClr val="lt1"/>
+          </a:fillRef>
+          <a:effectRef idx="0">
+            <a:schemeClr val="dk1"/>
+          </a:effectRef>
+          <a:fontRef idx="minor">
+            <a:schemeClr val="dk1"/>
+          </a:fontRef>
+        </p:style>
+        <p:txBody>
+          <a:bodyPr rtlCol="0" anchor="ctr"/>
+          <a:lstStyle/>
+          <a:p>
+            <a:pPr algn="ctr"/>
+            <a:endParaRPr kumimoji="1" lang="ja-JP" altLang="en-US"/>
+          </a:p>
+        </p:txBody>
+      </p:sp>
+      <p:sp>
+        <p:nvSpPr>
+          <p:cNvPr id="10" name="楕円 9">
+            <a:extLst>
+              <a:ext uri="{FF2B5EF4-FFF2-40B4-BE49-F238E27FC236}">
+                <a16:creationId xmlns:a16="http://schemas.microsoft.com/office/drawing/2014/main" id="{4DF6A95B-F681-4165-BCCB-425D52DBB498}"/>
+              </a:ext>
+            </a:extLst>
+          </p:cNvPr>
+          <p:cNvSpPr/>
+          <p:nvPr/>
+        </p:nvSpPr>
+        <p:spPr>
+          <a:xfrm>
+            <a:off x="1185445" y="486278"/>
+            <a:ext cx="876300" cy="876300"/>
+          </a:xfrm>
+          <a:prstGeom prst="ellipse">
+            <a:avLst/>
+          </a:prstGeom>
+          <a:solidFill>
+            <a:srgbClr val="00B050"/>
+          </a:solidFill>
+          <a:ln>
+            <a:solidFill>
+              <a:schemeClr val="bg1"/>
+            </a:solidFill>
+          </a:ln>
+        </p:spPr>
+        <p:style>
+          <a:lnRef idx="2">
+            <a:schemeClr val="dk1"/>
+          </a:lnRef>
+          <a:fillRef idx="1">
+            <a:schemeClr val="lt1"/>
+          </a:fillRef>
+          <a:effectRef idx="0">
+            <a:schemeClr val="dk1"/>
+          </a:effectRef>
+          <a:fontRef idx="minor">
+            <a:schemeClr val="dk1"/>
+          </a:fontRef>
+        </p:style>
+        <p:txBody>
+          <a:bodyPr rtlCol="0" anchor="ctr"/>
+          <a:lstStyle/>
+          <a:p>
+            <a:pPr algn="ctr"/>
+            <a:endParaRPr kumimoji="1" lang="en-US" altLang="ja-JP" dirty="0"/>
+          </a:p>
+        </p:txBody>
+      </p:sp>
+      <p:sp>
+        <p:nvSpPr>
+          <p:cNvPr id="11" name="楕円 10">
+            <a:extLst>
+              <a:ext uri="{FF2B5EF4-FFF2-40B4-BE49-F238E27FC236}">
+                <a16:creationId xmlns:a16="http://schemas.microsoft.com/office/drawing/2014/main" id="{389BCEA1-D7AC-4DA3-8AB6-FC08D2D6B02A}"/>
+              </a:ext>
+            </a:extLst>
+          </p:cNvPr>
+          <p:cNvSpPr/>
+          <p:nvPr/>
+        </p:nvSpPr>
+        <p:spPr>
+          <a:xfrm>
+            <a:off x="1185445" y="486278"/>
+            <a:ext cx="876300" cy="876300"/>
+          </a:xfrm>
+          <a:prstGeom prst="ellipse">
+            <a:avLst/>
+          </a:prstGeom>
+          <a:noFill/>
+          <a:ln>
+            <a:solidFill>
+              <a:schemeClr val="bg1"/>
+            </a:solidFill>
+          </a:ln>
+        </p:spPr>
+        <p:style>
+          <a:lnRef idx="2">
+            <a:schemeClr val="dk1"/>
+          </a:lnRef>
+          <a:fillRef idx="1">
+            <a:schemeClr val="lt1"/>
+          </a:fillRef>
+          <a:effectRef idx="0">
+            <a:schemeClr val="dk1"/>
+          </a:effectRef>
+          <a:fontRef idx="minor">
+            <a:schemeClr val="dk1"/>
+          </a:fontRef>
+        </p:style>
+        <p:txBody>
+          <a:bodyPr rtlCol="0" anchor="ctr"/>
+          <a:lstStyle/>
+          <a:p>
+            <a:pPr algn="ctr"/>
+            <a:endParaRPr kumimoji="1" lang="ja-JP" altLang="en-US"/>
+          </a:p>
+        </p:txBody>
+      </p:sp>
     </p:spTree>
     <p:extLst>
       <p:ext uri="{BB962C8B-B14F-4D97-AF65-F5344CB8AC3E}">
@@ -19387,6 +23482,102 @@
   <p:clrMapOvr>
     <a:masterClrMapping/>
   </p:clrMapOvr>
+  <p:timing>
+    <p:tnLst>
+      <p:par>
+        <p:cTn id="1" dur="indefinite" restart="never" nodeType="tmRoot">
+          <p:childTnLst>
+            <p:seq concurrent="1" nextAc="seek">
+              <p:cTn id="2" dur="indefinite" nodeType="mainSeq">
+                <p:childTnLst>
+                  <p:par>
+                    <p:cTn id="3" fill="hold">
+                      <p:stCondLst>
+                        <p:cond delay="indefinite"/>
+                        <p:cond evt="onBegin" delay="0">
+                          <p:tn val="2"/>
+                        </p:cond>
+                      </p:stCondLst>
+                      <p:childTnLst>
+                        <p:par>
+                          <p:cTn id="4" fill="hold">
+                            <p:stCondLst>
+                              <p:cond delay="0"/>
+                            </p:stCondLst>
+                            <p:childTnLst>
+                              <p:par>
+                                <p:cTn id="5" presetID="21" presetClass="exit" presetSubtype="1" repeatCount="indefinite" fill="hold" grpId="0" nodeType="afterEffect">
+                                  <p:stCondLst>
+                                    <p:cond delay="3000"/>
+                                  </p:stCondLst>
+                                  <p:endCondLst>
+                                    <p:cond evt="onNext" delay="0">
+                                      <p:tgtEl>
+                                        <p:sldTgt/>
+                                      </p:tgtEl>
+                                    </p:cond>
+                                  </p:endCondLst>
+                                  <p:childTnLst>
+                                    <p:animEffect transition="out" filter="wheel(1)">
+                                      <p:cBhvr>
+                                        <p:cTn id="6" dur="15000"/>
+                                        <p:tgtEl>
+                                          <p:spTgt spid="10"/>
+                                        </p:tgtEl>
+                                      </p:cBhvr>
+                                    </p:animEffect>
+                                    <p:set>
+                                      <p:cBhvr>
+                                        <p:cTn id="7" dur="1" fill="hold">
+                                          <p:stCondLst>
+                                            <p:cond delay="14999"/>
+                                          </p:stCondLst>
+                                        </p:cTn>
+                                        <p:tgtEl>
+                                          <p:spTgt spid="10"/>
+                                        </p:tgtEl>
+                                        <p:attrNameLst>
+                                          <p:attrName>style.visibility</p:attrName>
+                                        </p:attrNameLst>
+                                      </p:cBhvr>
+                                      <p:to>
+                                        <p:strVal val="hidden"/>
+                                      </p:to>
+                                    </p:set>
+                                  </p:childTnLst>
+                                </p:cTn>
+                              </p:par>
+                            </p:childTnLst>
+                          </p:cTn>
+                        </p:par>
+                      </p:childTnLst>
+                    </p:cTn>
+                  </p:par>
+                </p:childTnLst>
+              </p:cTn>
+              <p:prevCondLst>
+                <p:cond evt="onPrev" delay="0">
+                  <p:tgtEl>
+                    <p:sldTgt/>
+                  </p:tgtEl>
+                </p:cond>
+              </p:prevCondLst>
+              <p:nextCondLst>
+                <p:cond evt="onNext" delay="0">
+                  <p:tgtEl>
+                    <p:sldTgt/>
+                  </p:tgtEl>
+                </p:cond>
+              </p:nextCondLst>
+            </p:seq>
+          </p:childTnLst>
+        </p:cTn>
+      </p:par>
+    </p:tnLst>
+    <p:bldLst>
+      <p:bldP spid="10" grpId="0" animBg="1"/>
+    </p:bldLst>
+  </p:timing>
 </p:sld>
 </file>
 
@@ -19850,6 +24041,160 @@
           </a:p>
         </p:txBody>
       </p:sp>
+      <p:sp>
+        <p:nvSpPr>
+          <p:cNvPr id="7" name="楕円 6">
+            <a:extLst>
+              <a:ext uri="{FF2B5EF4-FFF2-40B4-BE49-F238E27FC236}">
+                <a16:creationId xmlns:a16="http://schemas.microsoft.com/office/drawing/2014/main" id="{9AA36D9A-90D3-4E2A-969C-4595831443AF}"/>
+              </a:ext>
+            </a:extLst>
+          </p:cNvPr>
+          <p:cNvSpPr/>
+          <p:nvPr/>
+        </p:nvSpPr>
+        <p:spPr>
+          <a:xfrm>
+            <a:off x="1185445" y="486278"/>
+            <a:ext cx="876300" cy="876300"/>
+          </a:xfrm>
+          <a:prstGeom prst="ellipse">
+            <a:avLst/>
+          </a:prstGeom>
+          <a:solidFill>
+            <a:srgbClr val="FF0000"/>
+          </a:solidFill>
+          <a:ln>
+            <a:solidFill>
+              <a:schemeClr val="bg1"/>
+            </a:solidFill>
+          </a:ln>
+        </p:spPr>
+        <p:style>
+          <a:lnRef idx="2">
+            <a:schemeClr val="dk1"/>
+          </a:lnRef>
+          <a:fillRef idx="1">
+            <a:schemeClr val="lt1"/>
+          </a:fillRef>
+          <a:effectRef idx="0">
+            <a:schemeClr val="dk1"/>
+          </a:effectRef>
+          <a:fontRef idx="minor">
+            <a:schemeClr val="dk1"/>
+          </a:fontRef>
+        </p:style>
+        <p:txBody>
+          <a:bodyPr rtlCol="0" anchor="ctr"/>
+          <a:lstStyle/>
+          <a:p>
+            <a:pPr algn="ctr"/>
+            <a:endParaRPr kumimoji="1" lang="ja-JP" altLang="en-US"/>
+          </a:p>
+        </p:txBody>
+      </p:sp>
+      <p:sp>
+        <p:nvSpPr>
+          <p:cNvPr id="8" name="楕円 7">
+            <a:extLst>
+              <a:ext uri="{FF2B5EF4-FFF2-40B4-BE49-F238E27FC236}">
+                <a16:creationId xmlns:a16="http://schemas.microsoft.com/office/drawing/2014/main" id="{64089797-07C2-40F0-8CD4-2A7781999CA4}"/>
+              </a:ext>
+            </a:extLst>
+          </p:cNvPr>
+          <p:cNvSpPr/>
+          <p:nvPr/>
+        </p:nvSpPr>
+        <p:spPr>
+          <a:xfrm>
+            <a:off x="1185445" y="486278"/>
+            <a:ext cx="876300" cy="876300"/>
+          </a:xfrm>
+          <a:prstGeom prst="ellipse">
+            <a:avLst/>
+          </a:prstGeom>
+          <a:solidFill>
+            <a:srgbClr val="00B050"/>
+          </a:solidFill>
+          <a:ln>
+            <a:solidFill>
+              <a:schemeClr val="bg1"/>
+            </a:solidFill>
+          </a:ln>
+        </p:spPr>
+        <p:style>
+          <a:lnRef idx="2">
+            <a:schemeClr val="dk1"/>
+          </a:lnRef>
+          <a:fillRef idx="1">
+            <a:schemeClr val="lt1"/>
+          </a:fillRef>
+          <a:effectRef idx="0">
+            <a:schemeClr val="dk1"/>
+          </a:effectRef>
+          <a:fontRef idx="minor">
+            <a:schemeClr val="dk1"/>
+          </a:fontRef>
+        </p:style>
+        <p:txBody>
+          <a:bodyPr rtlCol="0" anchor="ctr"/>
+          <a:lstStyle/>
+          <a:p>
+            <a:pPr algn="ctr"/>
+            <a:endParaRPr kumimoji="1" lang="en-US" altLang="ja-JP" dirty="0"/>
+          </a:p>
+        </p:txBody>
+      </p:sp>
+      <p:sp>
+        <p:nvSpPr>
+          <p:cNvPr id="9" name="楕円 8">
+            <a:extLst>
+              <a:ext uri="{FF2B5EF4-FFF2-40B4-BE49-F238E27FC236}">
+                <a16:creationId xmlns:a16="http://schemas.microsoft.com/office/drawing/2014/main" id="{6E7D66E9-24EE-4F37-8E0D-CD6A73E10A42}"/>
+              </a:ext>
+            </a:extLst>
+          </p:cNvPr>
+          <p:cNvSpPr/>
+          <p:nvPr/>
+        </p:nvSpPr>
+        <p:spPr>
+          <a:xfrm>
+            <a:off x="1185445" y="486278"/>
+            <a:ext cx="876300" cy="876300"/>
+          </a:xfrm>
+          <a:prstGeom prst="ellipse">
+            <a:avLst/>
+          </a:prstGeom>
+          <a:noFill/>
+          <a:ln>
+            <a:solidFill>
+              <a:schemeClr val="bg1"/>
+            </a:solidFill>
+          </a:ln>
+        </p:spPr>
+        <p:style>
+          <a:lnRef idx="2">
+            <a:schemeClr val="dk1"/>
+          </a:lnRef>
+          <a:fillRef idx="1">
+            <a:schemeClr val="lt1"/>
+          </a:fillRef>
+          <a:effectRef idx="0">
+            <a:schemeClr val="dk1"/>
+          </a:effectRef>
+          <a:fontRef idx="minor">
+            <a:schemeClr val="dk1"/>
+          </a:fontRef>
+        </p:style>
+        <p:txBody>
+          <a:bodyPr rtlCol="0" anchor="ctr"/>
+          <a:lstStyle/>
+          <a:p>
+            <a:pPr algn="ctr"/>
+            <a:endParaRPr kumimoji="1" lang="ja-JP" altLang="en-US"/>
+          </a:p>
+        </p:txBody>
+      </p:sp>
     </p:spTree>
     <p:extLst>
       <p:ext uri="{BB962C8B-B14F-4D97-AF65-F5344CB8AC3E}">
@@ -19860,6 +24205,102 @@
   <p:clrMapOvr>
     <a:masterClrMapping/>
   </p:clrMapOvr>
+  <p:timing>
+    <p:tnLst>
+      <p:par>
+        <p:cTn id="1" dur="indefinite" restart="never" nodeType="tmRoot">
+          <p:childTnLst>
+            <p:seq concurrent="1" nextAc="seek">
+              <p:cTn id="2" dur="indefinite" nodeType="mainSeq">
+                <p:childTnLst>
+                  <p:par>
+                    <p:cTn id="3" fill="hold">
+                      <p:stCondLst>
+                        <p:cond delay="indefinite"/>
+                        <p:cond evt="onBegin" delay="0">
+                          <p:tn val="2"/>
+                        </p:cond>
+                      </p:stCondLst>
+                      <p:childTnLst>
+                        <p:par>
+                          <p:cTn id="4" fill="hold">
+                            <p:stCondLst>
+                              <p:cond delay="0"/>
+                            </p:stCondLst>
+                            <p:childTnLst>
+                              <p:par>
+                                <p:cTn id="5" presetID="21" presetClass="exit" presetSubtype="1" repeatCount="indefinite" fill="hold" grpId="0" nodeType="afterEffect">
+                                  <p:stCondLst>
+                                    <p:cond delay="3000"/>
+                                  </p:stCondLst>
+                                  <p:endCondLst>
+                                    <p:cond evt="onNext" delay="0">
+                                      <p:tgtEl>
+                                        <p:sldTgt/>
+                                      </p:tgtEl>
+                                    </p:cond>
+                                  </p:endCondLst>
+                                  <p:childTnLst>
+                                    <p:animEffect transition="out" filter="wheel(1)">
+                                      <p:cBhvr>
+                                        <p:cTn id="6" dur="15000"/>
+                                        <p:tgtEl>
+                                          <p:spTgt spid="8"/>
+                                        </p:tgtEl>
+                                      </p:cBhvr>
+                                    </p:animEffect>
+                                    <p:set>
+                                      <p:cBhvr>
+                                        <p:cTn id="7" dur="1" fill="hold">
+                                          <p:stCondLst>
+                                            <p:cond delay="14999"/>
+                                          </p:stCondLst>
+                                        </p:cTn>
+                                        <p:tgtEl>
+                                          <p:spTgt spid="8"/>
+                                        </p:tgtEl>
+                                        <p:attrNameLst>
+                                          <p:attrName>style.visibility</p:attrName>
+                                        </p:attrNameLst>
+                                      </p:cBhvr>
+                                      <p:to>
+                                        <p:strVal val="hidden"/>
+                                      </p:to>
+                                    </p:set>
+                                  </p:childTnLst>
+                                </p:cTn>
+                              </p:par>
+                            </p:childTnLst>
+                          </p:cTn>
+                        </p:par>
+                      </p:childTnLst>
+                    </p:cTn>
+                  </p:par>
+                </p:childTnLst>
+              </p:cTn>
+              <p:prevCondLst>
+                <p:cond evt="onPrev" delay="0">
+                  <p:tgtEl>
+                    <p:sldTgt/>
+                  </p:tgtEl>
+                </p:cond>
+              </p:prevCondLst>
+              <p:nextCondLst>
+                <p:cond evt="onNext" delay="0">
+                  <p:tgtEl>
+                    <p:sldTgt/>
+                  </p:tgtEl>
+                </p:cond>
+              </p:nextCondLst>
+            </p:seq>
+          </p:childTnLst>
+        </p:cTn>
+      </p:par>
+    </p:tnLst>
+    <p:bldLst>
+      <p:bldP spid="8" grpId="0" animBg="1"/>
+    </p:bldLst>
+  </p:timing>
 </p:sld>
 </file>
 
@@ -20373,6 +24814,160 @@
           </a:p>
         </p:txBody>
       </p:sp>
+      <p:sp>
+        <p:nvSpPr>
+          <p:cNvPr id="10" name="楕円 9">
+            <a:extLst>
+              <a:ext uri="{FF2B5EF4-FFF2-40B4-BE49-F238E27FC236}">
+                <a16:creationId xmlns:a16="http://schemas.microsoft.com/office/drawing/2014/main" id="{AEC9258F-3B27-4DC5-9302-E1FC3D3854FB}"/>
+              </a:ext>
+            </a:extLst>
+          </p:cNvPr>
+          <p:cNvSpPr/>
+          <p:nvPr/>
+        </p:nvSpPr>
+        <p:spPr>
+          <a:xfrm>
+            <a:off x="1185445" y="486278"/>
+            <a:ext cx="876300" cy="876300"/>
+          </a:xfrm>
+          <a:prstGeom prst="ellipse">
+            <a:avLst/>
+          </a:prstGeom>
+          <a:solidFill>
+            <a:srgbClr val="FF0000"/>
+          </a:solidFill>
+          <a:ln>
+            <a:solidFill>
+              <a:schemeClr val="bg1"/>
+            </a:solidFill>
+          </a:ln>
+        </p:spPr>
+        <p:style>
+          <a:lnRef idx="2">
+            <a:schemeClr val="dk1"/>
+          </a:lnRef>
+          <a:fillRef idx="1">
+            <a:schemeClr val="lt1"/>
+          </a:fillRef>
+          <a:effectRef idx="0">
+            <a:schemeClr val="dk1"/>
+          </a:effectRef>
+          <a:fontRef idx="minor">
+            <a:schemeClr val="dk1"/>
+          </a:fontRef>
+        </p:style>
+        <p:txBody>
+          <a:bodyPr rtlCol="0" anchor="ctr"/>
+          <a:lstStyle/>
+          <a:p>
+            <a:pPr algn="ctr"/>
+            <a:endParaRPr kumimoji="1" lang="ja-JP" altLang="en-US"/>
+          </a:p>
+        </p:txBody>
+      </p:sp>
+      <p:sp>
+        <p:nvSpPr>
+          <p:cNvPr id="11" name="楕円 10">
+            <a:extLst>
+              <a:ext uri="{FF2B5EF4-FFF2-40B4-BE49-F238E27FC236}">
+                <a16:creationId xmlns:a16="http://schemas.microsoft.com/office/drawing/2014/main" id="{2B872042-433B-4642-82C5-800C6BEF5779}"/>
+              </a:ext>
+            </a:extLst>
+          </p:cNvPr>
+          <p:cNvSpPr/>
+          <p:nvPr/>
+        </p:nvSpPr>
+        <p:spPr>
+          <a:xfrm>
+            <a:off x="1185445" y="486278"/>
+            <a:ext cx="876300" cy="876300"/>
+          </a:xfrm>
+          <a:prstGeom prst="ellipse">
+            <a:avLst/>
+          </a:prstGeom>
+          <a:solidFill>
+            <a:srgbClr val="00B050"/>
+          </a:solidFill>
+          <a:ln>
+            <a:solidFill>
+              <a:schemeClr val="bg1"/>
+            </a:solidFill>
+          </a:ln>
+        </p:spPr>
+        <p:style>
+          <a:lnRef idx="2">
+            <a:schemeClr val="dk1"/>
+          </a:lnRef>
+          <a:fillRef idx="1">
+            <a:schemeClr val="lt1"/>
+          </a:fillRef>
+          <a:effectRef idx="0">
+            <a:schemeClr val="dk1"/>
+          </a:effectRef>
+          <a:fontRef idx="minor">
+            <a:schemeClr val="dk1"/>
+          </a:fontRef>
+        </p:style>
+        <p:txBody>
+          <a:bodyPr rtlCol="0" anchor="ctr"/>
+          <a:lstStyle/>
+          <a:p>
+            <a:pPr algn="ctr"/>
+            <a:endParaRPr kumimoji="1" lang="en-US" altLang="ja-JP" dirty="0"/>
+          </a:p>
+        </p:txBody>
+      </p:sp>
+      <p:sp>
+        <p:nvSpPr>
+          <p:cNvPr id="12" name="楕円 11">
+            <a:extLst>
+              <a:ext uri="{FF2B5EF4-FFF2-40B4-BE49-F238E27FC236}">
+                <a16:creationId xmlns:a16="http://schemas.microsoft.com/office/drawing/2014/main" id="{DECD6A40-42F0-4B3A-9752-76567D95C561}"/>
+              </a:ext>
+            </a:extLst>
+          </p:cNvPr>
+          <p:cNvSpPr/>
+          <p:nvPr/>
+        </p:nvSpPr>
+        <p:spPr>
+          <a:xfrm>
+            <a:off x="1185445" y="486278"/>
+            <a:ext cx="876300" cy="876300"/>
+          </a:xfrm>
+          <a:prstGeom prst="ellipse">
+            <a:avLst/>
+          </a:prstGeom>
+          <a:noFill/>
+          <a:ln>
+            <a:solidFill>
+              <a:schemeClr val="bg1"/>
+            </a:solidFill>
+          </a:ln>
+        </p:spPr>
+        <p:style>
+          <a:lnRef idx="2">
+            <a:schemeClr val="dk1"/>
+          </a:lnRef>
+          <a:fillRef idx="1">
+            <a:schemeClr val="lt1"/>
+          </a:fillRef>
+          <a:effectRef idx="0">
+            <a:schemeClr val="dk1"/>
+          </a:effectRef>
+          <a:fontRef idx="minor">
+            <a:schemeClr val="dk1"/>
+          </a:fontRef>
+        </p:style>
+        <p:txBody>
+          <a:bodyPr rtlCol="0" anchor="ctr"/>
+          <a:lstStyle/>
+          <a:p>
+            <a:pPr algn="ctr"/>
+            <a:endParaRPr kumimoji="1" lang="ja-JP" altLang="en-US"/>
+          </a:p>
+        </p:txBody>
+      </p:sp>
     </p:spTree>
     <p:extLst>
       <p:ext uri="{BB962C8B-B14F-4D97-AF65-F5344CB8AC3E}">
@@ -20383,6 +24978,102 @@
   <p:clrMapOvr>
     <a:masterClrMapping/>
   </p:clrMapOvr>
+  <p:timing>
+    <p:tnLst>
+      <p:par>
+        <p:cTn id="1" dur="indefinite" restart="never" nodeType="tmRoot">
+          <p:childTnLst>
+            <p:seq concurrent="1" nextAc="seek">
+              <p:cTn id="2" dur="indefinite" nodeType="mainSeq">
+                <p:childTnLst>
+                  <p:par>
+                    <p:cTn id="3" fill="hold">
+                      <p:stCondLst>
+                        <p:cond delay="indefinite"/>
+                        <p:cond evt="onBegin" delay="0">
+                          <p:tn val="2"/>
+                        </p:cond>
+                      </p:stCondLst>
+                      <p:childTnLst>
+                        <p:par>
+                          <p:cTn id="4" fill="hold">
+                            <p:stCondLst>
+                              <p:cond delay="0"/>
+                            </p:stCondLst>
+                            <p:childTnLst>
+                              <p:par>
+                                <p:cTn id="5" presetID="21" presetClass="exit" presetSubtype="1" repeatCount="indefinite" fill="hold" grpId="0" nodeType="afterEffect">
+                                  <p:stCondLst>
+                                    <p:cond delay="3000"/>
+                                  </p:stCondLst>
+                                  <p:endCondLst>
+                                    <p:cond evt="onNext" delay="0">
+                                      <p:tgtEl>
+                                        <p:sldTgt/>
+                                      </p:tgtEl>
+                                    </p:cond>
+                                  </p:endCondLst>
+                                  <p:childTnLst>
+                                    <p:animEffect transition="out" filter="wheel(1)">
+                                      <p:cBhvr>
+                                        <p:cTn id="6" dur="15000"/>
+                                        <p:tgtEl>
+                                          <p:spTgt spid="11"/>
+                                        </p:tgtEl>
+                                      </p:cBhvr>
+                                    </p:animEffect>
+                                    <p:set>
+                                      <p:cBhvr>
+                                        <p:cTn id="7" dur="1" fill="hold">
+                                          <p:stCondLst>
+                                            <p:cond delay="14999"/>
+                                          </p:stCondLst>
+                                        </p:cTn>
+                                        <p:tgtEl>
+                                          <p:spTgt spid="11"/>
+                                        </p:tgtEl>
+                                        <p:attrNameLst>
+                                          <p:attrName>style.visibility</p:attrName>
+                                        </p:attrNameLst>
+                                      </p:cBhvr>
+                                      <p:to>
+                                        <p:strVal val="hidden"/>
+                                      </p:to>
+                                    </p:set>
+                                  </p:childTnLst>
+                                </p:cTn>
+                              </p:par>
+                            </p:childTnLst>
+                          </p:cTn>
+                        </p:par>
+                      </p:childTnLst>
+                    </p:cTn>
+                  </p:par>
+                </p:childTnLst>
+              </p:cTn>
+              <p:prevCondLst>
+                <p:cond evt="onPrev" delay="0">
+                  <p:tgtEl>
+                    <p:sldTgt/>
+                  </p:tgtEl>
+                </p:cond>
+              </p:prevCondLst>
+              <p:nextCondLst>
+                <p:cond evt="onNext" delay="0">
+                  <p:tgtEl>
+                    <p:sldTgt/>
+                  </p:tgtEl>
+                </p:cond>
+              </p:nextCondLst>
+            </p:seq>
+          </p:childTnLst>
+        </p:cTn>
+      </p:par>
+    </p:tnLst>
+    <p:bldLst>
+      <p:bldP spid="11" grpId="0" animBg="1"/>
+    </p:bldLst>
+  </p:timing>
 </p:sld>
 </file>
 
@@ -20882,6 +25573,160 @@
           </a:extLst>
         </p:spPr>
       </p:pic>
+      <p:sp>
+        <p:nvSpPr>
+          <p:cNvPr id="8" name="楕円 7">
+            <a:extLst>
+              <a:ext uri="{FF2B5EF4-FFF2-40B4-BE49-F238E27FC236}">
+                <a16:creationId xmlns:a16="http://schemas.microsoft.com/office/drawing/2014/main" id="{F449C514-761D-491C-B055-044933E2CA79}"/>
+              </a:ext>
+            </a:extLst>
+          </p:cNvPr>
+          <p:cNvSpPr/>
+          <p:nvPr/>
+        </p:nvSpPr>
+        <p:spPr>
+          <a:xfrm>
+            <a:off x="1185445" y="486278"/>
+            <a:ext cx="876300" cy="876300"/>
+          </a:xfrm>
+          <a:prstGeom prst="ellipse">
+            <a:avLst/>
+          </a:prstGeom>
+          <a:solidFill>
+            <a:srgbClr val="FF0000"/>
+          </a:solidFill>
+          <a:ln>
+            <a:solidFill>
+              <a:schemeClr val="bg1"/>
+            </a:solidFill>
+          </a:ln>
+        </p:spPr>
+        <p:style>
+          <a:lnRef idx="2">
+            <a:schemeClr val="dk1"/>
+          </a:lnRef>
+          <a:fillRef idx="1">
+            <a:schemeClr val="lt1"/>
+          </a:fillRef>
+          <a:effectRef idx="0">
+            <a:schemeClr val="dk1"/>
+          </a:effectRef>
+          <a:fontRef idx="minor">
+            <a:schemeClr val="dk1"/>
+          </a:fontRef>
+        </p:style>
+        <p:txBody>
+          <a:bodyPr rtlCol="0" anchor="ctr"/>
+          <a:lstStyle/>
+          <a:p>
+            <a:pPr algn="ctr"/>
+            <a:endParaRPr kumimoji="1" lang="ja-JP" altLang="en-US"/>
+          </a:p>
+        </p:txBody>
+      </p:sp>
+      <p:sp>
+        <p:nvSpPr>
+          <p:cNvPr id="10" name="楕円 9">
+            <a:extLst>
+              <a:ext uri="{FF2B5EF4-FFF2-40B4-BE49-F238E27FC236}">
+                <a16:creationId xmlns:a16="http://schemas.microsoft.com/office/drawing/2014/main" id="{142C6527-B637-4CB8-97B1-A2BC9919EC0C}"/>
+              </a:ext>
+            </a:extLst>
+          </p:cNvPr>
+          <p:cNvSpPr/>
+          <p:nvPr/>
+        </p:nvSpPr>
+        <p:spPr>
+          <a:xfrm>
+            <a:off x="1185445" y="486278"/>
+            <a:ext cx="876300" cy="876300"/>
+          </a:xfrm>
+          <a:prstGeom prst="ellipse">
+            <a:avLst/>
+          </a:prstGeom>
+          <a:solidFill>
+            <a:srgbClr val="00B050"/>
+          </a:solidFill>
+          <a:ln>
+            <a:solidFill>
+              <a:schemeClr val="bg1"/>
+            </a:solidFill>
+          </a:ln>
+        </p:spPr>
+        <p:style>
+          <a:lnRef idx="2">
+            <a:schemeClr val="dk1"/>
+          </a:lnRef>
+          <a:fillRef idx="1">
+            <a:schemeClr val="lt1"/>
+          </a:fillRef>
+          <a:effectRef idx="0">
+            <a:schemeClr val="dk1"/>
+          </a:effectRef>
+          <a:fontRef idx="minor">
+            <a:schemeClr val="dk1"/>
+          </a:fontRef>
+        </p:style>
+        <p:txBody>
+          <a:bodyPr rtlCol="0" anchor="ctr"/>
+          <a:lstStyle/>
+          <a:p>
+            <a:pPr algn="ctr"/>
+            <a:endParaRPr kumimoji="1" lang="en-US" altLang="ja-JP" dirty="0"/>
+          </a:p>
+        </p:txBody>
+      </p:sp>
+      <p:sp>
+        <p:nvSpPr>
+          <p:cNvPr id="11" name="楕円 10">
+            <a:extLst>
+              <a:ext uri="{FF2B5EF4-FFF2-40B4-BE49-F238E27FC236}">
+                <a16:creationId xmlns:a16="http://schemas.microsoft.com/office/drawing/2014/main" id="{FFD32285-C32B-4AD4-9E08-C7B67F181077}"/>
+              </a:ext>
+            </a:extLst>
+          </p:cNvPr>
+          <p:cNvSpPr/>
+          <p:nvPr/>
+        </p:nvSpPr>
+        <p:spPr>
+          <a:xfrm>
+            <a:off x="1185445" y="486278"/>
+            <a:ext cx="876300" cy="876300"/>
+          </a:xfrm>
+          <a:prstGeom prst="ellipse">
+            <a:avLst/>
+          </a:prstGeom>
+          <a:noFill/>
+          <a:ln>
+            <a:solidFill>
+              <a:schemeClr val="bg1"/>
+            </a:solidFill>
+          </a:ln>
+        </p:spPr>
+        <p:style>
+          <a:lnRef idx="2">
+            <a:schemeClr val="dk1"/>
+          </a:lnRef>
+          <a:fillRef idx="1">
+            <a:schemeClr val="lt1"/>
+          </a:fillRef>
+          <a:effectRef idx="0">
+            <a:schemeClr val="dk1"/>
+          </a:effectRef>
+          <a:fontRef idx="minor">
+            <a:schemeClr val="dk1"/>
+          </a:fontRef>
+        </p:style>
+        <p:txBody>
+          <a:bodyPr rtlCol="0" anchor="ctr"/>
+          <a:lstStyle/>
+          <a:p>
+            <a:pPr algn="ctr"/>
+            <a:endParaRPr kumimoji="1" lang="ja-JP" altLang="en-US"/>
+          </a:p>
+        </p:txBody>
+      </p:sp>
     </p:spTree>
     <p:extLst>
       <p:ext uri="{BB962C8B-B14F-4D97-AF65-F5344CB8AC3E}">
@@ -20892,6 +25737,102 @@
   <p:clrMapOvr>
     <a:masterClrMapping/>
   </p:clrMapOvr>
+  <p:timing>
+    <p:tnLst>
+      <p:par>
+        <p:cTn id="1" dur="indefinite" restart="never" nodeType="tmRoot">
+          <p:childTnLst>
+            <p:seq concurrent="1" nextAc="seek">
+              <p:cTn id="2" dur="indefinite" nodeType="mainSeq">
+                <p:childTnLst>
+                  <p:par>
+                    <p:cTn id="3" fill="hold">
+                      <p:stCondLst>
+                        <p:cond delay="indefinite"/>
+                        <p:cond evt="onBegin" delay="0">
+                          <p:tn val="2"/>
+                        </p:cond>
+                      </p:stCondLst>
+                      <p:childTnLst>
+                        <p:par>
+                          <p:cTn id="4" fill="hold">
+                            <p:stCondLst>
+                              <p:cond delay="0"/>
+                            </p:stCondLst>
+                            <p:childTnLst>
+                              <p:par>
+                                <p:cTn id="5" presetID="21" presetClass="exit" presetSubtype="1" repeatCount="indefinite" fill="hold" grpId="0" nodeType="afterEffect">
+                                  <p:stCondLst>
+                                    <p:cond delay="3000"/>
+                                  </p:stCondLst>
+                                  <p:endCondLst>
+                                    <p:cond evt="onNext" delay="0">
+                                      <p:tgtEl>
+                                        <p:sldTgt/>
+                                      </p:tgtEl>
+                                    </p:cond>
+                                  </p:endCondLst>
+                                  <p:childTnLst>
+                                    <p:animEffect transition="out" filter="wheel(1)">
+                                      <p:cBhvr>
+                                        <p:cTn id="6" dur="15000"/>
+                                        <p:tgtEl>
+                                          <p:spTgt spid="10"/>
+                                        </p:tgtEl>
+                                      </p:cBhvr>
+                                    </p:animEffect>
+                                    <p:set>
+                                      <p:cBhvr>
+                                        <p:cTn id="7" dur="1" fill="hold">
+                                          <p:stCondLst>
+                                            <p:cond delay="14999"/>
+                                          </p:stCondLst>
+                                        </p:cTn>
+                                        <p:tgtEl>
+                                          <p:spTgt spid="10"/>
+                                        </p:tgtEl>
+                                        <p:attrNameLst>
+                                          <p:attrName>style.visibility</p:attrName>
+                                        </p:attrNameLst>
+                                      </p:cBhvr>
+                                      <p:to>
+                                        <p:strVal val="hidden"/>
+                                      </p:to>
+                                    </p:set>
+                                  </p:childTnLst>
+                                </p:cTn>
+                              </p:par>
+                            </p:childTnLst>
+                          </p:cTn>
+                        </p:par>
+                      </p:childTnLst>
+                    </p:cTn>
+                  </p:par>
+                </p:childTnLst>
+              </p:cTn>
+              <p:prevCondLst>
+                <p:cond evt="onPrev" delay="0">
+                  <p:tgtEl>
+                    <p:sldTgt/>
+                  </p:tgtEl>
+                </p:cond>
+              </p:prevCondLst>
+              <p:nextCondLst>
+                <p:cond evt="onNext" delay="0">
+                  <p:tgtEl>
+                    <p:sldTgt/>
+                  </p:tgtEl>
+                </p:cond>
+              </p:nextCondLst>
+            </p:seq>
+          </p:childTnLst>
+        </p:cTn>
+      </p:par>
+    </p:tnLst>
+    <p:bldLst>
+      <p:bldP spid="10" grpId="0" animBg="1"/>
+    </p:bldLst>
+  </p:timing>
 </p:sld>
 </file>
 
@@ -21359,6 +26300,160 @@
           </a:p>
         </p:txBody>
       </p:sp>
+      <p:sp>
+        <p:nvSpPr>
+          <p:cNvPr id="8" name="楕円 7">
+            <a:extLst>
+              <a:ext uri="{FF2B5EF4-FFF2-40B4-BE49-F238E27FC236}">
+                <a16:creationId xmlns:a16="http://schemas.microsoft.com/office/drawing/2014/main" id="{B9B29AB9-6A51-49EE-A6EB-89F566FD4A6D}"/>
+              </a:ext>
+            </a:extLst>
+          </p:cNvPr>
+          <p:cNvSpPr/>
+          <p:nvPr/>
+        </p:nvSpPr>
+        <p:spPr>
+          <a:xfrm>
+            <a:off x="1185445" y="486278"/>
+            <a:ext cx="876300" cy="876300"/>
+          </a:xfrm>
+          <a:prstGeom prst="ellipse">
+            <a:avLst/>
+          </a:prstGeom>
+          <a:solidFill>
+            <a:srgbClr val="FF0000"/>
+          </a:solidFill>
+          <a:ln>
+            <a:solidFill>
+              <a:schemeClr val="bg1"/>
+            </a:solidFill>
+          </a:ln>
+        </p:spPr>
+        <p:style>
+          <a:lnRef idx="2">
+            <a:schemeClr val="dk1"/>
+          </a:lnRef>
+          <a:fillRef idx="1">
+            <a:schemeClr val="lt1"/>
+          </a:fillRef>
+          <a:effectRef idx="0">
+            <a:schemeClr val="dk1"/>
+          </a:effectRef>
+          <a:fontRef idx="minor">
+            <a:schemeClr val="dk1"/>
+          </a:fontRef>
+        </p:style>
+        <p:txBody>
+          <a:bodyPr rtlCol="0" anchor="ctr"/>
+          <a:lstStyle/>
+          <a:p>
+            <a:pPr algn="ctr"/>
+            <a:endParaRPr kumimoji="1" lang="ja-JP" altLang="en-US"/>
+          </a:p>
+        </p:txBody>
+      </p:sp>
+      <p:sp>
+        <p:nvSpPr>
+          <p:cNvPr id="9" name="楕円 8">
+            <a:extLst>
+              <a:ext uri="{FF2B5EF4-FFF2-40B4-BE49-F238E27FC236}">
+                <a16:creationId xmlns:a16="http://schemas.microsoft.com/office/drawing/2014/main" id="{962B4AA7-11B6-45FD-8CF4-DD7A0EAD4068}"/>
+              </a:ext>
+            </a:extLst>
+          </p:cNvPr>
+          <p:cNvSpPr/>
+          <p:nvPr/>
+        </p:nvSpPr>
+        <p:spPr>
+          <a:xfrm>
+            <a:off x="1185445" y="486278"/>
+            <a:ext cx="876300" cy="876300"/>
+          </a:xfrm>
+          <a:prstGeom prst="ellipse">
+            <a:avLst/>
+          </a:prstGeom>
+          <a:solidFill>
+            <a:srgbClr val="00B050"/>
+          </a:solidFill>
+          <a:ln>
+            <a:solidFill>
+              <a:schemeClr val="bg1"/>
+            </a:solidFill>
+          </a:ln>
+        </p:spPr>
+        <p:style>
+          <a:lnRef idx="2">
+            <a:schemeClr val="dk1"/>
+          </a:lnRef>
+          <a:fillRef idx="1">
+            <a:schemeClr val="lt1"/>
+          </a:fillRef>
+          <a:effectRef idx="0">
+            <a:schemeClr val="dk1"/>
+          </a:effectRef>
+          <a:fontRef idx="minor">
+            <a:schemeClr val="dk1"/>
+          </a:fontRef>
+        </p:style>
+        <p:txBody>
+          <a:bodyPr rtlCol="0" anchor="ctr"/>
+          <a:lstStyle/>
+          <a:p>
+            <a:pPr algn="ctr"/>
+            <a:endParaRPr kumimoji="1" lang="en-US" altLang="ja-JP" dirty="0"/>
+          </a:p>
+        </p:txBody>
+      </p:sp>
+      <p:sp>
+        <p:nvSpPr>
+          <p:cNvPr id="10" name="楕円 9">
+            <a:extLst>
+              <a:ext uri="{FF2B5EF4-FFF2-40B4-BE49-F238E27FC236}">
+                <a16:creationId xmlns:a16="http://schemas.microsoft.com/office/drawing/2014/main" id="{9C14CB41-E63A-437C-875B-6F96F9E56944}"/>
+              </a:ext>
+            </a:extLst>
+          </p:cNvPr>
+          <p:cNvSpPr/>
+          <p:nvPr/>
+        </p:nvSpPr>
+        <p:spPr>
+          <a:xfrm>
+            <a:off x="1185445" y="486278"/>
+            <a:ext cx="876300" cy="876300"/>
+          </a:xfrm>
+          <a:prstGeom prst="ellipse">
+            <a:avLst/>
+          </a:prstGeom>
+          <a:noFill/>
+          <a:ln>
+            <a:solidFill>
+              <a:schemeClr val="bg1"/>
+            </a:solidFill>
+          </a:ln>
+        </p:spPr>
+        <p:style>
+          <a:lnRef idx="2">
+            <a:schemeClr val="dk1"/>
+          </a:lnRef>
+          <a:fillRef idx="1">
+            <a:schemeClr val="lt1"/>
+          </a:fillRef>
+          <a:effectRef idx="0">
+            <a:schemeClr val="dk1"/>
+          </a:effectRef>
+          <a:fontRef idx="minor">
+            <a:schemeClr val="dk1"/>
+          </a:fontRef>
+        </p:style>
+        <p:txBody>
+          <a:bodyPr rtlCol="0" anchor="ctr"/>
+          <a:lstStyle/>
+          <a:p>
+            <a:pPr algn="ctr"/>
+            <a:endParaRPr kumimoji="1" lang="ja-JP" altLang="en-US"/>
+          </a:p>
+        </p:txBody>
+      </p:sp>
     </p:spTree>
     <p:extLst>
       <p:ext uri="{BB962C8B-B14F-4D97-AF65-F5344CB8AC3E}">
@@ -21369,6 +26464,102 @@
   <p:clrMapOvr>
     <a:masterClrMapping/>
   </p:clrMapOvr>
+  <p:timing>
+    <p:tnLst>
+      <p:par>
+        <p:cTn id="1" dur="indefinite" restart="never" nodeType="tmRoot">
+          <p:childTnLst>
+            <p:seq concurrent="1" nextAc="seek">
+              <p:cTn id="2" dur="indefinite" nodeType="mainSeq">
+                <p:childTnLst>
+                  <p:par>
+                    <p:cTn id="3" fill="hold">
+                      <p:stCondLst>
+                        <p:cond delay="indefinite"/>
+                        <p:cond evt="onBegin" delay="0">
+                          <p:tn val="2"/>
+                        </p:cond>
+                      </p:stCondLst>
+                      <p:childTnLst>
+                        <p:par>
+                          <p:cTn id="4" fill="hold">
+                            <p:stCondLst>
+                              <p:cond delay="0"/>
+                            </p:stCondLst>
+                            <p:childTnLst>
+                              <p:par>
+                                <p:cTn id="5" presetID="21" presetClass="exit" presetSubtype="1" repeatCount="indefinite" fill="hold" grpId="0" nodeType="afterEffect">
+                                  <p:stCondLst>
+                                    <p:cond delay="3000"/>
+                                  </p:stCondLst>
+                                  <p:endCondLst>
+                                    <p:cond evt="onNext" delay="0">
+                                      <p:tgtEl>
+                                        <p:sldTgt/>
+                                      </p:tgtEl>
+                                    </p:cond>
+                                  </p:endCondLst>
+                                  <p:childTnLst>
+                                    <p:animEffect transition="out" filter="wheel(1)">
+                                      <p:cBhvr>
+                                        <p:cTn id="6" dur="15000"/>
+                                        <p:tgtEl>
+                                          <p:spTgt spid="9"/>
+                                        </p:tgtEl>
+                                      </p:cBhvr>
+                                    </p:animEffect>
+                                    <p:set>
+                                      <p:cBhvr>
+                                        <p:cTn id="7" dur="1" fill="hold">
+                                          <p:stCondLst>
+                                            <p:cond delay="14999"/>
+                                          </p:stCondLst>
+                                        </p:cTn>
+                                        <p:tgtEl>
+                                          <p:spTgt spid="9"/>
+                                        </p:tgtEl>
+                                        <p:attrNameLst>
+                                          <p:attrName>style.visibility</p:attrName>
+                                        </p:attrNameLst>
+                                      </p:cBhvr>
+                                      <p:to>
+                                        <p:strVal val="hidden"/>
+                                      </p:to>
+                                    </p:set>
+                                  </p:childTnLst>
+                                </p:cTn>
+                              </p:par>
+                            </p:childTnLst>
+                          </p:cTn>
+                        </p:par>
+                      </p:childTnLst>
+                    </p:cTn>
+                  </p:par>
+                </p:childTnLst>
+              </p:cTn>
+              <p:prevCondLst>
+                <p:cond evt="onPrev" delay="0">
+                  <p:tgtEl>
+                    <p:sldTgt/>
+                  </p:tgtEl>
+                </p:cond>
+              </p:prevCondLst>
+              <p:nextCondLst>
+                <p:cond evt="onNext" delay="0">
+                  <p:tgtEl>
+                    <p:sldTgt/>
+                  </p:tgtEl>
+                </p:cond>
+              </p:nextCondLst>
+            </p:seq>
+          </p:childTnLst>
+        </p:cTn>
+      </p:par>
+    </p:tnLst>
+    <p:bldLst>
+      <p:bldP spid="9" grpId="0" animBg="1"/>
+    </p:bldLst>
+  </p:timing>
 </p:sld>
 </file>
 
@@ -21628,6 +26819,160 @@
           </a:p>
         </p:txBody>
       </p:sp>
+      <p:sp>
+        <p:nvSpPr>
+          <p:cNvPr id="8" name="楕円 7">
+            <a:extLst>
+              <a:ext uri="{FF2B5EF4-FFF2-40B4-BE49-F238E27FC236}">
+                <a16:creationId xmlns:a16="http://schemas.microsoft.com/office/drawing/2014/main" id="{FD5D8CFD-EB5A-47F6-AC47-7F8027802D6D}"/>
+              </a:ext>
+            </a:extLst>
+          </p:cNvPr>
+          <p:cNvSpPr/>
+          <p:nvPr/>
+        </p:nvSpPr>
+        <p:spPr>
+          <a:xfrm>
+            <a:off x="1185445" y="486278"/>
+            <a:ext cx="876300" cy="876300"/>
+          </a:xfrm>
+          <a:prstGeom prst="ellipse">
+            <a:avLst/>
+          </a:prstGeom>
+          <a:solidFill>
+            <a:srgbClr val="FF0000"/>
+          </a:solidFill>
+          <a:ln>
+            <a:solidFill>
+              <a:schemeClr val="bg1"/>
+            </a:solidFill>
+          </a:ln>
+        </p:spPr>
+        <p:style>
+          <a:lnRef idx="2">
+            <a:schemeClr val="dk1"/>
+          </a:lnRef>
+          <a:fillRef idx="1">
+            <a:schemeClr val="lt1"/>
+          </a:fillRef>
+          <a:effectRef idx="0">
+            <a:schemeClr val="dk1"/>
+          </a:effectRef>
+          <a:fontRef idx="minor">
+            <a:schemeClr val="dk1"/>
+          </a:fontRef>
+        </p:style>
+        <p:txBody>
+          <a:bodyPr rtlCol="0" anchor="ctr"/>
+          <a:lstStyle/>
+          <a:p>
+            <a:pPr algn="ctr"/>
+            <a:endParaRPr kumimoji="1" lang="ja-JP" altLang="en-US"/>
+          </a:p>
+        </p:txBody>
+      </p:sp>
+      <p:sp>
+        <p:nvSpPr>
+          <p:cNvPr id="9" name="楕円 8">
+            <a:extLst>
+              <a:ext uri="{FF2B5EF4-FFF2-40B4-BE49-F238E27FC236}">
+                <a16:creationId xmlns:a16="http://schemas.microsoft.com/office/drawing/2014/main" id="{1F9C905E-DD23-4BC4-A80D-1C910EAAFB84}"/>
+              </a:ext>
+            </a:extLst>
+          </p:cNvPr>
+          <p:cNvSpPr/>
+          <p:nvPr/>
+        </p:nvSpPr>
+        <p:spPr>
+          <a:xfrm>
+            <a:off x="1185445" y="486278"/>
+            <a:ext cx="876300" cy="876300"/>
+          </a:xfrm>
+          <a:prstGeom prst="ellipse">
+            <a:avLst/>
+          </a:prstGeom>
+          <a:solidFill>
+            <a:srgbClr val="00B050"/>
+          </a:solidFill>
+          <a:ln>
+            <a:solidFill>
+              <a:schemeClr val="bg1"/>
+            </a:solidFill>
+          </a:ln>
+        </p:spPr>
+        <p:style>
+          <a:lnRef idx="2">
+            <a:schemeClr val="dk1"/>
+          </a:lnRef>
+          <a:fillRef idx="1">
+            <a:schemeClr val="lt1"/>
+          </a:fillRef>
+          <a:effectRef idx="0">
+            <a:schemeClr val="dk1"/>
+          </a:effectRef>
+          <a:fontRef idx="minor">
+            <a:schemeClr val="dk1"/>
+          </a:fontRef>
+        </p:style>
+        <p:txBody>
+          <a:bodyPr rtlCol="0" anchor="ctr"/>
+          <a:lstStyle/>
+          <a:p>
+            <a:pPr algn="ctr"/>
+            <a:endParaRPr kumimoji="1" lang="en-US" altLang="ja-JP" dirty="0"/>
+          </a:p>
+        </p:txBody>
+      </p:sp>
+      <p:sp>
+        <p:nvSpPr>
+          <p:cNvPr id="10" name="楕円 9">
+            <a:extLst>
+              <a:ext uri="{FF2B5EF4-FFF2-40B4-BE49-F238E27FC236}">
+                <a16:creationId xmlns:a16="http://schemas.microsoft.com/office/drawing/2014/main" id="{64AF7709-AE49-49F5-8911-8BAD3BD86A27}"/>
+              </a:ext>
+            </a:extLst>
+          </p:cNvPr>
+          <p:cNvSpPr/>
+          <p:nvPr/>
+        </p:nvSpPr>
+        <p:spPr>
+          <a:xfrm>
+            <a:off x="1185445" y="486278"/>
+            <a:ext cx="876300" cy="876300"/>
+          </a:xfrm>
+          <a:prstGeom prst="ellipse">
+            <a:avLst/>
+          </a:prstGeom>
+          <a:noFill/>
+          <a:ln>
+            <a:solidFill>
+              <a:schemeClr val="bg1"/>
+            </a:solidFill>
+          </a:ln>
+        </p:spPr>
+        <p:style>
+          <a:lnRef idx="2">
+            <a:schemeClr val="dk1"/>
+          </a:lnRef>
+          <a:fillRef idx="1">
+            <a:schemeClr val="lt1"/>
+          </a:fillRef>
+          <a:effectRef idx="0">
+            <a:schemeClr val="dk1"/>
+          </a:effectRef>
+          <a:fontRef idx="minor">
+            <a:schemeClr val="dk1"/>
+          </a:fontRef>
+        </p:style>
+        <p:txBody>
+          <a:bodyPr rtlCol="0" anchor="ctr"/>
+          <a:lstStyle/>
+          <a:p>
+            <a:pPr algn="ctr"/>
+            <a:endParaRPr kumimoji="1" lang="ja-JP" altLang="en-US"/>
+          </a:p>
+        </p:txBody>
+      </p:sp>
     </p:spTree>
     <p:extLst>
       <p:ext uri="{BB962C8B-B14F-4D97-AF65-F5344CB8AC3E}">
@@ -21638,6 +26983,102 @@
   <p:clrMapOvr>
     <a:masterClrMapping/>
   </p:clrMapOvr>
+  <p:timing>
+    <p:tnLst>
+      <p:par>
+        <p:cTn id="1" dur="indefinite" restart="never" nodeType="tmRoot">
+          <p:childTnLst>
+            <p:seq concurrent="1" nextAc="seek">
+              <p:cTn id="2" dur="indefinite" nodeType="mainSeq">
+                <p:childTnLst>
+                  <p:par>
+                    <p:cTn id="3" fill="hold">
+                      <p:stCondLst>
+                        <p:cond delay="indefinite"/>
+                        <p:cond evt="onBegin" delay="0">
+                          <p:tn val="2"/>
+                        </p:cond>
+                      </p:stCondLst>
+                      <p:childTnLst>
+                        <p:par>
+                          <p:cTn id="4" fill="hold">
+                            <p:stCondLst>
+                              <p:cond delay="0"/>
+                            </p:stCondLst>
+                            <p:childTnLst>
+                              <p:par>
+                                <p:cTn id="5" presetID="21" presetClass="exit" presetSubtype="1" repeatCount="indefinite" fill="hold" grpId="0" nodeType="afterEffect">
+                                  <p:stCondLst>
+                                    <p:cond delay="3000"/>
+                                  </p:stCondLst>
+                                  <p:endCondLst>
+                                    <p:cond evt="onNext" delay="0">
+                                      <p:tgtEl>
+                                        <p:sldTgt/>
+                                      </p:tgtEl>
+                                    </p:cond>
+                                  </p:endCondLst>
+                                  <p:childTnLst>
+                                    <p:animEffect transition="out" filter="wheel(1)">
+                                      <p:cBhvr>
+                                        <p:cTn id="6" dur="15000"/>
+                                        <p:tgtEl>
+                                          <p:spTgt spid="9"/>
+                                        </p:tgtEl>
+                                      </p:cBhvr>
+                                    </p:animEffect>
+                                    <p:set>
+                                      <p:cBhvr>
+                                        <p:cTn id="7" dur="1" fill="hold">
+                                          <p:stCondLst>
+                                            <p:cond delay="14999"/>
+                                          </p:stCondLst>
+                                        </p:cTn>
+                                        <p:tgtEl>
+                                          <p:spTgt spid="9"/>
+                                        </p:tgtEl>
+                                        <p:attrNameLst>
+                                          <p:attrName>style.visibility</p:attrName>
+                                        </p:attrNameLst>
+                                      </p:cBhvr>
+                                      <p:to>
+                                        <p:strVal val="hidden"/>
+                                      </p:to>
+                                    </p:set>
+                                  </p:childTnLst>
+                                </p:cTn>
+                              </p:par>
+                            </p:childTnLst>
+                          </p:cTn>
+                        </p:par>
+                      </p:childTnLst>
+                    </p:cTn>
+                  </p:par>
+                </p:childTnLst>
+              </p:cTn>
+              <p:prevCondLst>
+                <p:cond evt="onPrev" delay="0">
+                  <p:tgtEl>
+                    <p:sldTgt/>
+                  </p:tgtEl>
+                </p:cond>
+              </p:prevCondLst>
+              <p:nextCondLst>
+                <p:cond evt="onNext" delay="0">
+                  <p:tgtEl>
+                    <p:sldTgt/>
+                  </p:tgtEl>
+                </p:cond>
+              </p:nextCondLst>
+            </p:seq>
+          </p:childTnLst>
+        </p:cTn>
+      </p:par>
+    </p:tnLst>
+    <p:bldLst>
+      <p:bldP spid="9" grpId="0" animBg="1"/>
+    </p:bldLst>
+  </p:timing>
 </p:sld>
 </file>
 
@@ -22099,6 +27540,160 @@
           </a:p>
         </p:txBody>
       </p:sp>
+      <p:sp>
+        <p:nvSpPr>
+          <p:cNvPr id="7" name="楕円 6">
+            <a:extLst>
+              <a:ext uri="{FF2B5EF4-FFF2-40B4-BE49-F238E27FC236}">
+                <a16:creationId xmlns:a16="http://schemas.microsoft.com/office/drawing/2014/main" id="{4F2977D3-A981-4F70-94A0-3ED5ACE5A27D}"/>
+              </a:ext>
+            </a:extLst>
+          </p:cNvPr>
+          <p:cNvSpPr/>
+          <p:nvPr/>
+        </p:nvSpPr>
+        <p:spPr>
+          <a:xfrm>
+            <a:off x="1185445" y="486278"/>
+            <a:ext cx="876300" cy="876300"/>
+          </a:xfrm>
+          <a:prstGeom prst="ellipse">
+            <a:avLst/>
+          </a:prstGeom>
+          <a:solidFill>
+            <a:srgbClr val="FF0000"/>
+          </a:solidFill>
+          <a:ln>
+            <a:solidFill>
+              <a:schemeClr val="bg1"/>
+            </a:solidFill>
+          </a:ln>
+        </p:spPr>
+        <p:style>
+          <a:lnRef idx="2">
+            <a:schemeClr val="dk1"/>
+          </a:lnRef>
+          <a:fillRef idx="1">
+            <a:schemeClr val="lt1"/>
+          </a:fillRef>
+          <a:effectRef idx="0">
+            <a:schemeClr val="dk1"/>
+          </a:effectRef>
+          <a:fontRef idx="minor">
+            <a:schemeClr val="dk1"/>
+          </a:fontRef>
+        </p:style>
+        <p:txBody>
+          <a:bodyPr rtlCol="0" anchor="ctr"/>
+          <a:lstStyle/>
+          <a:p>
+            <a:pPr algn="ctr"/>
+            <a:endParaRPr kumimoji="1" lang="ja-JP" altLang="en-US"/>
+          </a:p>
+        </p:txBody>
+      </p:sp>
+      <p:sp>
+        <p:nvSpPr>
+          <p:cNvPr id="8" name="楕円 7">
+            <a:extLst>
+              <a:ext uri="{FF2B5EF4-FFF2-40B4-BE49-F238E27FC236}">
+                <a16:creationId xmlns:a16="http://schemas.microsoft.com/office/drawing/2014/main" id="{EFAE1A58-C0ED-44E1-A160-DD77498DD285}"/>
+              </a:ext>
+            </a:extLst>
+          </p:cNvPr>
+          <p:cNvSpPr/>
+          <p:nvPr/>
+        </p:nvSpPr>
+        <p:spPr>
+          <a:xfrm>
+            <a:off x="1185445" y="486278"/>
+            <a:ext cx="876300" cy="876300"/>
+          </a:xfrm>
+          <a:prstGeom prst="ellipse">
+            <a:avLst/>
+          </a:prstGeom>
+          <a:solidFill>
+            <a:srgbClr val="00B050"/>
+          </a:solidFill>
+          <a:ln>
+            <a:solidFill>
+              <a:schemeClr val="bg1"/>
+            </a:solidFill>
+          </a:ln>
+        </p:spPr>
+        <p:style>
+          <a:lnRef idx="2">
+            <a:schemeClr val="dk1"/>
+          </a:lnRef>
+          <a:fillRef idx="1">
+            <a:schemeClr val="lt1"/>
+          </a:fillRef>
+          <a:effectRef idx="0">
+            <a:schemeClr val="dk1"/>
+          </a:effectRef>
+          <a:fontRef idx="minor">
+            <a:schemeClr val="dk1"/>
+          </a:fontRef>
+        </p:style>
+        <p:txBody>
+          <a:bodyPr rtlCol="0" anchor="ctr"/>
+          <a:lstStyle/>
+          <a:p>
+            <a:pPr algn="ctr"/>
+            <a:endParaRPr kumimoji="1" lang="en-US" altLang="ja-JP" dirty="0"/>
+          </a:p>
+        </p:txBody>
+      </p:sp>
+      <p:sp>
+        <p:nvSpPr>
+          <p:cNvPr id="10" name="楕円 9">
+            <a:extLst>
+              <a:ext uri="{FF2B5EF4-FFF2-40B4-BE49-F238E27FC236}">
+                <a16:creationId xmlns:a16="http://schemas.microsoft.com/office/drawing/2014/main" id="{0F20868B-3154-4357-B44E-58E401B9842D}"/>
+              </a:ext>
+            </a:extLst>
+          </p:cNvPr>
+          <p:cNvSpPr/>
+          <p:nvPr/>
+        </p:nvSpPr>
+        <p:spPr>
+          <a:xfrm>
+            <a:off x="1185445" y="486278"/>
+            <a:ext cx="876300" cy="876300"/>
+          </a:xfrm>
+          <a:prstGeom prst="ellipse">
+            <a:avLst/>
+          </a:prstGeom>
+          <a:noFill/>
+          <a:ln>
+            <a:solidFill>
+              <a:schemeClr val="bg1"/>
+            </a:solidFill>
+          </a:ln>
+        </p:spPr>
+        <p:style>
+          <a:lnRef idx="2">
+            <a:schemeClr val="dk1"/>
+          </a:lnRef>
+          <a:fillRef idx="1">
+            <a:schemeClr val="lt1"/>
+          </a:fillRef>
+          <a:effectRef idx="0">
+            <a:schemeClr val="dk1"/>
+          </a:effectRef>
+          <a:fontRef idx="minor">
+            <a:schemeClr val="dk1"/>
+          </a:fontRef>
+        </p:style>
+        <p:txBody>
+          <a:bodyPr rtlCol="0" anchor="ctr"/>
+          <a:lstStyle/>
+          <a:p>
+            <a:pPr algn="ctr"/>
+            <a:endParaRPr kumimoji="1" lang="ja-JP" altLang="en-US"/>
+          </a:p>
+        </p:txBody>
+      </p:sp>
     </p:spTree>
     <p:extLst>
       <p:ext uri="{BB962C8B-B14F-4D97-AF65-F5344CB8AC3E}">
@@ -22109,6 +27704,102 @@
   <p:clrMapOvr>
     <a:masterClrMapping/>
   </p:clrMapOvr>
+  <p:timing>
+    <p:tnLst>
+      <p:par>
+        <p:cTn id="1" dur="indefinite" restart="never" nodeType="tmRoot">
+          <p:childTnLst>
+            <p:seq concurrent="1" nextAc="seek">
+              <p:cTn id="2" dur="indefinite" nodeType="mainSeq">
+                <p:childTnLst>
+                  <p:par>
+                    <p:cTn id="3" fill="hold">
+                      <p:stCondLst>
+                        <p:cond delay="indefinite"/>
+                        <p:cond evt="onBegin" delay="0">
+                          <p:tn val="2"/>
+                        </p:cond>
+                      </p:stCondLst>
+                      <p:childTnLst>
+                        <p:par>
+                          <p:cTn id="4" fill="hold">
+                            <p:stCondLst>
+                              <p:cond delay="0"/>
+                            </p:stCondLst>
+                            <p:childTnLst>
+                              <p:par>
+                                <p:cTn id="5" presetID="21" presetClass="exit" presetSubtype="1" repeatCount="indefinite" fill="hold" grpId="0" nodeType="afterEffect">
+                                  <p:stCondLst>
+                                    <p:cond delay="3000"/>
+                                  </p:stCondLst>
+                                  <p:endCondLst>
+                                    <p:cond evt="onNext" delay="0">
+                                      <p:tgtEl>
+                                        <p:sldTgt/>
+                                      </p:tgtEl>
+                                    </p:cond>
+                                  </p:endCondLst>
+                                  <p:childTnLst>
+                                    <p:animEffect transition="out" filter="wheel(1)">
+                                      <p:cBhvr>
+                                        <p:cTn id="6" dur="15000"/>
+                                        <p:tgtEl>
+                                          <p:spTgt spid="8"/>
+                                        </p:tgtEl>
+                                      </p:cBhvr>
+                                    </p:animEffect>
+                                    <p:set>
+                                      <p:cBhvr>
+                                        <p:cTn id="7" dur="1" fill="hold">
+                                          <p:stCondLst>
+                                            <p:cond delay="14999"/>
+                                          </p:stCondLst>
+                                        </p:cTn>
+                                        <p:tgtEl>
+                                          <p:spTgt spid="8"/>
+                                        </p:tgtEl>
+                                        <p:attrNameLst>
+                                          <p:attrName>style.visibility</p:attrName>
+                                        </p:attrNameLst>
+                                      </p:cBhvr>
+                                      <p:to>
+                                        <p:strVal val="hidden"/>
+                                      </p:to>
+                                    </p:set>
+                                  </p:childTnLst>
+                                </p:cTn>
+                              </p:par>
+                            </p:childTnLst>
+                          </p:cTn>
+                        </p:par>
+                      </p:childTnLst>
+                    </p:cTn>
+                  </p:par>
+                </p:childTnLst>
+              </p:cTn>
+              <p:prevCondLst>
+                <p:cond evt="onPrev" delay="0">
+                  <p:tgtEl>
+                    <p:sldTgt/>
+                  </p:tgtEl>
+                </p:cond>
+              </p:prevCondLst>
+              <p:nextCondLst>
+                <p:cond evt="onNext" delay="0">
+                  <p:tgtEl>
+                    <p:sldTgt/>
+                  </p:tgtEl>
+                </p:cond>
+              </p:nextCondLst>
+            </p:seq>
+          </p:childTnLst>
+        </p:cTn>
+      </p:par>
+    </p:tnLst>
+    <p:bldLst>
+      <p:bldP spid="8" grpId="0" animBg="1"/>
+    </p:bldLst>
+  </p:timing>
 </p:sld>
 </file>
 
@@ -22599,6 +28290,160 @@
           </a:extLst>
         </p:spPr>
       </p:pic>
+      <p:sp>
+        <p:nvSpPr>
+          <p:cNvPr id="8" name="楕円 7">
+            <a:extLst>
+              <a:ext uri="{FF2B5EF4-FFF2-40B4-BE49-F238E27FC236}">
+                <a16:creationId xmlns:a16="http://schemas.microsoft.com/office/drawing/2014/main" id="{A924B739-E88B-4C4A-A900-2867268E02A3}"/>
+              </a:ext>
+            </a:extLst>
+          </p:cNvPr>
+          <p:cNvSpPr/>
+          <p:nvPr/>
+        </p:nvSpPr>
+        <p:spPr>
+          <a:xfrm>
+            <a:off x="1185445" y="486278"/>
+            <a:ext cx="876300" cy="876300"/>
+          </a:xfrm>
+          <a:prstGeom prst="ellipse">
+            <a:avLst/>
+          </a:prstGeom>
+          <a:solidFill>
+            <a:srgbClr val="FF0000"/>
+          </a:solidFill>
+          <a:ln>
+            <a:solidFill>
+              <a:schemeClr val="bg1"/>
+            </a:solidFill>
+          </a:ln>
+        </p:spPr>
+        <p:style>
+          <a:lnRef idx="2">
+            <a:schemeClr val="dk1"/>
+          </a:lnRef>
+          <a:fillRef idx="1">
+            <a:schemeClr val="lt1"/>
+          </a:fillRef>
+          <a:effectRef idx="0">
+            <a:schemeClr val="dk1"/>
+          </a:effectRef>
+          <a:fontRef idx="minor">
+            <a:schemeClr val="dk1"/>
+          </a:fontRef>
+        </p:style>
+        <p:txBody>
+          <a:bodyPr rtlCol="0" anchor="ctr"/>
+          <a:lstStyle/>
+          <a:p>
+            <a:pPr algn="ctr"/>
+            <a:endParaRPr kumimoji="1" lang="ja-JP" altLang="en-US"/>
+          </a:p>
+        </p:txBody>
+      </p:sp>
+      <p:sp>
+        <p:nvSpPr>
+          <p:cNvPr id="9" name="楕円 8">
+            <a:extLst>
+              <a:ext uri="{FF2B5EF4-FFF2-40B4-BE49-F238E27FC236}">
+                <a16:creationId xmlns:a16="http://schemas.microsoft.com/office/drawing/2014/main" id="{B472769E-5F5C-4DFE-9CE9-84A15CBF1C0E}"/>
+              </a:ext>
+            </a:extLst>
+          </p:cNvPr>
+          <p:cNvSpPr/>
+          <p:nvPr/>
+        </p:nvSpPr>
+        <p:spPr>
+          <a:xfrm>
+            <a:off x="1185445" y="486278"/>
+            <a:ext cx="876300" cy="876300"/>
+          </a:xfrm>
+          <a:prstGeom prst="ellipse">
+            <a:avLst/>
+          </a:prstGeom>
+          <a:solidFill>
+            <a:srgbClr val="00B050"/>
+          </a:solidFill>
+          <a:ln>
+            <a:solidFill>
+              <a:schemeClr val="bg1"/>
+            </a:solidFill>
+          </a:ln>
+        </p:spPr>
+        <p:style>
+          <a:lnRef idx="2">
+            <a:schemeClr val="dk1"/>
+          </a:lnRef>
+          <a:fillRef idx="1">
+            <a:schemeClr val="lt1"/>
+          </a:fillRef>
+          <a:effectRef idx="0">
+            <a:schemeClr val="dk1"/>
+          </a:effectRef>
+          <a:fontRef idx="minor">
+            <a:schemeClr val="dk1"/>
+          </a:fontRef>
+        </p:style>
+        <p:txBody>
+          <a:bodyPr rtlCol="0" anchor="ctr"/>
+          <a:lstStyle/>
+          <a:p>
+            <a:pPr algn="ctr"/>
+            <a:endParaRPr kumimoji="1" lang="en-US" altLang="ja-JP" dirty="0"/>
+          </a:p>
+        </p:txBody>
+      </p:sp>
+      <p:sp>
+        <p:nvSpPr>
+          <p:cNvPr id="10" name="楕円 9">
+            <a:extLst>
+              <a:ext uri="{FF2B5EF4-FFF2-40B4-BE49-F238E27FC236}">
+                <a16:creationId xmlns:a16="http://schemas.microsoft.com/office/drawing/2014/main" id="{E21E1C1D-7EAC-4BD3-871B-E20CAB517032}"/>
+              </a:ext>
+            </a:extLst>
+          </p:cNvPr>
+          <p:cNvSpPr/>
+          <p:nvPr/>
+        </p:nvSpPr>
+        <p:spPr>
+          <a:xfrm>
+            <a:off x="1185445" y="486278"/>
+            <a:ext cx="876300" cy="876300"/>
+          </a:xfrm>
+          <a:prstGeom prst="ellipse">
+            <a:avLst/>
+          </a:prstGeom>
+          <a:noFill/>
+          <a:ln>
+            <a:solidFill>
+              <a:schemeClr val="bg1"/>
+            </a:solidFill>
+          </a:ln>
+        </p:spPr>
+        <p:style>
+          <a:lnRef idx="2">
+            <a:schemeClr val="dk1"/>
+          </a:lnRef>
+          <a:fillRef idx="1">
+            <a:schemeClr val="lt1"/>
+          </a:fillRef>
+          <a:effectRef idx="0">
+            <a:schemeClr val="dk1"/>
+          </a:effectRef>
+          <a:fontRef idx="minor">
+            <a:schemeClr val="dk1"/>
+          </a:fontRef>
+        </p:style>
+        <p:txBody>
+          <a:bodyPr rtlCol="0" anchor="ctr"/>
+          <a:lstStyle/>
+          <a:p>
+            <a:pPr algn="ctr"/>
+            <a:endParaRPr kumimoji="1" lang="ja-JP" altLang="en-US"/>
+          </a:p>
+        </p:txBody>
+      </p:sp>
     </p:spTree>
     <p:extLst>
       <p:ext uri="{BB962C8B-B14F-4D97-AF65-F5344CB8AC3E}">
@@ -22609,6 +28454,102 @@
   <p:clrMapOvr>
     <a:masterClrMapping/>
   </p:clrMapOvr>
+  <p:timing>
+    <p:tnLst>
+      <p:par>
+        <p:cTn id="1" dur="indefinite" restart="never" nodeType="tmRoot">
+          <p:childTnLst>
+            <p:seq concurrent="1" nextAc="seek">
+              <p:cTn id="2" dur="indefinite" nodeType="mainSeq">
+                <p:childTnLst>
+                  <p:par>
+                    <p:cTn id="3" fill="hold">
+                      <p:stCondLst>
+                        <p:cond delay="indefinite"/>
+                        <p:cond evt="onBegin" delay="0">
+                          <p:tn val="2"/>
+                        </p:cond>
+                      </p:stCondLst>
+                      <p:childTnLst>
+                        <p:par>
+                          <p:cTn id="4" fill="hold">
+                            <p:stCondLst>
+                              <p:cond delay="0"/>
+                            </p:stCondLst>
+                            <p:childTnLst>
+                              <p:par>
+                                <p:cTn id="5" presetID="21" presetClass="exit" presetSubtype="1" repeatCount="indefinite" fill="hold" grpId="0" nodeType="afterEffect">
+                                  <p:stCondLst>
+                                    <p:cond delay="3000"/>
+                                  </p:stCondLst>
+                                  <p:endCondLst>
+                                    <p:cond evt="onNext" delay="0">
+                                      <p:tgtEl>
+                                        <p:sldTgt/>
+                                      </p:tgtEl>
+                                    </p:cond>
+                                  </p:endCondLst>
+                                  <p:childTnLst>
+                                    <p:animEffect transition="out" filter="wheel(1)">
+                                      <p:cBhvr>
+                                        <p:cTn id="6" dur="15000"/>
+                                        <p:tgtEl>
+                                          <p:spTgt spid="9"/>
+                                        </p:tgtEl>
+                                      </p:cBhvr>
+                                    </p:animEffect>
+                                    <p:set>
+                                      <p:cBhvr>
+                                        <p:cTn id="7" dur="1" fill="hold">
+                                          <p:stCondLst>
+                                            <p:cond delay="14999"/>
+                                          </p:stCondLst>
+                                        </p:cTn>
+                                        <p:tgtEl>
+                                          <p:spTgt spid="9"/>
+                                        </p:tgtEl>
+                                        <p:attrNameLst>
+                                          <p:attrName>style.visibility</p:attrName>
+                                        </p:attrNameLst>
+                                      </p:cBhvr>
+                                      <p:to>
+                                        <p:strVal val="hidden"/>
+                                      </p:to>
+                                    </p:set>
+                                  </p:childTnLst>
+                                </p:cTn>
+                              </p:par>
+                            </p:childTnLst>
+                          </p:cTn>
+                        </p:par>
+                      </p:childTnLst>
+                    </p:cTn>
+                  </p:par>
+                </p:childTnLst>
+              </p:cTn>
+              <p:prevCondLst>
+                <p:cond evt="onPrev" delay="0">
+                  <p:tgtEl>
+                    <p:sldTgt/>
+                  </p:tgtEl>
+                </p:cond>
+              </p:prevCondLst>
+              <p:nextCondLst>
+                <p:cond evt="onNext" delay="0">
+                  <p:tgtEl>
+                    <p:sldTgt/>
+                  </p:tgtEl>
+                </p:cond>
+              </p:nextCondLst>
+            </p:seq>
+          </p:childTnLst>
+        </p:cTn>
+      </p:par>
+    </p:tnLst>
+    <p:bldLst>
+      <p:bldP spid="9" grpId="0" animBg="1"/>
+    </p:bldLst>
+  </p:timing>
 </p:sld>
 </file>
 
@@ -23140,6 +29081,160 @@
           </a:extLst>
         </p:spPr>
       </p:pic>
+      <p:sp>
+        <p:nvSpPr>
+          <p:cNvPr id="10" name="楕円 9">
+            <a:extLst>
+              <a:ext uri="{FF2B5EF4-FFF2-40B4-BE49-F238E27FC236}">
+                <a16:creationId xmlns:a16="http://schemas.microsoft.com/office/drawing/2014/main" id="{B201B3E9-26BD-405A-9C70-8723058216F0}"/>
+              </a:ext>
+            </a:extLst>
+          </p:cNvPr>
+          <p:cNvSpPr/>
+          <p:nvPr/>
+        </p:nvSpPr>
+        <p:spPr>
+          <a:xfrm>
+            <a:off x="1185445" y="486278"/>
+            <a:ext cx="876300" cy="876300"/>
+          </a:xfrm>
+          <a:prstGeom prst="ellipse">
+            <a:avLst/>
+          </a:prstGeom>
+          <a:solidFill>
+            <a:srgbClr val="FF0000"/>
+          </a:solidFill>
+          <a:ln>
+            <a:solidFill>
+              <a:schemeClr val="bg1"/>
+            </a:solidFill>
+          </a:ln>
+        </p:spPr>
+        <p:style>
+          <a:lnRef idx="2">
+            <a:schemeClr val="dk1"/>
+          </a:lnRef>
+          <a:fillRef idx="1">
+            <a:schemeClr val="lt1"/>
+          </a:fillRef>
+          <a:effectRef idx="0">
+            <a:schemeClr val="dk1"/>
+          </a:effectRef>
+          <a:fontRef idx="minor">
+            <a:schemeClr val="dk1"/>
+          </a:fontRef>
+        </p:style>
+        <p:txBody>
+          <a:bodyPr rtlCol="0" anchor="ctr"/>
+          <a:lstStyle/>
+          <a:p>
+            <a:pPr algn="ctr"/>
+            <a:endParaRPr kumimoji="1" lang="ja-JP" altLang="en-US"/>
+          </a:p>
+        </p:txBody>
+      </p:sp>
+      <p:sp>
+        <p:nvSpPr>
+          <p:cNvPr id="11" name="楕円 10">
+            <a:extLst>
+              <a:ext uri="{FF2B5EF4-FFF2-40B4-BE49-F238E27FC236}">
+                <a16:creationId xmlns:a16="http://schemas.microsoft.com/office/drawing/2014/main" id="{776BDBBF-9372-4394-A1A1-0757E10CBE49}"/>
+              </a:ext>
+            </a:extLst>
+          </p:cNvPr>
+          <p:cNvSpPr/>
+          <p:nvPr/>
+        </p:nvSpPr>
+        <p:spPr>
+          <a:xfrm>
+            <a:off x="1185445" y="486278"/>
+            <a:ext cx="876300" cy="876300"/>
+          </a:xfrm>
+          <a:prstGeom prst="ellipse">
+            <a:avLst/>
+          </a:prstGeom>
+          <a:solidFill>
+            <a:srgbClr val="00B050"/>
+          </a:solidFill>
+          <a:ln>
+            <a:solidFill>
+              <a:schemeClr val="bg1"/>
+            </a:solidFill>
+          </a:ln>
+        </p:spPr>
+        <p:style>
+          <a:lnRef idx="2">
+            <a:schemeClr val="dk1"/>
+          </a:lnRef>
+          <a:fillRef idx="1">
+            <a:schemeClr val="lt1"/>
+          </a:fillRef>
+          <a:effectRef idx="0">
+            <a:schemeClr val="dk1"/>
+          </a:effectRef>
+          <a:fontRef idx="minor">
+            <a:schemeClr val="dk1"/>
+          </a:fontRef>
+        </p:style>
+        <p:txBody>
+          <a:bodyPr rtlCol="0" anchor="ctr"/>
+          <a:lstStyle/>
+          <a:p>
+            <a:pPr algn="ctr"/>
+            <a:endParaRPr kumimoji="1" lang="en-US" altLang="ja-JP" dirty="0"/>
+          </a:p>
+        </p:txBody>
+      </p:sp>
+      <p:sp>
+        <p:nvSpPr>
+          <p:cNvPr id="12" name="楕円 11">
+            <a:extLst>
+              <a:ext uri="{FF2B5EF4-FFF2-40B4-BE49-F238E27FC236}">
+                <a16:creationId xmlns:a16="http://schemas.microsoft.com/office/drawing/2014/main" id="{E12D51AD-85A1-4B20-8981-4120106B530A}"/>
+              </a:ext>
+            </a:extLst>
+          </p:cNvPr>
+          <p:cNvSpPr/>
+          <p:nvPr/>
+        </p:nvSpPr>
+        <p:spPr>
+          <a:xfrm>
+            <a:off x="1185445" y="486278"/>
+            <a:ext cx="876300" cy="876300"/>
+          </a:xfrm>
+          <a:prstGeom prst="ellipse">
+            <a:avLst/>
+          </a:prstGeom>
+          <a:noFill/>
+          <a:ln>
+            <a:solidFill>
+              <a:schemeClr val="bg1"/>
+            </a:solidFill>
+          </a:ln>
+        </p:spPr>
+        <p:style>
+          <a:lnRef idx="2">
+            <a:schemeClr val="dk1"/>
+          </a:lnRef>
+          <a:fillRef idx="1">
+            <a:schemeClr val="lt1"/>
+          </a:fillRef>
+          <a:effectRef idx="0">
+            <a:schemeClr val="dk1"/>
+          </a:effectRef>
+          <a:fontRef idx="minor">
+            <a:schemeClr val="dk1"/>
+          </a:fontRef>
+        </p:style>
+        <p:txBody>
+          <a:bodyPr rtlCol="0" anchor="ctr"/>
+          <a:lstStyle/>
+          <a:p>
+            <a:pPr algn="ctr"/>
+            <a:endParaRPr kumimoji="1" lang="ja-JP" altLang="en-US"/>
+          </a:p>
+        </p:txBody>
+      </p:sp>
     </p:spTree>
     <p:extLst>
       <p:ext uri="{BB962C8B-B14F-4D97-AF65-F5344CB8AC3E}">
@@ -23150,6 +29245,102 @@
   <p:clrMapOvr>
     <a:masterClrMapping/>
   </p:clrMapOvr>
+  <p:timing>
+    <p:tnLst>
+      <p:par>
+        <p:cTn id="1" dur="indefinite" restart="never" nodeType="tmRoot">
+          <p:childTnLst>
+            <p:seq concurrent="1" nextAc="seek">
+              <p:cTn id="2" dur="indefinite" nodeType="mainSeq">
+                <p:childTnLst>
+                  <p:par>
+                    <p:cTn id="3" fill="hold">
+                      <p:stCondLst>
+                        <p:cond delay="indefinite"/>
+                        <p:cond evt="onBegin" delay="0">
+                          <p:tn val="2"/>
+                        </p:cond>
+                      </p:stCondLst>
+                      <p:childTnLst>
+                        <p:par>
+                          <p:cTn id="4" fill="hold">
+                            <p:stCondLst>
+                              <p:cond delay="0"/>
+                            </p:stCondLst>
+                            <p:childTnLst>
+                              <p:par>
+                                <p:cTn id="5" presetID="21" presetClass="exit" presetSubtype="1" repeatCount="indefinite" fill="hold" grpId="0" nodeType="afterEffect">
+                                  <p:stCondLst>
+                                    <p:cond delay="3000"/>
+                                  </p:stCondLst>
+                                  <p:endCondLst>
+                                    <p:cond evt="onNext" delay="0">
+                                      <p:tgtEl>
+                                        <p:sldTgt/>
+                                      </p:tgtEl>
+                                    </p:cond>
+                                  </p:endCondLst>
+                                  <p:childTnLst>
+                                    <p:animEffect transition="out" filter="wheel(1)">
+                                      <p:cBhvr>
+                                        <p:cTn id="6" dur="15000"/>
+                                        <p:tgtEl>
+                                          <p:spTgt spid="11"/>
+                                        </p:tgtEl>
+                                      </p:cBhvr>
+                                    </p:animEffect>
+                                    <p:set>
+                                      <p:cBhvr>
+                                        <p:cTn id="7" dur="1" fill="hold">
+                                          <p:stCondLst>
+                                            <p:cond delay="14999"/>
+                                          </p:stCondLst>
+                                        </p:cTn>
+                                        <p:tgtEl>
+                                          <p:spTgt spid="11"/>
+                                        </p:tgtEl>
+                                        <p:attrNameLst>
+                                          <p:attrName>style.visibility</p:attrName>
+                                        </p:attrNameLst>
+                                      </p:cBhvr>
+                                      <p:to>
+                                        <p:strVal val="hidden"/>
+                                      </p:to>
+                                    </p:set>
+                                  </p:childTnLst>
+                                </p:cTn>
+                              </p:par>
+                            </p:childTnLst>
+                          </p:cTn>
+                        </p:par>
+                      </p:childTnLst>
+                    </p:cTn>
+                  </p:par>
+                </p:childTnLst>
+              </p:cTn>
+              <p:prevCondLst>
+                <p:cond evt="onPrev" delay="0">
+                  <p:tgtEl>
+                    <p:sldTgt/>
+                  </p:tgtEl>
+                </p:cond>
+              </p:prevCondLst>
+              <p:nextCondLst>
+                <p:cond evt="onNext" delay="0">
+                  <p:tgtEl>
+                    <p:sldTgt/>
+                  </p:tgtEl>
+                </p:cond>
+              </p:nextCondLst>
+            </p:seq>
+          </p:childTnLst>
+        </p:cTn>
+      </p:par>
+    </p:tnLst>
+    <p:bldLst>
+      <p:bldP spid="11" grpId="0" animBg="1"/>
+    </p:bldLst>
+  </p:timing>
 </p:sld>
 </file>
 
@@ -23640,6 +29831,160 @@
           </a:extLst>
         </p:spPr>
       </p:pic>
+      <p:sp>
+        <p:nvSpPr>
+          <p:cNvPr id="8" name="楕円 7">
+            <a:extLst>
+              <a:ext uri="{FF2B5EF4-FFF2-40B4-BE49-F238E27FC236}">
+                <a16:creationId xmlns:a16="http://schemas.microsoft.com/office/drawing/2014/main" id="{5E351E69-5A21-4FDA-9851-D186FDEDD8D5}"/>
+              </a:ext>
+            </a:extLst>
+          </p:cNvPr>
+          <p:cNvSpPr/>
+          <p:nvPr/>
+        </p:nvSpPr>
+        <p:spPr>
+          <a:xfrm>
+            <a:off x="1185445" y="486278"/>
+            <a:ext cx="876300" cy="876300"/>
+          </a:xfrm>
+          <a:prstGeom prst="ellipse">
+            <a:avLst/>
+          </a:prstGeom>
+          <a:solidFill>
+            <a:srgbClr val="FF0000"/>
+          </a:solidFill>
+          <a:ln>
+            <a:solidFill>
+              <a:schemeClr val="bg1"/>
+            </a:solidFill>
+          </a:ln>
+        </p:spPr>
+        <p:style>
+          <a:lnRef idx="2">
+            <a:schemeClr val="dk1"/>
+          </a:lnRef>
+          <a:fillRef idx="1">
+            <a:schemeClr val="lt1"/>
+          </a:fillRef>
+          <a:effectRef idx="0">
+            <a:schemeClr val="dk1"/>
+          </a:effectRef>
+          <a:fontRef idx="minor">
+            <a:schemeClr val="dk1"/>
+          </a:fontRef>
+        </p:style>
+        <p:txBody>
+          <a:bodyPr rtlCol="0" anchor="ctr"/>
+          <a:lstStyle/>
+          <a:p>
+            <a:pPr algn="ctr"/>
+            <a:endParaRPr kumimoji="1" lang="ja-JP" altLang="en-US"/>
+          </a:p>
+        </p:txBody>
+      </p:sp>
+      <p:sp>
+        <p:nvSpPr>
+          <p:cNvPr id="10" name="楕円 9">
+            <a:extLst>
+              <a:ext uri="{FF2B5EF4-FFF2-40B4-BE49-F238E27FC236}">
+                <a16:creationId xmlns:a16="http://schemas.microsoft.com/office/drawing/2014/main" id="{125172BA-6926-4A31-A3BA-1800CD5F1359}"/>
+              </a:ext>
+            </a:extLst>
+          </p:cNvPr>
+          <p:cNvSpPr/>
+          <p:nvPr/>
+        </p:nvSpPr>
+        <p:spPr>
+          <a:xfrm>
+            <a:off x="1185445" y="486278"/>
+            <a:ext cx="876300" cy="876300"/>
+          </a:xfrm>
+          <a:prstGeom prst="ellipse">
+            <a:avLst/>
+          </a:prstGeom>
+          <a:solidFill>
+            <a:srgbClr val="00B050"/>
+          </a:solidFill>
+          <a:ln>
+            <a:solidFill>
+              <a:schemeClr val="bg1"/>
+            </a:solidFill>
+          </a:ln>
+        </p:spPr>
+        <p:style>
+          <a:lnRef idx="2">
+            <a:schemeClr val="dk1"/>
+          </a:lnRef>
+          <a:fillRef idx="1">
+            <a:schemeClr val="lt1"/>
+          </a:fillRef>
+          <a:effectRef idx="0">
+            <a:schemeClr val="dk1"/>
+          </a:effectRef>
+          <a:fontRef idx="minor">
+            <a:schemeClr val="dk1"/>
+          </a:fontRef>
+        </p:style>
+        <p:txBody>
+          <a:bodyPr rtlCol="0" anchor="ctr"/>
+          <a:lstStyle/>
+          <a:p>
+            <a:pPr algn="ctr"/>
+            <a:endParaRPr kumimoji="1" lang="en-US" altLang="ja-JP" dirty="0"/>
+          </a:p>
+        </p:txBody>
+      </p:sp>
+      <p:sp>
+        <p:nvSpPr>
+          <p:cNvPr id="11" name="楕円 10">
+            <a:extLst>
+              <a:ext uri="{FF2B5EF4-FFF2-40B4-BE49-F238E27FC236}">
+                <a16:creationId xmlns:a16="http://schemas.microsoft.com/office/drawing/2014/main" id="{CF3B5396-4FD4-4D5E-9B72-C65C7F41F944}"/>
+              </a:ext>
+            </a:extLst>
+          </p:cNvPr>
+          <p:cNvSpPr/>
+          <p:nvPr/>
+        </p:nvSpPr>
+        <p:spPr>
+          <a:xfrm>
+            <a:off x="1185445" y="486278"/>
+            <a:ext cx="876300" cy="876300"/>
+          </a:xfrm>
+          <a:prstGeom prst="ellipse">
+            <a:avLst/>
+          </a:prstGeom>
+          <a:noFill/>
+          <a:ln>
+            <a:solidFill>
+              <a:schemeClr val="bg1"/>
+            </a:solidFill>
+          </a:ln>
+        </p:spPr>
+        <p:style>
+          <a:lnRef idx="2">
+            <a:schemeClr val="dk1"/>
+          </a:lnRef>
+          <a:fillRef idx="1">
+            <a:schemeClr val="lt1"/>
+          </a:fillRef>
+          <a:effectRef idx="0">
+            <a:schemeClr val="dk1"/>
+          </a:effectRef>
+          <a:fontRef idx="minor">
+            <a:schemeClr val="dk1"/>
+          </a:fontRef>
+        </p:style>
+        <p:txBody>
+          <a:bodyPr rtlCol="0" anchor="ctr"/>
+          <a:lstStyle/>
+          <a:p>
+            <a:pPr algn="ctr"/>
+            <a:endParaRPr kumimoji="1" lang="ja-JP" altLang="en-US"/>
+          </a:p>
+        </p:txBody>
+      </p:sp>
     </p:spTree>
     <p:extLst>
       <p:ext uri="{BB962C8B-B14F-4D97-AF65-F5344CB8AC3E}">
@@ -23650,6 +29995,102 @@
   <p:clrMapOvr>
     <a:masterClrMapping/>
   </p:clrMapOvr>
+  <p:timing>
+    <p:tnLst>
+      <p:par>
+        <p:cTn id="1" dur="indefinite" restart="never" nodeType="tmRoot">
+          <p:childTnLst>
+            <p:seq concurrent="1" nextAc="seek">
+              <p:cTn id="2" dur="indefinite" nodeType="mainSeq">
+                <p:childTnLst>
+                  <p:par>
+                    <p:cTn id="3" fill="hold">
+                      <p:stCondLst>
+                        <p:cond delay="indefinite"/>
+                        <p:cond evt="onBegin" delay="0">
+                          <p:tn val="2"/>
+                        </p:cond>
+                      </p:stCondLst>
+                      <p:childTnLst>
+                        <p:par>
+                          <p:cTn id="4" fill="hold">
+                            <p:stCondLst>
+                              <p:cond delay="0"/>
+                            </p:stCondLst>
+                            <p:childTnLst>
+                              <p:par>
+                                <p:cTn id="5" presetID="21" presetClass="exit" presetSubtype="1" repeatCount="indefinite" fill="hold" grpId="0" nodeType="afterEffect">
+                                  <p:stCondLst>
+                                    <p:cond delay="3000"/>
+                                  </p:stCondLst>
+                                  <p:endCondLst>
+                                    <p:cond evt="onNext" delay="0">
+                                      <p:tgtEl>
+                                        <p:sldTgt/>
+                                      </p:tgtEl>
+                                    </p:cond>
+                                  </p:endCondLst>
+                                  <p:childTnLst>
+                                    <p:animEffect transition="out" filter="wheel(1)">
+                                      <p:cBhvr>
+                                        <p:cTn id="6" dur="15000"/>
+                                        <p:tgtEl>
+                                          <p:spTgt spid="10"/>
+                                        </p:tgtEl>
+                                      </p:cBhvr>
+                                    </p:animEffect>
+                                    <p:set>
+                                      <p:cBhvr>
+                                        <p:cTn id="7" dur="1" fill="hold">
+                                          <p:stCondLst>
+                                            <p:cond delay="14999"/>
+                                          </p:stCondLst>
+                                        </p:cTn>
+                                        <p:tgtEl>
+                                          <p:spTgt spid="10"/>
+                                        </p:tgtEl>
+                                        <p:attrNameLst>
+                                          <p:attrName>style.visibility</p:attrName>
+                                        </p:attrNameLst>
+                                      </p:cBhvr>
+                                      <p:to>
+                                        <p:strVal val="hidden"/>
+                                      </p:to>
+                                    </p:set>
+                                  </p:childTnLst>
+                                </p:cTn>
+                              </p:par>
+                            </p:childTnLst>
+                          </p:cTn>
+                        </p:par>
+                      </p:childTnLst>
+                    </p:cTn>
+                  </p:par>
+                </p:childTnLst>
+              </p:cTn>
+              <p:prevCondLst>
+                <p:cond evt="onPrev" delay="0">
+                  <p:tgtEl>
+                    <p:sldTgt/>
+                  </p:tgtEl>
+                </p:cond>
+              </p:prevCondLst>
+              <p:nextCondLst>
+                <p:cond evt="onNext" delay="0">
+                  <p:tgtEl>
+                    <p:sldTgt/>
+                  </p:tgtEl>
+                </p:cond>
+              </p:nextCondLst>
+            </p:seq>
+          </p:childTnLst>
+        </p:cTn>
+      </p:par>
+    </p:tnLst>
+    <p:bldLst>
+      <p:bldP spid="10" grpId="0" animBg="1"/>
+    </p:bldLst>
+  </p:timing>
 </p:sld>
 </file>
 
@@ -24140,6 +30581,160 @@
           </a:extLst>
         </p:spPr>
       </p:pic>
+      <p:sp>
+        <p:nvSpPr>
+          <p:cNvPr id="8" name="楕円 7">
+            <a:extLst>
+              <a:ext uri="{FF2B5EF4-FFF2-40B4-BE49-F238E27FC236}">
+                <a16:creationId xmlns:a16="http://schemas.microsoft.com/office/drawing/2014/main" id="{06E8D497-E657-4B33-81D9-E180843822B9}"/>
+              </a:ext>
+            </a:extLst>
+          </p:cNvPr>
+          <p:cNvSpPr/>
+          <p:nvPr/>
+        </p:nvSpPr>
+        <p:spPr>
+          <a:xfrm>
+            <a:off x="1185445" y="486278"/>
+            <a:ext cx="876300" cy="876300"/>
+          </a:xfrm>
+          <a:prstGeom prst="ellipse">
+            <a:avLst/>
+          </a:prstGeom>
+          <a:solidFill>
+            <a:srgbClr val="FF0000"/>
+          </a:solidFill>
+          <a:ln>
+            <a:solidFill>
+              <a:schemeClr val="bg1"/>
+            </a:solidFill>
+          </a:ln>
+        </p:spPr>
+        <p:style>
+          <a:lnRef idx="2">
+            <a:schemeClr val="dk1"/>
+          </a:lnRef>
+          <a:fillRef idx="1">
+            <a:schemeClr val="lt1"/>
+          </a:fillRef>
+          <a:effectRef idx="0">
+            <a:schemeClr val="dk1"/>
+          </a:effectRef>
+          <a:fontRef idx="minor">
+            <a:schemeClr val="dk1"/>
+          </a:fontRef>
+        </p:style>
+        <p:txBody>
+          <a:bodyPr rtlCol="0" anchor="ctr"/>
+          <a:lstStyle/>
+          <a:p>
+            <a:pPr algn="ctr"/>
+            <a:endParaRPr kumimoji="1" lang="ja-JP" altLang="en-US"/>
+          </a:p>
+        </p:txBody>
+      </p:sp>
+      <p:sp>
+        <p:nvSpPr>
+          <p:cNvPr id="9" name="楕円 8">
+            <a:extLst>
+              <a:ext uri="{FF2B5EF4-FFF2-40B4-BE49-F238E27FC236}">
+                <a16:creationId xmlns:a16="http://schemas.microsoft.com/office/drawing/2014/main" id="{EC4E19E0-12DF-4DC7-9098-07707B9C458F}"/>
+              </a:ext>
+            </a:extLst>
+          </p:cNvPr>
+          <p:cNvSpPr/>
+          <p:nvPr/>
+        </p:nvSpPr>
+        <p:spPr>
+          <a:xfrm>
+            <a:off x="1185445" y="486278"/>
+            <a:ext cx="876300" cy="876300"/>
+          </a:xfrm>
+          <a:prstGeom prst="ellipse">
+            <a:avLst/>
+          </a:prstGeom>
+          <a:solidFill>
+            <a:srgbClr val="00B050"/>
+          </a:solidFill>
+          <a:ln>
+            <a:solidFill>
+              <a:schemeClr val="bg1"/>
+            </a:solidFill>
+          </a:ln>
+        </p:spPr>
+        <p:style>
+          <a:lnRef idx="2">
+            <a:schemeClr val="dk1"/>
+          </a:lnRef>
+          <a:fillRef idx="1">
+            <a:schemeClr val="lt1"/>
+          </a:fillRef>
+          <a:effectRef idx="0">
+            <a:schemeClr val="dk1"/>
+          </a:effectRef>
+          <a:fontRef idx="minor">
+            <a:schemeClr val="dk1"/>
+          </a:fontRef>
+        </p:style>
+        <p:txBody>
+          <a:bodyPr rtlCol="0" anchor="ctr"/>
+          <a:lstStyle/>
+          <a:p>
+            <a:pPr algn="ctr"/>
+            <a:endParaRPr kumimoji="1" lang="en-US" altLang="ja-JP" dirty="0"/>
+          </a:p>
+        </p:txBody>
+      </p:sp>
+      <p:sp>
+        <p:nvSpPr>
+          <p:cNvPr id="10" name="楕円 9">
+            <a:extLst>
+              <a:ext uri="{FF2B5EF4-FFF2-40B4-BE49-F238E27FC236}">
+                <a16:creationId xmlns:a16="http://schemas.microsoft.com/office/drawing/2014/main" id="{4C074788-CA4B-45C1-B1CE-E4E9A0477806}"/>
+              </a:ext>
+            </a:extLst>
+          </p:cNvPr>
+          <p:cNvSpPr/>
+          <p:nvPr/>
+        </p:nvSpPr>
+        <p:spPr>
+          <a:xfrm>
+            <a:off x="1185445" y="486278"/>
+            <a:ext cx="876300" cy="876300"/>
+          </a:xfrm>
+          <a:prstGeom prst="ellipse">
+            <a:avLst/>
+          </a:prstGeom>
+          <a:noFill/>
+          <a:ln>
+            <a:solidFill>
+              <a:schemeClr val="bg1"/>
+            </a:solidFill>
+          </a:ln>
+        </p:spPr>
+        <p:style>
+          <a:lnRef idx="2">
+            <a:schemeClr val="dk1"/>
+          </a:lnRef>
+          <a:fillRef idx="1">
+            <a:schemeClr val="lt1"/>
+          </a:fillRef>
+          <a:effectRef idx="0">
+            <a:schemeClr val="dk1"/>
+          </a:effectRef>
+          <a:fontRef idx="minor">
+            <a:schemeClr val="dk1"/>
+          </a:fontRef>
+        </p:style>
+        <p:txBody>
+          <a:bodyPr rtlCol="0" anchor="ctr"/>
+          <a:lstStyle/>
+          <a:p>
+            <a:pPr algn="ctr"/>
+            <a:endParaRPr kumimoji="1" lang="ja-JP" altLang="en-US"/>
+          </a:p>
+        </p:txBody>
+      </p:sp>
     </p:spTree>
     <p:extLst>
       <p:ext uri="{BB962C8B-B14F-4D97-AF65-F5344CB8AC3E}">
@@ -24150,6 +30745,102 @@
   <p:clrMapOvr>
     <a:masterClrMapping/>
   </p:clrMapOvr>
+  <p:timing>
+    <p:tnLst>
+      <p:par>
+        <p:cTn id="1" dur="indefinite" restart="never" nodeType="tmRoot">
+          <p:childTnLst>
+            <p:seq concurrent="1" nextAc="seek">
+              <p:cTn id="2" dur="indefinite" nodeType="mainSeq">
+                <p:childTnLst>
+                  <p:par>
+                    <p:cTn id="3" fill="hold">
+                      <p:stCondLst>
+                        <p:cond delay="indefinite"/>
+                        <p:cond evt="onBegin" delay="0">
+                          <p:tn val="2"/>
+                        </p:cond>
+                      </p:stCondLst>
+                      <p:childTnLst>
+                        <p:par>
+                          <p:cTn id="4" fill="hold">
+                            <p:stCondLst>
+                              <p:cond delay="0"/>
+                            </p:stCondLst>
+                            <p:childTnLst>
+                              <p:par>
+                                <p:cTn id="5" presetID="21" presetClass="exit" presetSubtype="1" repeatCount="indefinite" fill="hold" grpId="0" nodeType="afterEffect">
+                                  <p:stCondLst>
+                                    <p:cond delay="3000"/>
+                                  </p:stCondLst>
+                                  <p:endCondLst>
+                                    <p:cond evt="onNext" delay="0">
+                                      <p:tgtEl>
+                                        <p:sldTgt/>
+                                      </p:tgtEl>
+                                    </p:cond>
+                                  </p:endCondLst>
+                                  <p:childTnLst>
+                                    <p:animEffect transition="out" filter="wheel(1)">
+                                      <p:cBhvr>
+                                        <p:cTn id="6" dur="15000"/>
+                                        <p:tgtEl>
+                                          <p:spTgt spid="9"/>
+                                        </p:tgtEl>
+                                      </p:cBhvr>
+                                    </p:animEffect>
+                                    <p:set>
+                                      <p:cBhvr>
+                                        <p:cTn id="7" dur="1" fill="hold">
+                                          <p:stCondLst>
+                                            <p:cond delay="14999"/>
+                                          </p:stCondLst>
+                                        </p:cTn>
+                                        <p:tgtEl>
+                                          <p:spTgt spid="9"/>
+                                        </p:tgtEl>
+                                        <p:attrNameLst>
+                                          <p:attrName>style.visibility</p:attrName>
+                                        </p:attrNameLst>
+                                      </p:cBhvr>
+                                      <p:to>
+                                        <p:strVal val="hidden"/>
+                                      </p:to>
+                                    </p:set>
+                                  </p:childTnLst>
+                                </p:cTn>
+                              </p:par>
+                            </p:childTnLst>
+                          </p:cTn>
+                        </p:par>
+                      </p:childTnLst>
+                    </p:cTn>
+                  </p:par>
+                </p:childTnLst>
+              </p:cTn>
+              <p:prevCondLst>
+                <p:cond evt="onPrev" delay="0">
+                  <p:tgtEl>
+                    <p:sldTgt/>
+                  </p:tgtEl>
+                </p:cond>
+              </p:prevCondLst>
+              <p:nextCondLst>
+                <p:cond evt="onNext" delay="0">
+                  <p:tgtEl>
+                    <p:sldTgt/>
+                  </p:tgtEl>
+                </p:cond>
+              </p:nextCondLst>
+            </p:seq>
+          </p:childTnLst>
+        </p:cTn>
+      </p:par>
+    </p:tnLst>
+    <p:bldLst>
+      <p:bldP spid="9" grpId="0" animBg="1"/>
+    </p:bldLst>
+  </p:timing>
 </p:sld>
 </file>
 
@@ -24837,6 +31528,160 @@
           </a:extLst>
         </p:spPr>
       </p:pic>
+      <p:sp>
+        <p:nvSpPr>
+          <p:cNvPr id="7" name="楕円 6">
+            <a:extLst>
+              <a:ext uri="{FF2B5EF4-FFF2-40B4-BE49-F238E27FC236}">
+                <a16:creationId xmlns:a16="http://schemas.microsoft.com/office/drawing/2014/main" id="{F08120F0-EE5A-4DDF-ACFB-08151C0512D5}"/>
+              </a:ext>
+            </a:extLst>
+          </p:cNvPr>
+          <p:cNvSpPr/>
+          <p:nvPr/>
+        </p:nvSpPr>
+        <p:spPr>
+          <a:xfrm>
+            <a:off x="1185445" y="486278"/>
+            <a:ext cx="876300" cy="876300"/>
+          </a:xfrm>
+          <a:prstGeom prst="ellipse">
+            <a:avLst/>
+          </a:prstGeom>
+          <a:solidFill>
+            <a:srgbClr val="FF0000"/>
+          </a:solidFill>
+          <a:ln>
+            <a:solidFill>
+              <a:schemeClr val="bg1"/>
+            </a:solidFill>
+          </a:ln>
+        </p:spPr>
+        <p:style>
+          <a:lnRef idx="2">
+            <a:schemeClr val="dk1"/>
+          </a:lnRef>
+          <a:fillRef idx="1">
+            <a:schemeClr val="lt1"/>
+          </a:fillRef>
+          <a:effectRef idx="0">
+            <a:schemeClr val="dk1"/>
+          </a:effectRef>
+          <a:fontRef idx="minor">
+            <a:schemeClr val="dk1"/>
+          </a:fontRef>
+        </p:style>
+        <p:txBody>
+          <a:bodyPr rtlCol="0" anchor="ctr"/>
+          <a:lstStyle/>
+          <a:p>
+            <a:pPr algn="ctr"/>
+            <a:endParaRPr kumimoji="1" lang="ja-JP" altLang="en-US"/>
+          </a:p>
+        </p:txBody>
+      </p:sp>
+      <p:sp>
+        <p:nvSpPr>
+          <p:cNvPr id="8" name="楕円 7">
+            <a:extLst>
+              <a:ext uri="{FF2B5EF4-FFF2-40B4-BE49-F238E27FC236}">
+                <a16:creationId xmlns:a16="http://schemas.microsoft.com/office/drawing/2014/main" id="{ED79FB03-529A-40E4-9167-9D16A71A0450}"/>
+              </a:ext>
+            </a:extLst>
+          </p:cNvPr>
+          <p:cNvSpPr/>
+          <p:nvPr/>
+        </p:nvSpPr>
+        <p:spPr>
+          <a:xfrm>
+            <a:off x="1185445" y="486278"/>
+            <a:ext cx="876300" cy="876300"/>
+          </a:xfrm>
+          <a:prstGeom prst="ellipse">
+            <a:avLst/>
+          </a:prstGeom>
+          <a:solidFill>
+            <a:srgbClr val="00B050"/>
+          </a:solidFill>
+          <a:ln>
+            <a:solidFill>
+              <a:schemeClr val="bg1"/>
+            </a:solidFill>
+          </a:ln>
+        </p:spPr>
+        <p:style>
+          <a:lnRef idx="2">
+            <a:schemeClr val="dk1"/>
+          </a:lnRef>
+          <a:fillRef idx="1">
+            <a:schemeClr val="lt1"/>
+          </a:fillRef>
+          <a:effectRef idx="0">
+            <a:schemeClr val="dk1"/>
+          </a:effectRef>
+          <a:fontRef idx="minor">
+            <a:schemeClr val="dk1"/>
+          </a:fontRef>
+        </p:style>
+        <p:txBody>
+          <a:bodyPr rtlCol="0" anchor="ctr"/>
+          <a:lstStyle/>
+          <a:p>
+            <a:pPr algn="ctr"/>
+            <a:endParaRPr kumimoji="1" lang="en-US" altLang="ja-JP" dirty="0"/>
+          </a:p>
+        </p:txBody>
+      </p:sp>
+      <p:sp>
+        <p:nvSpPr>
+          <p:cNvPr id="10" name="楕円 9">
+            <a:extLst>
+              <a:ext uri="{FF2B5EF4-FFF2-40B4-BE49-F238E27FC236}">
+                <a16:creationId xmlns:a16="http://schemas.microsoft.com/office/drawing/2014/main" id="{DDF95077-3FAF-4E95-875B-5E5097DB76CA}"/>
+              </a:ext>
+            </a:extLst>
+          </p:cNvPr>
+          <p:cNvSpPr/>
+          <p:nvPr/>
+        </p:nvSpPr>
+        <p:spPr>
+          <a:xfrm>
+            <a:off x="1185445" y="486278"/>
+            <a:ext cx="876300" cy="876300"/>
+          </a:xfrm>
+          <a:prstGeom prst="ellipse">
+            <a:avLst/>
+          </a:prstGeom>
+          <a:noFill/>
+          <a:ln>
+            <a:solidFill>
+              <a:schemeClr val="bg1"/>
+            </a:solidFill>
+          </a:ln>
+        </p:spPr>
+        <p:style>
+          <a:lnRef idx="2">
+            <a:schemeClr val="dk1"/>
+          </a:lnRef>
+          <a:fillRef idx="1">
+            <a:schemeClr val="lt1"/>
+          </a:fillRef>
+          <a:effectRef idx="0">
+            <a:schemeClr val="dk1"/>
+          </a:effectRef>
+          <a:fontRef idx="minor">
+            <a:schemeClr val="dk1"/>
+          </a:fontRef>
+        </p:style>
+        <p:txBody>
+          <a:bodyPr rtlCol="0" anchor="ctr"/>
+          <a:lstStyle/>
+          <a:p>
+            <a:pPr algn="ctr"/>
+            <a:endParaRPr kumimoji="1" lang="ja-JP" altLang="en-US"/>
+          </a:p>
+        </p:txBody>
+      </p:sp>
     </p:spTree>
     <p:extLst>
       <p:ext uri="{BB962C8B-B14F-4D97-AF65-F5344CB8AC3E}">
@@ -24847,6 +31692,102 @@
   <p:clrMapOvr>
     <a:masterClrMapping/>
   </p:clrMapOvr>
+  <p:timing>
+    <p:tnLst>
+      <p:par>
+        <p:cTn id="1" dur="indefinite" restart="never" nodeType="tmRoot">
+          <p:childTnLst>
+            <p:seq concurrent="1" nextAc="seek">
+              <p:cTn id="2" dur="indefinite" nodeType="mainSeq">
+                <p:childTnLst>
+                  <p:par>
+                    <p:cTn id="3" fill="hold">
+                      <p:stCondLst>
+                        <p:cond delay="indefinite"/>
+                        <p:cond evt="onBegin" delay="0">
+                          <p:tn val="2"/>
+                        </p:cond>
+                      </p:stCondLst>
+                      <p:childTnLst>
+                        <p:par>
+                          <p:cTn id="4" fill="hold">
+                            <p:stCondLst>
+                              <p:cond delay="0"/>
+                            </p:stCondLst>
+                            <p:childTnLst>
+                              <p:par>
+                                <p:cTn id="5" presetID="21" presetClass="exit" presetSubtype="1" repeatCount="indefinite" fill="hold" grpId="0" nodeType="afterEffect">
+                                  <p:stCondLst>
+                                    <p:cond delay="3000"/>
+                                  </p:stCondLst>
+                                  <p:endCondLst>
+                                    <p:cond evt="onNext" delay="0">
+                                      <p:tgtEl>
+                                        <p:sldTgt/>
+                                      </p:tgtEl>
+                                    </p:cond>
+                                  </p:endCondLst>
+                                  <p:childTnLst>
+                                    <p:animEffect transition="out" filter="wheel(1)">
+                                      <p:cBhvr>
+                                        <p:cTn id="6" dur="15000"/>
+                                        <p:tgtEl>
+                                          <p:spTgt spid="8"/>
+                                        </p:tgtEl>
+                                      </p:cBhvr>
+                                    </p:animEffect>
+                                    <p:set>
+                                      <p:cBhvr>
+                                        <p:cTn id="7" dur="1" fill="hold">
+                                          <p:stCondLst>
+                                            <p:cond delay="14999"/>
+                                          </p:stCondLst>
+                                        </p:cTn>
+                                        <p:tgtEl>
+                                          <p:spTgt spid="8"/>
+                                        </p:tgtEl>
+                                        <p:attrNameLst>
+                                          <p:attrName>style.visibility</p:attrName>
+                                        </p:attrNameLst>
+                                      </p:cBhvr>
+                                      <p:to>
+                                        <p:strVal val="hidden"/>
+                                      </p:to>
+                                    </p:set>
+                                  </p:childTnLst>
+                                </p:cTn>
+                              </p:par>
+                            </p:childTnLst>
+                          </p:cTn>
+                        </p:par>
+                      </p:childTnLst>
+                    </p:cTn>
+                  </p:par>
+                </p:childTnLst>
+              </p:cTn>
+              <p:prevCondLst>
+                <p:cond evt="onPrev" delay="0">
+                  <p:tgtEl>
+                    <p:sldTgt/>
+                  </p:tgtEl>
+                </p:cond>
+              </p:prevCondLst>
+              <p:nextCondLst>
+                <p:cond evt="onNext" delay="0">
+                  <p:tgtEl>
+                    <p:sldTgt/>
+                  </p:tgtEl>
+                </p:cond>
+              </p:nextCondLst>
+            </p:seq>
+          </p:childTnLst>
+        </p:cTn>
+      </p:par>
+    </p:tnLst>
+    <p:bldLst>
+      <p:bldP spid="8" grpId="0" animBg="1"/>
+    </p:bldLst>
+  </p:timing>
 </p:sld>
 </file>
 
@@ -25105,22 +32046,7 @@
               <a:rPr kumimoji="1" lang="en-US" altLang="ja-JP" sz="9600" dirty="0">
                 <a:latin typeface="Impact" panose="020B0806030902050204" pitchFamily="34" charset="0"/>
               </a:rPr>
-              <a:t>What day is</a:t>
-            </a:r>
-          </a:p>
-          <a:p>
-            <a:pPr algn="ctr"/>
-            <a:r>
-              <a:rPr kumimoji="1" lang="ja-JP" altLang="en-US" sz="9600" dirty="0">
-                <a:latin typeface="Impact" panose="020B0806030902050204" pitchFamily="34" charset="0"/>
-              </a:rPr>
-              <a:t>火曜日</a:t>
-            </a:r>
-            <a:r>
-              <a:rPr kumimoji="1" lang="en-US" altLang="ja-JP" sz="9600" dirty="0">
-                <a:latin typeface="Impact" panose="020B0806030902050204" pitchFamily="34" charset="0"/>
-              </a:rPr>
-              <a:t>?</a:t>
+              <a:t>Can you say all the weathers?</a:t>
             </a:r>
             <a:endParaRPr kumimoji="1" lang="ja-JP" altLang="en-US" sz="9600" dirty="0">
               <a:latin typeface="Impact" panose="020B0806030902050204" pitchFamily="34" charset="0"/>
@@ -25317,6 +32243,160 @@
           </a:p>
         </p:txBody>
       </p:sp>
+      <p:sp>
+        <p:nvSpPr>
+          <p:cNvPr id="8" name="楕円 7">
+            <a:extLst>
+              <a:ext uri="{FF2B5EF4-FFF2-40B4-BE49-F238E27FC236}">
+                <a16:creationId xmlns:a16="http://schemas.microsoft.com/office/drawing/2014/main" id="{60962FEC-58B8-465B-A907-8851AF9D2F9F}"/>
+              </a:ext>
+            </a:extLst>
+          </p:cNvPr>
+          <p:cNvSpPr/>
+          <p:nvPr/>
+        </p:nvSpPr>
+        <p:spPr>
+          <a:xfrm>
+            <a:off x="1185445" y="486278"/>
+            <a:ext cx="876300" cy="876300"/>
+          </a:xfrm>
+          <a:prstGeom prst="ellipse">
+            <a:avLst/>
+          </a:prstGeom>
+          <a:solidFill>
+            <a:srgbClr val="FF0000"/>
+          </a:solidFill>
+          <a:ln>
+            <a:solidFill>
+              <a:schemeClr val="bg1"/>
+            </a:solidFill>
+          </a:ln>
+        </p:spPr>
+        <p:style>
+          <a:lnRef idx="2">
+            <a:schemeClr val="dk1"/>
+          </a:lnRef>
+          <a:fillRef idx="1">
+            <a:schemeClr val="lt1"/>
+          </a:fillRef>
+          <a:effectRef idx="0">
+            <a:schemeClr val="dk1"/>
+          </a:effectRef>
+          <a:fontRef idx="minor">
+            <a:schemeClr val="dk1"/>
+          </a:fontRef>
+        </p:style>
+        <p:txBody>
+          <a:bodyPr rtlCol="0" anchor="ctr"/>
+          <a:lstStyle/>
+          <a:p>
+            <a:pPr algn="ctr"/>
+            <a:endParaRPr kumimoji="1" lang="ja-JP" altLang="en-US"/>
+          </a:p>
+        </p:txBody>
+      </p:sp>
+      <p:sp>
+        <p:nvSpPr>
+          <p:cNvPr id="9" name="楕円 8">
+            <a:extLst>
+              <a:ext uri="{FF2B5EF4-FFF2-40B4-BE49-F238E27FC236}">
+                <a16:creationId xmlns:a16="http://schemas.microsoft.com/office/drawing/2014/main" id="{C3689518-0A3E-443A-A583-243E25438B45}"/>
+              </a:ext>
+            </a:extLst>
+          </p:cNvPr>
+          <p:cNvSpPr/>
+          <p:nvPr/>
+        </p:nvSpPr>
+        <p:spPr>
+          <a:xfrm>
+            <a:off x="1185445" y="486278"/>
+            <a:ext cx="876300" cy="876300"/>
+          </a:xfrm>
+          <a:prstGeom prst="ellipse">
+            <a:avLst/>
+          </a:prstGeom>
+          <a:solidFill>
+            <a:srgbClr val="00B050"/>
+          </a:solidFill>
+          <a:ln>
+            <a:solidFill>
+              <a:schemeClr val="bg1"/>
+            </a:solidFill>
+          </a:ln>
+        </p:spPr>
+        <p:style>
+          <a:lnRef idx="2">
+            <a:schemeClr val="dk1"/>
+          </a:lnRef>
+          <a:fillRef idx="1">
+            <a:schemeClr val="lt1"/>
+          </a:fillRef>
+          <a:effectRef idx="0">
+            <a:schemeClr val="dk1"/>
+          </a:effectRef>
+          <a:fontRef idx="minor">
+            <a:schemeClr val="dk1"/>
+          </a:fontRef>
+        </p:style>
+        <p:txBody>
+          <a:bodyPr rtlCol="0" anchor="ctr"/>
+          <a:lstStyle/>
+          <a:p>
+            <a:pPr algn="ctr"/>
+            <a:endParaRPr kumimoji="1" lang="en-US" altLang="ja-JP" dirty="0"/>
+          </a:p>
+        </p:txBody>
+      </p:sp>
+      <p:sp>
+        <p:nvSpPr>
+          <p:cNvPr id="10" name="楕円 9">
+            <a:extLst>
+              <a:ext uri="{FF2B5EF4-FFF2-40B4-BE49-F238E27FC236}">
+                <a16:creationId xmlns:a16="http://schemas.microsoft.com/office/drawing/2014/main" id="{5772B756-7AD1-462A-BAF6-D7C8F9C684D0}"/>
+              </a:ext>
+            </a:extLst>
+          </p:cNvPr>
+          <p:cNvSpPr/>
+          <p:nvPr/>
+        </p:nvSpPr>
+        <p:spPr>
+          <a:xfrm>
+            <a:off x="1185445" y="486278"/>
+            <a:ext cx="876300" cy="876300"/>
+          </a:xfrm>
+          <a:prstGeom prst="ellipse">
+            <a:avLst/>
+          </a:prstGeom>
+          <a:noFill/>
+          <a:ln>
+            <a:solidFill>
+              <a:schemeClr val="bg1"/>
+            </a:solidFill>
+          </a:ln>
+        </p:spPr>
+        <p:style>
+          <a:lnRef idx="2">
+            <a:schemeClr val="dk1"/>
+          </a:lnRef>
+          <a:fillRef idx="1">
+            <a:schemeClr val="lt1"/>
+          </a:fillRef>
+          <a:effectRef idx="0">
+            <a:schemeClr val="dk1"/>
+          </a:effectRef>
+          <a:fontRef idx="minor">
+            <a:schemeClr val="dk1"/>
+          </a:fontRef>
+        </p:style>
+        <p:txBody>
+          <a:bodyPr rtlCol="0" anchor="ctr"/>
+          <a:lstStyle/>
+          <a:p>
+            <a:pPr algn="ctr"/>
+            <a:endParaRPr kumimoji="1" lang="ja-JP" altLang="en-US"/>
+          </a:p>
+        </p:txBody>
+      </p:sp>
     </p:spTree>
     <p:extLst>
       <p:ext uri="{BB962C8B-B14F-4D97-AF65-F5344CB8AC3E}">
@@ -25327,6 +32407,102 @@
   <p:clrMapOvr>
     <a:masterClrMapping/>
   </p:clrMapOvr>
+  <p:timing>
+    <p:tnLst>
+      <p:par>
+        <p:cTn id="1" dur="indefinite" restart="never" nodeType="tmRoot">
+          <p:childTnLst>
+            <p:seq concurrent="1" nextAc="seek">
+              <p:cTn id="2" dur="indefinite" nodeType="mainSeq">
+                <p:childTnLst>
+                  <p:par>
+                    <p:cTn id="3" fill="hold">
+                      <p:stCondLst>
+                        <p:cond delay="indefinite"/>
+                        <p:cond evt="onBegin" delay="0">
+                          <p:tn val="2"/>
+                        </p:cond>
+                      </p:stCondLst>
+                      <p:childTnLst>
+                        <p:par>
+                          <p:cTn id="4" fill="hold">
+                            <p:stCondLst>
+                              <p:cond delay="0"/>
+                            </p:stCondLst>
+                            <p:childTnLst>
+                              <p:par>
+                                <p:cTn id="5" presetID="21" presetClass="exit" presetSubtype="1" repeatCount="indefinite" fill="hold" grpId="0" nodeType="afterEffect">
+                                  <p:stCondLst>
+                                    <p:cond delay="3000"/>
+                                  </p:stCondLst>
+                                  <p:endCondLst>
+                                    <p:cond evt="onNext" delay="0">
+                                      <p:tgtEl>
+                                        <p:sldTgt/>
+                                      </p:tgtEl>
+                                    </p:cond>
+                                  </p:endCondLst>
+                                  <p:childTnLst>
+                                    <p:animEffect transition="out" filter="wheel(1)">
+                                      <p:cBhvr>
+                                        <p:cTn id="6" dur="15000"/>
+                                        <p:tgtEl>
+                                          <p:spTgt spid="9"/>
+                                        </p:tgtEl>
+                                      </p:cBhvr>
+                                    </p:animEffect>
+                                    <p:set>
+                                      <p:cBhvr>
+                                        <p:cTn id="7" dur="1" fill="hold">
+                                          <p:stCondLst>
+                                            <p:cond delay="14999"/>
+                                          </p:stCondLst>
+                                        </p:cTn>
+                                        <p:tgtEl>
+                                          <p:spTgt spid="9"/>
+                                        </p:tgtEl>
+                                        <p:attrNameLst>
+                                          <p:attrName>style.visibility</p:attrName>
+                                        </p:attrNameLst>
+                                      </p:cBhvr>
+                                      <p:to>
+                                        <p:strVal val="hidden"/>
+                                      </p:to>
+                                    </p:set>
+                                  </p:childTnLst>
+                                </p:cTn>
+                              </p:par>
+                            </p:childTnLst>
+                          </p:cTn>
+                        </p:par>
+                      </p:childTnLst>
+                    </p:cTn>
+                  </p:par>
+                </p:childTnLst>
+              </p:cTn>
+              <p:prevCondLst>
+                <p:cond evt="onPrev" delay="0">
+                  <p:tgtEl>
+                    <p:sldTgt/>
+                  </p:tgtEl>
+                </p:cond>
+              </p:prevCondLst>
+              <p:nextCondLst>
+                <p:cond evt="onNext" delay="0">
+                  <p:tgtEl>
+                    <p:sldTgt/>
+                  </p:tgtEl>
+                </p:cond>
+              </p:nextCondLst>
+            </p:seq>
+          </p:childTnLst>
+        </p:cTn>
+      </p:par>
+    </p:tnLst>
+    <p:bldLst>
+      <p:bldP spid="9" grpId="0" animBg="1"/>
+    </p:bldLst>
+  </p:timing>
 </p:sld>
 </file>
 
@@ -25362,7 +32538,7 @@
         <p:spPr>
           <a:xfrm>
             <a:off x="1082842" y="405068"/>
-            <a:ext cx="10170694" cy="4524315"/>
+            <a:ext cx="10170694" cy="3416320"/>
           </a:xfrm>
           <a:prstGeom prst="rect">
             <a:avLst/>
@@ -25382,24 +32558,24 @@
               </a:rPr>
               <a:t>Greeting</a:t>
             </a:r>
-          </a:p>
-          <a:p>
-            <a:pPr algn="ctr"/>
             <a:endParaRPr kumimoji="1" lang="en-US" altLang="ja-JP" sz="9600" dirty="0">
               <a:latin typeface="Impact" panose="020B0806030902050204" pitchFamily="34" charset="0"/>
             </a:endParaRPr>
           </a:p>
           <a:p>
             <a:pPr algn="ctr"/>
-            <a:r>
-              <a:rPr kumimoji="1" lang="en-US" altLang="ja-JP" sz="9600" dirty="0">
+            <a:endParaRPr kumimoji="1" lang="en-US" altLang="ja-JP" sz="6000" dirty="0">
+              <a:latin typeface="Impact" panose="020B0806030902050204" pitchFamily="34" charset="0"/>
+            </a:endParaRPr>
+          </a:p>
+          <a:p>
+            <a:pPr algn="ctr"/>
+            <a:r>
+              <a:rPr kumimoji="1" lang="en-US" altLang="ja-JP" sz="6000" dirty="0">
                 <a:latin typeface="Impact" panose="020B0806030902050204" pitchFamily="34" charset="0"/>
               </a:rPr>
-              <a:t>Tuesday</a:t>
-            </a:r>
-            <a:endParaRPr kumimoji="1" lang="ja-JP" altLang="en-US" sz="9600" dirty="0">
-              <a:latin typeface="Impact" panose="020B0806030902050204" pitchFamily="34" charset="0"/>
-            </a:endParaRPr>
+              <a:t>Sunny, Cloudy, Snowy, Rainy</a:t>
+            </a:r>
           </a:p>
         </p:txBody>
       </p:sp>
@@ -25750,7 +32926,7 @@
         <p:spPr>
           <a:xfrm>
             <a:off x="1130967" y="453199"/>
-            <a:ext cx="10202779" cy="4576001"/>
+            <a:ext cx="10202779" cy="4524315"/>
           </a:xfrm>
           <a:prstGeom prst="rect">
             <a:avLst/>
@@ -25777,11 +32953,165 @@
               <a:rPr kumimoji="1" lang="en-US" altLang="ja-JP" sz="9600" dirty="0">
                 <a:latin typeface="Impact" panose="020B0806030902050204" pitchFamily="34" charset="0"/>
               </a:rPr>
-              <a:t>How do you spell my name?</a:t>
+              <a:t>Can you say all the days in the week?</a:t>
             </a:r>
             <a:endParaRPr kumimoji="1" lang="ja-JP" altLang="en-US" sz="9600" dirty="0">
               <a:latin typeface="Impact" panose="020B0806030902050204" pitchFamily="34" charset="0"/>
             </a:endParaRPr>
+          </a:p>
+        </p:txBody>
+      </p:sp>
+      <p:sp>
+        <p:nvSpPr>
+          <p:cNvPr id="10" name="楕円 9">
+            <a:extLst>
+              <a:ext uri="{FF2B5EF4-FFF2-40B4-BE49-F238E27FC236}">
+                <a16:creationId xmlns:a16="http://schemas.microsoft.com/office/drawing/2014/main" id="{91C5A2D9-2C49-4506-AE1C-7A14CB4E8B65}"/>
+              </a:ext>
+            </a:extLst>
+          </p:cNvPr>
+          <p:cNvSpPr/>
+          <p:nvPr/>
+        </p:nvSpPr>
+        <p:spPr>
+          <a:xfrm>
+            <a:off x="1185445" y="486278"/>
+            <a:ext cx="876300" cy="876300"/>
+          </a:xfrm>
+          <a:prstGeom prst="ellipse">
+            <a:avLst/>
+          </a:prstGeom>
+          <a:solidFill>
+            <a:srgbClr val="FF0000"/>
+          </a:solidFill>
+          <a:ln>
+            <a:solidFill>
+              <a:schemeClr val="bg1"/>
+            </a:solidFill>
+          </a:ln>
+        </p:spPr>
+        <p:style>
+          <a:lnRef idx="2">
+            <a:schemeClr val="dk1"/>
+          </a:lnRef>
+          <a:fillRef idx="1">
+            <a:schemeClr val="lt1"/>
+          </a:fillRef>
+          <a:effectRef idx="0">
+            <a:schemeClr val="dk1"/>
+          </a:effectRef>
+          <a:fontRef idx="minor">
+            <a:schemeClr val="dk1"/>
+          </a:fontRef>
+        </p:style>
+        <p:txBody>
+          <a:bodyPr rtlCol="0" anchor="ctr"/>
+          <a:lstStyle/>
+          <a:p>
+            <a:pPr algn="ctr"/>
+            <a:endParaRPr kumimoji="1" lang="ja-JP" altLang="en-US"/>
+          </a:p>
+        </p:txBody>
+      </p:sp>
+      <p:sp>
+        <p:nvSpPr>
+          <p:cNvPr id="11" name="楕円 10">
+            <a:extLst>
+              <a:ext uri="{FF2B5EF4-FFF2-40B4-BE49-F238E27FC236}">
+                <a16:creationId xmlns:a16="http://schemas.microsoft.com/office/drawing/2014/main" id="{9467DE50-27CA-4707-BEC5-5EAF97352549}"/>
+              </a:ext>
+            </a:extLst>
+          </p:cNvPr>
+          <p:cNvSpPr/>
+          <p:nvPr/>
+        </p:nvSpPr>
+        <p:spPr>
+          <a:xfrm>
+            <a:off x="1185445" y="486278"/>
+            <a:ext cx="876300" cy="876300"/>
+          </a:xfrm>
+          <a:prstGeom prst="ellipse">
+            <a:avLst/>
+          </a:prstGeom>
+          <a:solidFill>
+            <a:srgbClr val="00B050"/>
+          </a:solidFill>
+          <a:ln>
+            <a:solidFill>
+              <a:schemeClr val="bg1"/>
+            </a:solidFill>
+          </a:ln>
+        </p:spPr>
+        <p:style>
+          <a:lnRef idx="2">
+            <a:schemeClr val="dk1"/>
+          </a:lnRef>
+          <a:fillRef idx="1">
+            <a:schemeClr val="lt1"/>
+          </a:fillRef>
+          <a:effectRef idx="0">
+            <a:schemeClr val="dk1"/>
+          </a:effectRef>
+          <a:fontRef idx="minor">
+            <a:schemeClr val="dk1"/>
+          </a:fontRef>
+        </p:style>
+        <p:txBody>
+          <a:bodyPr rtlCol="0" anchor="ctr"/>
+          <a:lstStyle/>
+          <a:p>
+            <a:pPr algn="ctr"/>
+            <a:endParaRPr kumimoji="1" lang="en-US" altLang="ja-JP" dirty="0"/>
+          </a:p>
+        </p:txBody>
+      </p:sp>
+      <p:sp>
+        <p:nvSpPr>
+          <p:cNvPr id="12" name="楕円 11">
+            <a:extLst>
+              <a:ext uri="{FF2B5EF4-FFF2-40B4-BE49-F238E27FC236}">
+                <a16:creationId xmlns:a16="http://schemas.microsoft.com/office/drawing/2014/main" id="{DFB8C473-4CE9-4850-82BB-744730F3680F}"/>
+              </a:ext>
+            </a:extLst>
+          </p:cNvPr>
+          <p:cNvSpPr/>
+          <p:nvPr/>
+        </p:nvSpPr>
+        <p:spPr>
+          <a:xfrm>
+            <a:off x="1185445" y="486278"/>
+            <a:ext cx="876300" cy="876300"/>
+          </a:xfrm>
+          <a:prstGeom prst="ellipse">
+            <a:avLst/>
+          </a:prstGeom>
+          <a:noFill/>
+          <a:ln>
+            <a:solidFill>
+              <a:schemeClr val="bg1"/>
+            </a:solidFill>
+          </a:ln>
+        </p:spPr>
+        <p:style>
+          <a:lnRef idx="2">
+            <a:schemeClr val="dk1"/>
+          </a:lnRef>
+          <a:fillRef idx="1">
+            <a:schemeClr val="lt1"/>
+          </a:fillRef>
+          <a:effectRef idx="0">
+            <a:schemeClr val="dk1"/>
+          </a:effectRef>
+          <a:fontRef idx="minor">
+            <a:schemeClr val="dk1"/>
+          </a:fontRef>
+        </p:style>
+        <p:txBody>
+          <a:bodyPr rtlCol="0" anchor="ctr"/>
+          <a:lstStyle/>
+          <a:p>
+            <a:pPr algn="ctr"/>
+            <a:endParaRPr kumimoji="1" lang="ja-JP" altLang="en-US"/>
           </a:p>
         </p:txBody>
       </p:sp>
@@ -25795,6 +33125,102 @@
   <p:clrMapOvr>
     <a:masterClrMapping/>
   </p:clrMapOvr>
+  <p:timing>
+    <p:tnLst>
+      <p:par>
+        <p:cTn id="1" dur="indefinite" restart="never" nodeType="tmRoot">
+          <p:childTnLst>
+            <p:seq concurrent="1" nextAc="seek">
+              <p:cTn id="2" dur="indefinite" nodeType="mainSeq">
+                <p:childTnLst>
+                  <p:par>
+                    <p:cTn id="3" fill="hold">
+                      <p:stCondLst>
+                        <p:cond delay="indefinite"/>
+                        <p:cond evt="onBegin" delay="0">
+                          <p:tn val="2"/>
+                        </p:cond>
+                      </p:stCondLst>
+                      <p:childTnLst>
+                        <p:par>
+                          <p:cTn id="4" fill="hold">
+                            <p:stCondLst>
+                              <p:cond delay="0"/>
+                            </p:stCondLst>
+                            <p:childTnLst>
+                              <p:par>
+                                <p:cTn id="5" presetID="21" presetClass="exit" presetSubtype="1" repeatCount="indefinite" fill="hold" grpId="0" nodeType="afterEffect">
+                                  <p:stCondLst>
+                                    <p:cond delay="3000"/>
+                                  </p:stCondLst>
+                                  <p:endCondLst>
+                                    <p:cond evt="onNext" delay="0">
+                                      <p:tgtEl>
+                                        <p:sldTgt/>
+                                      </p:tgtEl>
+                                    </p:cond>
+                                  </p:endCondLst>
+                                  <p:childTnLst>
+                                    <p:animEffect transition="out" filter="wheel(1)">
+                                      <p:cBhvr>
+                                        <p:cTn id="6" dur="15000"/>
+                                        <p:tgtEl>
+                                          <p:spTgt spid="11"/>
+                                        </p:tgtEl>
+                                      </p:cBhvr>
+                                    </p:animEffect>
+                                    <p:set>
+                                      <p:cBhvr>
+                                        <p:cTn id="7" dur="1" fill="hold">
+                                          <p:stCondLst>
+                                            <p:cond delay="14999"/>
+                                          </p:stCondLst>
+                                        </p:cTn>
+                                        <p:tgtEl>
+                                          <p:spTgt spid="11"/>
+                                        </p:tgtEl>
+                                        <p:attrNameLst>
+                                          <p:attrName>style.visibility</p:attrName>
+                                        </p:attrNameLst>
+                                      </p:cBhvr>
+                                      <p:to>
+                                        <p:strVal val="hidden"/>
+                                      </p:to>
+                                    </p:set>
+                                  </p:childTnLst>
+                                </p:cTn>
+                              </p:par>
+                            </p:childTnLst>
+                          </p:cTn>
+                        </p:par>
+                      </p:childTnLst>
+                    </p:cTn>
+                  </p:par>
+                </p:childTnLst>
+              </p:cTn>
+              <p:prevCondLst>
+                <p:cond evt="onPrev" delay="0">
+                  <p:tgtEl>
+                    <p:sldTgt/>
+                  </p:tgtEl>
+                </p:cond>
+              </p:prevCondLst>
+              <p:nextCondLst>
+                <p:cond evt="onNext" delay="0">
+                  <p:tgtEl>
+                    <p:sldTgt/>
+                  </p:tgtEl>
+                </p:cond>
+              </p:nextCondLst>
+            </p:seq>
+          </p:childTnLst>
+        </p:cTn>
+      </p:par>
+    </p:tnLst>
+    <p:bldLst>
+      <p:bldP spid="11" grpId="0" animBg="1"/>
+    </p:bldLst>
+  </p:timing>
 </p:sld>
 </file>
 
